--- a/docs/Lectures/Week06/Lecture06_GEOG2475_Classification_V2.pptx
+++ b/docs/Lectures/Week06/Lecture06_GEOG2475_Classification_V2.pptx
@@ -11,7 +11,7 @@
     <p:sldMasterId id="2147483734" r:id="rId7"/>
   </p:sldMasterIdLst>
   <p:notesMasterIdLst>
-    <p:notesMasterId r:id="rId34"/>
+    <p:notesMasterId r:id="rId35"/>
   </p:notesMasterIdLst>
   <p:sldIdLst>
     <p:sldId id="914" r:id="rId8"/>
@@ -39,7 +39,8 @@
     <p:sldId id="368" r:id="rId30"/>
     <p:sldId id="636" r:id="rId31"/>
     <p:sldId id="1648" r:id="rId32"/>
-    <p:sldId id="270" r:id="rId33"/>
+    <p:sldId id="1658" r:id="rId33"/>
+    <p:sldId id="1659" r:id="rId34"/>
   </p:sldIdLst>
   <p:sldSz cx="8229600" cy="5143500"/>
   <p:notesSz cx="7010400" cy="9296400"/>
@@ -157,6 +158,2782 @@
 </p:presentation>
 </file>
 
+<file path=ppt/diagrams/colors1.xml><?xml version="1.0" encoding="utf-8"?>
+<dgm:colorsDef xmlns:dgm="http://schemas.openxmlformats.org/drawingml/2006/diagram" xmlns:a="http://schemas.openxmlformats.org/drawingml/2006/main" uniqueId="urn:microsoft.com/office/officeart/2018/5/colors/Iconchunking_neutralicon_colorful1">
+  <dgm:title val=""/>
+  <dgm:desc val=""/>
+  <dgm:catLst>
+    <dgm:cat type="colorful" pri="10100"/>
+  </dgm:catLst>
+  <dgm:styleLbl name="node0">
+    <dgm:fillClrLst meth="repeat">
+      <a:schemeClr val="accent1"/>
+    </dgm:fillClrLst>
+    <dgm:linClrLst meth="repeat">
+      <a:schemeClr val="lt1"/>
+    </dgm:linClrLst>
+    <dgm:effectClrLst/>
+    <dgm:txLinClrLst/>
+    <dgm:txFillClrLst/>
+    <dgm:txEffectClrLst/>
+  </dgm:styleLbl>
+  <dgm:styleLbl name="node1">
+    <dgm:fillClrLst meth="repeat">
+      <a:schemeClr val="bg1"/>
+    </dgm:fillClrLst>
+    <dgm:linClrLst meth="repeat">
+      <a:schemeClr val="lt1">
+        <a:alpha val="0"/>
+      </a:schemeClr>
+    </dgm:linClrLst>
+    <dgm:effectClrLst/>
+    <dgm:txLinClrLst/>
+    <dgm:txFillClrLst meth="repeat">
+      <a:schemeClr val="dk1"/>
+    </dgm:txFillClrLst>
+    <dgm:txEffectClrLst/>
+  </dgm:styleLbl>
+  <dgm:styleLbl name="alignNode1">
+    <dgm:fillClrLst meth="repeat">
+      <a:schemeClr val="accent2"/>
+      <a:schemeClr val="accent3"/>
+      <a:schemeClr val="accent4"/>
+      <a:schemeClr val="accent5"/>
+      <a:schemeClr val="accent6"/>
+    </dgm:fillClrLst>
+    <dgm:linClrLst meth="repeat">
+      <a:schemeClr val="accent2"/>
+      <a:schemeClr val="accent3"/>
+      <a:schemeClr val="accent4"/>
+      <a:schemeClr val="accent5"/>
+      <a:schemeClr val="accent6"/>
+    </dgm:linClrLst>
+    <dgm:effectClrLst/>
+    <dgm:txLinClrLst/>
+    <dgm:txFillClrLst/>
+    <dgm:txEffectClrLst/>
+  </dgm:styleLbl>
+  <dgm:styleLbl name="lnNode1">
+    <dgm:fillClrLst meth="repeat">
+      <a:schemeClr val="accent2"/>
+      <a:schemeClr val="accent3"/>
+      <a:schemeClr val="accent4"/>
+      <a:schemeClr val="accent5"/>
+      <a:schemeClr val="accent6"/>
+    </dgm:fillClrLst>
+    <dgm:linClrLst meth="repeat">
+      <a:schemeClr val="lt1"/>
+    </dgm:linClrLst>
+    <dgm:effectClrLst/>
+    <dgm:txLinClrLst/>
+    <dgm:txFillClrLst/>
+    <dgm:txEffectClrLst/>
+  </dgm:styleLbl>
+  <dgm:styleLbl name="vennNode1">
+    <dgm:fillClrLst meth="repeat">
+      <a:schemeClr val="accent2">
+        <a:alpha val="50000"/>
+      </a:schemeClr>
+      <a:schemeClr val="accent3">
+        <a:alpha val="50000"/>
+      </a:schemeClr>
+      <a:schemeClr val="accent4">
+        <a:alpha val="50000"/>
+      </a:schemeClr>
+      <a:schemeClr val="accent5">
+        <a:alpha val="50000"/>
+      </a:schemeClr>
+      <a:schemeClr val="accent6">
+        <a:alpha val="50000"/>
+      </a:schemeClr>
+    </dgm:fillClrLst>
+    <dgm:linClrLst meth="repeat">
+      <a:schemeClr val="lt1"/>
+    </dgm:linClrLst>
+    <dgm:effectClrLst/>
+    <dgm:txLinClrLst/>
+    <dgm:txFillClrLst/>
+    <dgm:txEffectClrLst/>
+  </dgm:styleLbl>
+  <dgm:styleLbl name="node2">
+    <dgm:fillClrLst>
+      <a:schemeClr val="accent2"/>
+    </dgm:fillClrLst>
+    <dgm:linClrLst meth="repeat">
+      <a:schemeClr val="lt1"/>
+    </dgm:linClrLst>
+    <dgm:effectClrLst/>
+    <dgm:txLinClrLst/>
+    <dgm:txFillClrLst/>
+    <dgm:txEffectClrLst/>
+  </dgm:styleLbl>
+  <dgm:styleLbl name="node3">
+    <dgm:fillClrLst>
+      <a:schemeClr val="accent3"/>
+    </dgm:fillClrLst>
+    <dgm:linClrLst meth="repeat">
+      <a:schemeClr val="lt1"/>
+    </dgm:linClrLst>
+    <dgm:effectClrLst/>
+    <dgm:txLinClrLst/>
+    <dgm:txFillClrLst/>
+    <dgm:txEffectClrLst/>
+  </dgm:styleLbl>
+  <dgm:styleLbl name="node4">
+    <dgm:fillClrLst>
+      <a:schemeClr val="accent4"/>
+    </dgm:fillClrLst>
+    <dgm:linClrLst meth="repeat">
+      <a:schemeClr val="lt1"/>
+    </dgm:linClrLst>
+    <dgm:effectClrLst/>
+    <dgm:txLinClrLst/>
+    <dgm:txFillClrLst/>
+    <dgm:txEffectClrLst/>
+  </dgm:styleLbl>
+  <dgm:styleLbl name="fgImgPlace1">
+    <dgm:fillClrLst meth="repeat">
+      <a:schemeClr val="accent2">
+        <a:tint val="50000"/>
+      </a:schemeClr>
+      <a:schemeClr val="accent3">
+        <a:tint val="50000"/>
+      </a:schemeClr>
+      <a:schemeClr val="accent4">
+        <a:tint val="50000"/>
+      </a:schemeClr>
+      <a:schemeClr val="accent5">
+        <a:tint val="50000"/>
+      </a:schemeClr>
+      <a:schemeClr val="accent6">
+        <a:tint val="50000"/>
+      </a:schemeClr>
+    </dgm:fillClrLst>
+    <dgm:linClrLst meth="repeat">
+      <a:schemeClr val="lt1"/>
+    </dgm:linClrLst>
+    <dgm:effectClrLst/>
+    <dgm:txLinClrLst/>
+    <dgm:txFillClrLst meth="repeat">
+      <a:schemeClr val="lt1"/>
+    </dgm:txFillClrLst>
+    <dgm:txEffectClrLst/>
+  </dgm:styleLbl>
+  <dgm:styleLbl name="alignImgPlace1">
+    <dgm:fillClrLst>
+      <a:schemeClr val="accent1">
+        <a:tint val="50000"/>
+      </a:schemeClr>
+      <a:schemeClr val="accent2">
+        <a:tint val="20000"/>
+      </a:schemeClr>
+    </dgm:fillClrLst>
+    <dgm:linClrLst meth="repeat">
+      <a:schemeClr val="lt1"/>
+    </dgm:linClrLst>
+    <dgm:effectClrLst/>
+    <dgm:txLinClrLst/>
+    <dgm:txFillClrLst meth="repeat">
+      <a:schemeClr val="lt1"/>
+    </dgm:txFillClrLst>
+    <dgm:txEffectClrLst/>
+  </dgm:styleLbl>
+  <dgm:styleLbl name="bgImgPlace1">
+    <dgm:fillClrLst>
+      <a:schemeClr val="accent1">
+        <a:tint val="50000"/>
+      </a:schemeClr>
+      <a:schemeClr val="accent2">
+        <a:tint val="20000"/>
+      </a:schemeClr>
+    </dgm:fillClrLst>
+    <dgm:linClrLst meth="repeat">
+      <a:schemeClr val="lt1"/>
+    </dgm:linClrLst>
+    <dgm:effectClrLst/>
+    <dgm:txLinClrLst/>
+    <dgm:txFillClrLst meth="repeat">
+      <a:schemeClr val="lt1"/>
+    </dgm:txFillClrLst>
+    <dgm:txEffectClrLst/>
+  </dgm:styleLbl>
+  <dgm:styleLbl name="sibTrans2D1">
+    <dgm:fillClrLst meth="repeat">
+      <a:schemeClr val="accent2"/>
+      <a:schemeClr val="accent3"/>
+      <a:schemeClr val="accent4"/>
+      <a:schemeClr val="accent5"/>
+      <a:schemeClr val="accent6"/>
+    </dgm:fillClrLst>
+    <dgm:linClrLst meth="cycle">
+      <a:schemeClr val="lt1"/>
+    </dgm:linClrLst>
+    <dgm:effectClrLst/>
+    <dgm:txLinClrLst/>
+    <dgm:txFillClrLst/>
+    <dgm:txEffectClrLst/>
+  </dgm:styleLbl>
+  <dgm:styleLbl name="fgSibTrans2D1">
+    <dgm:fillClrLst meth="repeat">
+      <a:schemeClr val="accent2"/>
+      <a:schemeClr val="accent3"/>
+      <a:schemeClr val="accent4"/>
+      <a:schemeClr val="accent5"/>
+      <a:schemeClr val="accent6"/>
+    </dgm:fillClrLst>
+    <dgm:linClrLst meth="cycle">
+      <a:schemeClr val="lt1"/>
+    </dgm:linClrLst>
+    <dgm:effectClrLst/>
+    <dgm:txLinClrLst/>
+    <dgm:txFillClrLst meth="repeat">
+      <a:schemeClr val="lt1"/>
+    </dgm:txFillClrLst>
+    <dgm:txEffectClrLst/>
+  </dgm:styleLbl>
+  <dgm:styleLbl name="bgSibTrans2D1">
+    <dgm:fillClrLst meth="repeat">
+      <a:schemeClr val="accent2"/>
+      <a:schemeClr val="accent3"/>
+      <a:schemeClr val="accent4"/>
+      <a:schemeClr val="accent5"/>
+      <a:schemeClr val="accent6"/>
+    </dgm:fillClrLst>
+    <dgm:linClrLst meth="cycle">
+      <a:schemeClr val="lt1"/>
+    </dgm:linClrLst>
+    <dgm:effectClrLst/>
+    <dgm:txLinClrLst/>
+    <dgm:txFillClrLst meth="repeat">
+      <a:schemeClr val="lt1"/>
+    </dgm:txFillClrLst>
+    <dgm:txEffectClrLst/>
+  </dgm:styleLbl>
+  <dgm:styleLbl name="sibTrans1D1">
+    <dgm:fillClrLst meth="repeat">
+      <a:schemeClr val="accent2"/>
+      <a:schemeClr val="accent3"/>
+      <a:schemeClr val="accent4"/>
+      <a:schemeClr val="accent5"/>
+      <a:schemeClr val="accent6"/>
+    </dgm:fillClrLst>
+    <dgm:linClrLst meth="repeat">
+      <a:schemeClr val="accent2"/>
+      <a:schemeClr val="accent3"/>
+      <a:schemeClr val="accent4"/>
+      <a:schemeClr val="accent5"/>
+      <a:schemeClr val="accent6"/>
+    </dgm:linClrLst>
+    <dgm:effectClrLst/>
+    <dgm:txLinClrLst/>
+    <dgm:txFillClrLst meth="repeat">
+      <a:schemeClr val="tx1"/>
+    </dgm:txFillClrLst>
+    <dgm:txEffectClrLst/>
+  </dgm:styleLbl>
+  <dgm:styleLbl name="callout">
+    <dgm:fillClrLst meth="repeat">
+      <a:schemeClr val="accent2"/>
+    </dgm:fillClrLst>
+    <dgm:linClrLst meth="repeat">
+      <a:schemeClr val="accent2">
+        <a:tint val="50000"/>
+      </a:schemeClr>
+    </dgm:linClrLst>
+    <dgm:effectClrLst/>
+    <dgm:txLinClrLst/>
+    <dgm:txFillClrLst meth="repeat">
+      <a:schemeClr val="tx1"/>
+    </dgm:txFillClrLst>
+    <dgm:txEffectClrLst/>
+  </dgm:styleLbl>
+  <dgm:styleLbl name="asst0">
+    <dgm:fillClrLst meth="repeat">
+      <a:schemeClr val="accent1"/>
+    </dgm:fillClrLst>
+    <dgm:linClrLst meth="repeat">
+      <a:schemeClr val="lt1"/>
+    </dgm:linClrLst>
+    <dgm:effectClrLst/>
+    <dgm:txLinClrLst/>
+    <dgm:txFillClrLst/>
+    <dgm:txEffectClrLst/>
+  </dgm:styleLbl>
+  <dgm:styleLbl name="asst1">
+    <dgm:fillClrLst meth="repeat">
+      <a:schemeClr val="accent2"/>
+    </dgm:fillClrLst>
+    <dgm:linClrLst meth="repeat">
+      <a:schemeClr val="lt1"/>
+    </dgm:linClrLst>
+    <dgm:effectClrLst/>
+    <dgm:txLinClrLst/>
+    <dgm:txFillClrLst/>
+    <dgm:txEffectClrLst/>
+  </dgm:styleLbl>
+  <dgm:styleLbl name="asst2">
+    <dgm:fillClrLst>
+      <a:schemeClr val="accent3"/>
+    </dgm:fillClrLst>
+    <dgm:linClrLst meth="repeat">
+      <a:schemeClr val="lt1"/>
+    </dgm:linClrLst>
+    <dgm:effectClrLst/>
+    <dgm:txLinClrLst/>
+    <dgm:txFillClrLst/>
+    <dgm:txEffectClrLst/>
+  </dgm:styleLbl>
+  <dgm:styleLbl name="asst3">
+    <dgm:fillClrLst>
+      <a:schemeClr val="accent4"/>
+    </dgm:fillClrLst>
+    <dgm:linClrLst meth="repeat">
+      <a:schemeClr val="lt1"/>
+    </dgm:linClrLst>
+    <dgm:effectClrLst/>
+    <dgm:txLinClrLst/>
+    <dgm:txFillClrLst/>
+    <dgm:txEffectClrLst/>
+  </dgm:styleLbl>
+  <dgm:styleLbl name="asst4">
+    <dgm:fillClrLst>
+      <a:schemeClr val="accent5"/>
+    </dgm:fillClrLst>
+    <dgm:linClrLst meth="repeat">
+      <a:schemeClr val="lt1"/>
+    </dgm:linClrLst>
+    <dgm:effectClrLst/>
+    <dgm:txLinClrLst/>
+    <dgm:txFillClrLst/>
+    <dgm:txEffectClrLst/>
+  </dgm:styleLbl>
+  <dgm:styleLbl name="parChTrans2D1">
+    <dgm:fillClrLst meth="repeat">
+      <a:schemeClr val="accent2"/>
+    </dgm:fillClrLst>
+    <dgm:linClrLst meth="repeat">
+      <a:schemeClr val="lt1"/>
+    </dgm:linClrLst>
+    <dgm:effectClrLst/>
+    <dgm:txLinClrLst/>
+    <dgm:txFillClrLst meth="repeat">
+      <a:schemeClr val="lt1"/>
+    </dgm:txFillClrLst>
+    <dgm:txEffectClrLst/>
+  </dgm:styleLbl>
+  <dgm:styleLbl name="parChTrans2D2">
+    <dgm:fillClrLst meth="repeat">
+      <a:schemeClr val="accent3"/>
+    </dgm:fillClrLst>
+    <dgm:linClrLst meth="repeat">
+      <a:schemeClr val="lt1"/>
+    </dgm:linClrLst>
+    <dgm:effectClrLst/>
+    <dgm:txLinClrLst/>
+    <dgm:txFillClrLst/>
+    <dgm:txEffectClrLst/>
+  </dgm:styleLbl>
+  <dgm:styleLbl name="parChTrans2D3">
+    <dgm:fillClrLst meth="repeat">
+      <a:schemeClr val="accent4"/>
+    </dgm:fillClrLst>
+    <dgm:linClrLst meth="repeat">
+      <a:schemeClr val="lt1"/>
+    </dgm:linClrLst>
+    <dgm:effectClrLst/>
+    <dgm:txLinClrLst/>
+    <dgm:txFillClrLst/>
+    <dgm:txEffectClrLst/>
+  </dgm:styleLbl>
+  <dgm:styleLbl name="parChTrans2D4">
+    <dgm:fillClrLst meth="repeat">
+      <a:schemeClr val="accent5"/>
+    </dgm:fillClrLst>
+    <dgm:linClrLst meth="repeat">
+      <a:schemeClr val="lt1"/>
+    </dgm:linClrLst>
+    <dgm:effectClrLst/>
+    <dgm:txLinClrLst/>
+    <dgm:txFillClrLst meth="repeat">
+      <a:schemeClr val="lt1"/>
+    </dgm:txFillClrLst>
+    <dgm:txEffectClrLst/>
+  </dgm:styleLbl>
+  <dgm:styleLbl name="parChTrans1D1">
+    <dgm:fillClrLst meth="repeat">
+      <a:schemeClr val="accent2"/>
+    </dgm:fillClrLst>
+    <dgm:linClrLst meth="repeat">
+      <a:schemeClr val="accent1"/>
+    </dgm:linClrLst>
+    <dgm:effectClrLst/>
+    <dgm:txLinClrLst/>
+    <dgm:txFillClrLst meth="repeat">
+      <a:schemeClr val="tx1"/>
+    </dgm:txFillClrLst>
+    <dgm:txEffectClrLst/>
+  </dgm:styleLbl>
+  <dgm:styleLbl name="parChTrans1D2">
+    <dgm:fillClrLst meth="repeat">
+      <a:schemeClr val="accent3">
+        <a:tint val="90000"/>
+      </a:schemeClr>
+    </dgm:fillClrLst>
+    <dgm:linClrLst meth="repeat">
+      <a:schemeClr val="accent2"/>
+    </dgm:linClrLst>
+    <dgm:effectClrLst/>
+    <dgm:txLinClrLst/>
+    <dgm:txFillClrLst meth="repeat">
+      <a:schemeClr val="tx1"/>
+    </dgm:txFillClrLst>
+    <dgm:txEffectClrLst/>
+  </dgm:styleLbl>
+  <dgm:styleLbl name="parChTrans1D3">
+    <dgm:fillClrLst meth="repeat">
+      <a:schemeClr val="accent4">
+        <a:tint val="70000"/>
+      </a:schemeClr>
+    </dgm:fillClrLst>
+    <dgm:linClrLst meth="repeat">
+      <a:schemeClr val="accent3"/>
+    </dgm:linClrLst>
+    <dgm:effectClrLst/>
+    <dgm:txLinClrLst/>
+    <dgm:txFillClrLst meth="repeat">
+      <a:schemeClr val="tx1"/>
+    </dgm:txFillClrLst>
+    <dgm:txEffectClrLst/>
+  </dgm:styleLbl>
+  <dgm:styleLbl name="parChTrans1D4">
+    <dgm:fillClrLst meth="repeat">
+      <a:schemeClr val="accent5">
+        <a:tint val="50000"/>
+      </a:schemeClr>
+    </dgm:fillClrLst>
+    <dgm:linClrLst meth="repeat">
+      <a:schemeClr val="accent4"/>
+    </dgm:linClrLst>
+    <dgm:effectClrLst/>
+    <dgm:txLinClrLst/>
+    <dgm:txFillClrLst meth="repeat">
+      <a:schemeClr val="tx1"/>
+    </dgm:txFillClrLst>
+    <dgm:txEffectClrLst/>
+  </dgm:styleLbl>
+  <dgm:styleLbl name="fgAcc1">
+    <dgm:fillClrLst meth="repeat">
+      <a:schemeClr val="lt1">
+        <a:alpha val="90000"/>
+      </a:schemeClr>
+    </dgm:fillClrLst>
+    <dgm:linClrLst meth="repeat">
+      <a:schemeClr val="accent2"/>
+      <a:schemeClr val="accent3"/>
+      <a:schemeClr val="accent4"/>
+      <a:schemeClr val="accent5"/>
+      <a:schemeClr val="accent6"/>
+    </dgm:linClrLst>
+    <dgm:effectClrLst/>
+    <dgm:txLinClrLst/>
+    <dgm:txFillClrLst meth="repeat">
+      <a:schemeClr val="dk1"/>
+    </dgm:txFillClrLst>
+    <dgm:txEffectClrLst/>
+  </dgm:styleLbl>
+  <dgm:styleLbl name="conFgAcc1">
+    <dgm:fillClrLst meth="repeat">
+      <a:schemeClr val="lt1">
+        <a:alpha val="90000"/>
+      </a:schemeClr>
+    </dgm:fillClrLst>
+    <dgm:linClrLst meth="repeat">
+      <a:schemeClr val="accent2"/>
+      <a:schemeClr val="accent3"/>
+      <a:schemeClr val="accent4"/>
+      <a:schemeClr val="accent5"/>
+      <a:schemeClr val="accent6"/>
+    </dgm:linClrLst>
+    <dgm:effectClrLst/>
+    <dgm:txLinClrLst/>
+    <dgm:txFillClrLst meth="repeat">
+      <a:schemeClr val="dk1"/>
+    </dgm:txFillClrLst>
+    <dgm:txEffectClrLst/>
+  </dgm:styleLbl>
+  <dgm:styleLbl name="alignAcc1">
+    <dgm:fillClrLst meth="repeat">
+      <a:schemeClr val="lt1">
+        <a:alpha val="90000"/>
+      </a:schemeClr>
+    </dgm:fillClrLst>
+    <dgm:linClrLst meth="repeat">
+      <a:schemeClr val="accent2"/>
+      <a:schemeClr val="accent3"/>
+      <a:schemeClr val="accent4"/>
+      <a:schemeClr val="accent5"/>
+      <a:schemeClr val="accent6"/>
+    </dgm:linClrLst>
+    <dgm:effectClrLst/>
+    <dgm:txLinClrLst/>
+    <dgm:txFillClrLst meth="repeat">
+      <a:schemeClr val="dk1"/>
+    </dgm:txFillClrLst>
+    <dgm:txEffectClrLst/>
+  </dgm:styleLbl>
+  <dgm:styleLbl name="trAlignAcc1">
+    <dgm:fillClrLst meth="repeat">
+      <a:schemeClr val="lt1">
+        <a:alpha val="40000"/>
+      </a:schemeClr>
+    </dgm:fillClrLst>
+    <dgm:linClrLst meth="repeat">
+      <a:schemeClr val="accent1"/>
+    </dgm:linClrLst>
+    <dgm:effectClrLst/>
+    <dgm:txLinClrLst/>
+    <dgm:txFillClrLst meth="repeat">
+      <a:schemeClr val="dk1"/>
+    </dgm:txFillClrLst>
+    <dgm:txEffectClrLst/>
+  </dgm:styleLbl>
+  <dgm:styleLbl name="bgAcc1">
+    <dgm:fillClrLst meth="repeat">
+      <a:schemeClr val="lt1">
+        <a:alpha val="90000"/>
+      </a:schemeClr>
+    </dgm:fillClrLst>
+    <dgm:linClrLst meth="repeat">
+      <a:schemeClr val="accent2"/>
+      <a:schemeClr val="accent3"/>
+      <a:schemeClr val="accent4"/>
+      <a:schemeClr val="accent5"/>
+      <a:schemeClr val="accent6"/>
+    </dgm:linClrLst>
+    <dgm:effectClrLst/>
+    <dgm:txLinClrLst/>
+    <dgm:txFillClrLst meth="repeat">
+      <a:schemeClr val="dk1"/>
+    </dgm:txFillClrLst>
+    <dgm:txEffectClrLst/>
+  </dgm:styleLbl>
+  <dgm:styleLbl name="solidFgAcc1">
+    <dgm:fillClrLst meth="repeat">
+      <a:schemeClr val="lt1"/>
+    </dgm:fillClrLst>
+    <dgm:linClrLst meth="repeat">
+      <a:schemeClr val="accent2"/>
+      <a:schemeClr val="accent3"/>
+      <a:schemeClr val="accent4"/>
+      <a:schemeClr val="accent5"/>
+      <a:schemeClr val="accent6"/>
+    </dgm:linClrLst>
+    <dgm:effectClrLst/>
+    <dgm:txLinClrLst/>
+    <dgm:txFillClrLst meth="repeat">
+      <a:schemeClr val="dk1"/>
+    </dgm:txFillClrLst>
+    <dgm:txEffectClrLst/>
+  </dgm:styleLbl>
+  <dgm:styleLbl name="solidAlignAcc1">
+    <dgm:fillClrLst meth="repeat">
+      <a:schemeClr val="lt1"/>
+    </dgm:fillClrLst>
+    <dgm:linClrLst meth="repeat">
+      <a:schemeClr val="accent2"/>
+      <a:schemeClr val="accent3"/>
+      <a:schemeClr val="accent4"/>
+      <a:schemeClr val="accent5"/>
+      <a:schemeClr val="accent6"/>
+    </dgm:linClrLst>
+    <dgm:effectClrLst/>
+    <dgm:txLinClrLst/>
+    <dgm:txFillClrLst meth="repeat">
+      <a:schemeClr val="dk1"/>
+    </dgm:txFillClrLst>
+    <dgm:txEffectClrLst/>
+  </dgm:styleLbl>
+  <dgm:styleLbl name="solidBgAcc1">
+    <dgm:fillClrLst meth="repeat">
+      <a:schemeClr val="lt1"/>
+    </dgm:fillClrLst>
+    <dgm:linClrLst meth="repeat">
+      <a:schemeClr val="accent2"/>
+      <a:schemeClr val="accent3"/>
+      <a:schemeClr val="accent4"/>
+      <a:schemeClr val="accent5"/>
+      <a:schemeClr val="accent6"/>
+    </dgm:linClrLst>
+    <dgm:effectClrLst/>
+    <dgm:txLinClrLst/>
+    <dgm:txFillClrLst meth="repeat">
+      <a:schemeClr val="dk1"/>
+    </dgm:txFillClrLst>
+    <dgm:txEffectClrLst/>
+  </dgm:styleLbl>
+  <dgm:styleLbl name="fgAccFollowNode1">
+    <dgm:fillClrLst meth="repeat">
+      <a:schemeClr val="accent2">
+        <a:tint val="40000"/>
+        <a:alpha val="90000"/>
+      </a:schemeClr>
+      <a:schemeClr val="accent3">
+        <a:tint val="40000"/>
+        <a:alpha val="90000"/>
+      </a:schemeClr>
+      <a:schemeClr val="accent4">
+        <a:tint val="40000"/>
+        <a:alpha val="90000"/>
+      </a:schemeClr>
+      <a:schemeClr val="accent5">
+        <a:tint val="40000"/>
+        <a:alpha val="90000"/>
+      </a:schemeClr>
+      <a:schemeClr val="accent6">
+        <a:tint val="40000"/>
+        <a:alpha val="90000"/>
+      </a:schemeClr>
+    </dgm:fillClrLst>
+    <dgm:linClrLst meth="repeat">
+      <a:schemeClr val="accent2">
+        <a:tint val="40000"/>
+        <a:alpha val="90000"/>
+      </a:schemeClr>
+      <a:schemeClr val="accent3">
+        <a:tint val="40000"/>
+        <a:alpha val="90000"/>
+      </a:schemeClr>
+      <a:schemeClr val="accent4">
+        <a:tint val="40000"/>
+        <a:alpha val="90000"/>
+      </a:schemeClr>
+      <a:schemeClr val="accent5">
+        <a:tint val="40000"/>
+        <a:alpha val="90000"/>
+      </a:schemeClr>
+      <a:schemeClr val="accent6">
+        <a:tint val="40000"/>
+        <a:alpha val="90000"/>
+      </a:schemeClr>
+    </dgm:linClrLst>
+    <dgm:effectClrLst/>
+    <dgm:txLinClrLst/>
+    <dgm:txFillClrLst meth="repeat">
+      <a:schemeClr val="dk1"/>
+    </dgm:txFillClrLst>
+    <dgm:txEffectClrLst/>
+  </dgm:styleLbl>
+  <dgm:styleLbl name="alignAccFollowNode1">
+    <dgm:fillClrLst meth="repeat">
+      <a:schemeClr val="accent2">
+        <a:tint val="40000"/>
+        <a:alpha val="90000"/>
+      </a:schemeClr>
+      <a:schemeClr val="accent3">
+        <a:tint val="40000"/>
+        <a:alpha val="90000"/>
+      </a:schemeClr>
+      <a:schemeClr val="accent4">
+        <a:tint val="40000"/>
+        <a:alpha val="90000"/>
+      </a:schemeClr>
+      <a:schemeClr val="accent5">
+        <a:tint val="40000"/>
+        <a:alpha val="90000"/>
+      </a:schemeClr>
+      <a:schemeClr val="accent6">
+        <a:tint val="40000"/>
+        <a:alpha val="90000"/>
+      </a:schemeClr>
+    </dgm:fillClrLst>
+    <dgm:linClrLst meth="repeat">
+      <a:schemeClr val="accent2">
+        <a:tint val="40000"/>
+        <a:alpha val="90000"/>
+      </a:schemeClr>
+      <a:schemeClr val="accent3">
+        <a:tint val="40000"/>
+        <a:alpha val="90000"/>
+      </a:schemeClr>
+      <a:schemeClr val="accent4">
+        <a:tint val="40000"/>
+        <a:alpha val="90000"/>
+      </a:schemeClr>
+      <a:schemeClr val="accent5">
+        <a:tint val="40000"/>
+        <a:alpha val="90000"/>
+      </a:schemeClr>
+      <a:schemeClr val="accent6">
+        <a:tint val="40000"/>
+        <a:alpha val="90000"/>
+      </a:schemeClr>
+    </dgm:linClrLst>
+    <dgm:effectClrLst/>
+    <dgm:txLinClrLst/>
+    <dgm:txFillClrLst meth="repeat">
+      <a:schemeClr val="dk1"/>
+    </dgm:txFillClrLst>
+    <dgm:txEffectClrLst/>
+  </dgm:styleLbl>
+  <dgm:styleLbl name="bgAccFollowNode1">
+    <dgm:fillClrLst meth="repeat">
+      <a:schemeClr val="accent2">
+        <a:tint val="40000"/>
+        <a:alpha val="90000"/>
+      </a:schemeClr>
+      <a:schemeClr val="accent3">
+        <a:tint val="40000"/>
+        <a:alpha val="90000"/>
+      </a:schemeClr>
+      <a:schemeClr val="accent4">
+        <a:tint val="40000"/>
+        <a:alpha val="90000"/>
+      </a:schemeClr>
+      <a:schemeClr val="accent5">
+        <a:tint val="40000"/>
+        <a:alpha val="90000"/>
+      </a:schemeClr>
+      <a:schemeClr val="accent6">
+        <a:tint val="40000"/>
+        <a:alpha val="90000"/>
+      </a:schemeClr>
+    </dgm:fillClrLst>
+    <dgm:linClrLst meth="repeat">
+      <a:schemeClr val="accent2">
+        <a:tint val="40000"/>
+        <a:alpha val="90000"/>
+      </a:schemeClr>
+      <a:schemeClr val="accent3">
+        <a:tint val="40000"/>
+        <a:alpha val="90000"/>
+      </a:schemeClr>
+      <a:schemeClr val="accent4">
+        <a:tint val="40000"/>
+        <a:alpha val="90000"/>
+      </a:schemeClr>
+      <a:schemeClr val="accent5">
+        <a:tint val="40000"/>
+        <a:alpha val="90000"/>
+      </a:schemeClr>
+      <a:schemeClr val="accent6">
+        <a:tint val="40000"/>
+        <a:alpha val="90000"/>
+      </a:schemeClr>
+    </dgm:linClrLst>
+    <dgm:effectClrLst/>
+    <dgm:txLinClrLst/>
+    <dgm:txFillClrLst meth="repeat">
+      <a:schemeClr val="dk1"/>
+    </dgm:txFillClrLst>
+    <dgm:txEffectClrLst/>
+  </dgm:styleLbl>
+  <dgm:styleLbl name="fgAcc0">
+    <dgm:fillClrLst meth="repeat">
+      <a:schemeClr val="lt1">
+        <a:alpha val="90000"/>
+      </a:schemeClr>
+    </dgm:fillClrLst>
+    <dgm:linClrLst>
+      <a:schemeClr val="accent1"/>
+    </dgm:linClrLst>
+    <dgm:effectClrLst/>
+    <dgm:txLinClrLst/>
+    <dgm:txFillClrLst meth="repeat">
+      <a:schemeClr val="dk1"/>
+    </dgm:txFillClrLst>
+    <dgm:txEffectClrLst/>
+  </dgm:styleLbl>
+  <dgm:styleLbl name="fgAcc2">
+    <dgm:fillClrLst meth="repeat">
+      <a:schemeClr val="lt1">
+        <a:alpha val="90000"/>
+      </a:schemeClr>
+    </dgm:fillClrLst>
+    <dgm:linClrLst>
+      <a:schemeClr val="accent2"/>
+    </dgm:linClrLst>
+    <dgm:effectClrLst/>
+    <dgm:txLinClrLst/>
+    <dgm:txFillClrLst meth="repeat">
+      <a:schemeClr val="dk1"/>
+    </dgm:txFillClrLst>
+    <dgm:txEffectClrLst/>
+  </dgm:styleLbl>
+  <dgm:styleLbl name="fgAcc3">
+    <dgm:fillClrLst meth="repeat">
+      <a:schemeClr val="lt1">
+        <a:alpha val="90000"/>
+      </a:schemeClr>
+    </dgm:fillClrLst>
+    <dgm:linClrLst>
+      <a:schemeClr val="accent3"/>
+    </dgm:linClrLst>
+    <dgm:effectClrLst/>
+    <dgm:txLinClrLst/>
+    <dgm:txFillClrLst meth="repeat">
+      <a:schemeClr val="dk1"/>
+    </dgm:txFillClrLst>
+    <dgm:txEffectClrLst/>
+  </dgm:styleLbl>
+  <dgm:styleLbl name="fgAcc4">
+    <dgm:fillClrLst meth="repeat">
+      <a:schemeClr val="lt1">
+        <a:alpha val="90000"/>
+      </a:schemeClr>
+    </dgm:fillClrLst>
+    <dgm:linClrLst>
+      <a:schemeClr val="accent4"/>
+    </dgm:linClrLst>
+    <dgm:effectClrLst/>
+    <dgm:txLinClrLst/>
+    <dgm:txFillClrLst meth="repeat">
+      <a:schemeClr val="dk1"/>
+    </dgm:txFillClrLst>
+    <dgm:txEffectClrLst/>
+  </dgm:styleLbl>
+  <dgm:styleLbl name="bgShp">
+    <dgm:fillClrLst meth="repeat">
+      <a:schemeClr val="accent2"/>
+      <a:schemeClr val="accent3"/>
+      <a:schemeClr val="accent4"/>
+      <a:schemeClr val="accent5"/>
+      <a:schemeClr val="accent6"/>
+    </dgm:fillClrLst>
+    <dgm:linClrLst meth="repeat">
+      <a:schemeClr val="lt1">
+        <a:alpha val="0"/>
+      </a:schemeClr>
+    </dgm:linClrLst>
+    <dgm:effectClrLst/>
+    <dgm:txLinClrLst/>
+    <dgm:txFillClrLst/>
+    <dgm:txEffectClrLst/>
+  </dgm:styleLbl>
+  <dgm:styleLbl name="dkBgShp">
+    <dgm:fillClrLst meth="repeat">
+      <a:schemeClr val="accent2">
+        <a:shade val="90000"/>
+      </a:schemeClr>
+    </dgm:fillClrLst>
+    <dgm:linClrLst meth="repeat">
+      <a:schemeClr val="dk1"/>
+    </dgm:linClrLst>
+    <dgm:effectClrLst/>
+    <dgm:txLinClrLst/>
+    <dgm:txFillClrLst meth="repeat">
+      <a:schemeClr val="lt1"/>
+    </dgm:txFillClrLst>
+    <dgm:txEffectClrLst/>
+  </dgm:styleLbl>
+  <dgm:styleLbl name="trBgShp">
+    <dgm:fillClrLst meth="repeat">
+      <a:schemeClr val="accent1">
+        <a:tint val="50000"/>
+        <a:alpha val="40000"/>
+      </a:schemeClr>
+    </dgm:fillClrLst>
+    <dgm:linClrLst meth="repeat">
+      <a:schemeClr val="accent2"/>
+    </dgm:linClrLst>
+    <dgm:effectClrLst/>
+    <dgm:txLinClrLst/>
+    <dgm:txFillClrLst meth="repeat">
+      <a:schemeClr val="lt1"/>
+    </dgm:txFillClrLst>
+    <dgm:txEffectClrLst/>
+  </dgm:styleLbl>
+  <dgm:styleLbl name="fgShp">
+    <dgm:fillClrLst meth="repeat">
+      <a:schemeClr val="accent2">
+        <a:tint val="40000"/>
+      </a:schemeClr>
+    </dgm:fillClrLst>
+    <dgm:linClrLst meth="repeat">
+      <a:schemeClr val="lt1"/>
+    </dgm:linClrLst>
+    <dgm:effectClrLst/>
+    <dgm:txLinClrLst/>
+    <dgm:txFillClrLst meth="repeat">
+      <a:schemeClr val="dk1"/>
+    </dgm:txFillClrLst>
+    <dgm:txEffectClrLst/>
+  </dgm:styleLbl>
+  <dgm:styleLbl name="revTx">
+    <dgm:fillClrLst meth="repeat">
+      <a:schemeClr val="lt1">
+        <a:alpha val="0"/>
+      </a:schemeClr>
+    </dgm:fillClrLst>
+    <dgm:linClrLst meth="repeat">
+      <a:schemeClr val="dk1">
+        <a:alpha val="0"/>
+      </a:schemeClr>
+    </dgm:linClrLst>
+    <dgm:effectClrLst/>
+    <dgm:txLinClrLst/>
+    <dgm:txFillClrLst meth="repeat">
+      <a:schemeClr val="tx1"/>
+    </dgm:txFillClrLst>
+    <dgm:txEffectClrLst/>
+  </dgm:styleLbl>
+</dgm:colorsDef>
+</file>
+
+<file path=ppt/diagrams/data1.xml><?xml version="1.0" encoding="utf-8"?>
+<dgm:dataModel xmlns:dgm="http://schemas.openxmlformats.org/drawingml/2006/diagram" xmlns:a="http://schemas.openxmlformats.org/drawingml/2006/main">
+  <dgm:ptLst>
+    <dgm:pt modelId="{545DC5F4-D431-4A87-93B0-BBE05B35CCB1}" type="doc">
+      <dgm:prSet loTypeId="urn:microsoft.com/office/officeart/2018/5/layout/IconLeafLabelList" loCatId="icon" qsTypeId="urn:microsoft.com/office/officeart/2005/8/quickstyle/simple1" qsCatId="simple" csTypeId="urn:microsoft.com/office/officeart/2018/5/colors/Iconchunking_neutralicon_colorful1" csCatId="colorful" phldr="1"/>
+      <dgm:spPr/>
+      <dgm:t>
+        <a:bodyPr/>
+        <a:lstStyle/>
+        <a:p>
+          <a:endParaRPr lang="en-US"/>
+        </a:p>
+      </dgm:t>
+    </dgm:pt>
+    <dgm:pt modelId="{54983E92-0B7C-43A8-8C1F-984B0DFA982E}">
+      <dgm:prSet custT="1"/>
+      <dgm:spPr/>
+      <dgm:t>
+        <a:bodyPr/>
+        <a:lstStyle/>
+        <a:p>
+          <a:pPr>
+            <a:defRPr cap="all"/>
+          </a:pPr>
+          <a:r>
+            <a:rPr lang="en-US" sz="1800" dirty="0"/>
+            <a:t>Due by Midnight </a:t>
+          </a:r>
+          <a:r>
+            <a:rPr lang="en-US" sz="1800" dirty="0">
+              <a:solidFill>
+                <a:srgbClr val="C00000"/>
+              </a:solidFill>
+            </a:rPr>
+            <a:t>(11:59 pm) on Monday, Sep 29, 2025</a:t>
+          </a:r>
+        </a:p>
+      </dgm:t>
+    </dgm:pt>
+    <dgm:pt modelId="{47D3E5B5-E005-481D-9366-7FFA245A3F46}" type="parTrans" cxnId="{7E7C886D-A667-496F-8DDE-1B718561DB03}">
+      <dgm:prSet/>
+      <dgm:spPr/>
+      <dgm:t>
+        <a:bodyPr/>
+        <a:lstStyle/>
+        <a:p>
+          <a:endParaRPr lang="en-US"/>
+        </a:p>
+      </dgm:t>
+    </dgm:pt>
+    <dgm:pt modelId="{9E0C94DC-193A-41FC-B82A-2A43E45C8107}" type="sibTrans" cxnId="{7E7C886D-A667-496F-8DDE-1B718561DB03}">
+      <dgm:prSet/>
+      <dgm:spPr/>
+      <dgm:t>
+        <a:bodyPr/>
+        <a:lstStyle/>
+        <a:p>
+          <a:endParaRPr lang="en-US"/>
+        </a:p>
+      </dgm:t>
+    </dgm:pt>
+    <dgm:pt modelId="{A6242D37-AF81-4A91-9692-C3B78C4C080A}">
+      <dgm:prSet custT="1"/>
+      <dgm:spPr/>
+      <dgm:t>
+        <a:bodyPr/>
+        <a:lstStyle/>
+        <a:p>
+          <a:pPr>
+            <a:defRPr cap="all"/>
+          </a:pPr>
+          <a:r>
+            <a:rPr lang="en-US" sz="1800" dirty="0"/>
+            <a:t>Submit a word document only include </a:t>
+          </a:r>
+          <a:r>
+            <a:rPr lang="en-US" sz="1800" dirty="0">
+              <a:solidFill>
+                <a:srgbClr val="C00000"/>
+              </a:solidFill>
+            </a:rPr>
+            <a:t>question and answer</a:t>
+          </a:r>
+        </a:p>
+      </dgm:t>
+    </dgm:pt>
+    <dgm:pt modelId="{A1582085-1655-4316-B7FE-C167B01E3451}" type="parTrans" cxnId="{0F5369C5-3BD8-41EC-82BC-B46BD7C285F5}">
+      <dgm:prSet/>
+      <dgm:spPr/>
+      <dgm:t>
+        <a:bodyPr/>
+        <a:lstStyle/>
+        <a:p>
+          <a:endParaRPr lang="en-US"/>
+        </a:p>
+      </dgm:t>
+    </dgm:pt>
+    <dgm:pt modelId="{487527DA-4CA7-40A4-8E27-547430E84424}" type="sibTrans" cxnId="{0F5369C5-3BD8-41EC-82BC-B46BD7C285F5}">
+      <dgm:prSet/>
+      <dgm:spPr/>
+      <dgm:t>
+        <a:bodyPr/>
+        <a:lstStyle/>
+        <a:p>
+          <a:endParaRPr lang="en-US"/>
+        </a:p>
+      </dgm:t>
+    </dgm:pt>
+    <dgm:pt modelId="{1CF3E5B1-FB46-4446-95BF-0E7408D9C151}" type="pres">
+      <dgm:prSet presAssocID="{545DC5F4-D431-4A87-93B0-BBE05B35CCB1}" presName="root" presStyleCnt="0">
+        <dgm:presLayoutVars>
+          <dgm:dir/>
+          <dgm:resizeHandles val="exact"/>
+        </dgm:presLayoutVars>
+      </dgm:prSet>
+      <dgm:spPr/>
+    </dgm:pt>
+    <dgm:pt modelId="{BE3E81CB-7E93-484B-AE32-12C58B09BCE0}" type="pres">
+      <dgm:prSet presAssocID="{54983E92-0B7C-43A8-8C1F-984B0DFA982E}" presName="compNode" presStyleCnt="0"/>
+      <dgm:spPr/>
+    </dgm:pt>
+    <dgm:pt modelId="{D2D6216C-9B23-402E-A942-468E0F624F5B}" type="pres">
+      <dgm:prSet presAssocID="{54983E92-0B7C-43A8-8C1F-984B0DFA982E}" presName="iconBgRect" presStyleLbl="bgShp" presStyleIdx="0" presStyleCnt="2"/>
+      <dgm:spPr>
+        <a:prstGeom prst="round2DiagRect">
+          <a:avLst>
+            <a:gd name="adj1" fmla="val 29727"/>
+            <a:gd name="adj2" fmla="val 0"/>
+          </a:avLst>
+        </a:prstGeom>
+      </dgm:spPr>
+    </dgm:pt>
+    <dgm:pt modelId="{F943F739-4EBC-47A7-A14C-25327E72C0F2}" type="pres">
+      <dgm:prSet presAssocID="{54983E92-0B7C-43A8-8C1F-984B0DFA982E}" presName="iconRect" presStyleLbl="node1" presStyleIdx="0" presStyleCnt="2"/>
+      <dgm:spPr>
+        <a:blipFill>
+          <a:blip xmlns:r="http://schemas.openxmlformats.org/officeDocument/2006/relationships" r:embed="rId1">
+            <a:extLst>
+              <a:ext uri="{28A0092B-C50C-407E-A947-70E740481C1C}">
+                <a14:useLocalDpi xmlns:a14="http://schemas.microsoft.com/office/drawing/2010/main" val="0"/>
+              </a:ext>
+              <a:ext uri="{96DAC541-7B7A-43D3-8B79-37D633B846F1}">
+                <asvg:svgBlip xmlns:asvg="http://schemas.microsoft.com/office/drawing/2016/SVG/main" r:embed="rId2"/>
+              </a:ext>
+            </a:extLst>
+          </a:blip>
+          <a:stretch>
+            <a:fillRect/>
+          </a:stretch>
+        </a:blipFill>
+        <a:ln>
+          <a:noFill/>
+        </a:ln>
+      </dgm:spPr>
+      <dgm:extLst>
+        <a:ext uri="{E40237B7-FDA0-4F09-8148-C483321AD2D9}">
+          <dgm14:cNvPr xmlns:dgm14="http://schemas.microsoft.com/office/drawing/2010/diagram" id="0" name="" descr="Alarm Clock"/>
+        </a:ext>
+      </dgm:extLst>
+    </dgm:pt>
+    <dgm:pt modelId="{3085FCD0-B526-4BA1-831E-148271EBCA71}" type="pres">
+      <dgm:prSet presAssocID="{54983E92-0B7C-43A8-8C1F-984B0DFA982E}" presName="spaceRect" presStyleCnt="0"/>
+      <dgm:spPr/>
+    </dgm:pt>
+    <dgm:pt modelId="{4E513C3D-9C85-4581-9570-C87158EE7A8E}" type="pres">
+      <dgm:prSet presAssocID="{54983E92-0B7C-43A8-8C1F-984B0DFA982E}" presName="textRect" presStyleLbl="revTx" presStyleIdx="0" presStyleCnt="2" custScaleX="140708">
+        <dgm:presLayoutVars>
+          <dgm:chMax val="1"/>
+          <dgm:chPref val="1"/>
+        </dgm:presLayoutVars>
+      </dgm:prSet>
+      <dgm:spPr/>
+    </dgm:pt>
+    <dgm:pt modelId="{00D865C2-7AA1-4413-870A-557561F6A99D}" type="pres">
+      <dgm:prSet presAssocID="{9E0C94DC-193A-41FC-B82A-2A43E45C8107}" presName="sibTrans" presStyleCnt="0"/>
+      <dgm:spPr/>
+    </dgm:pt>
+    <dgm:pt modelId="{0444C821-AE95-419C-A2C2-10FD435B3E72}" type="pres">
+      <dgm:prSet presAssocID="{A6242D37-AF81-4A91-9692-C3B78C4C080A}" presName="compNode" presStyleCnt="0"/>
+      <dgm:spPr/>
+    </dgm:pt>
+    <dgm:pt modelId="{C1C41DF5-156F-4AFD-8177-5E65296E36DA}" type="pres">
+      <dgm:prSet presAssocID="{A6242D37-AF81-4A91-9692-C3B78C4C080A}" presName="iconBgRect" presStyleLbl="bgShp" presStyleIdx="1" presStyleCnt="2"/>
+      <dgm:spPr>
+        <a:prstGeom prst="round2DiagRect">
+          <a:avLst>
+            <a:gd name="adj1" fmla="val 29727"/>
+            <a:gd name="adj2" fmla="val 0"/>
+          </a:avLst>
+        </a:prstGeom>
+      </dgm:spPr>
+    </dgm:pt>
+    <dgm:pt modelId="{BCD05D74-D5AE-459F-A6DF-06E0D3F03A72}" type="pres">
+      <dgm:prSet presAssocID="{A6242D37-AF81-4A91-9692-C3B78C4C080A}" presName="iconRect" presStyleLbl="node1" presStyleIdx="1" presStyleCnt="2"/>
+      <dgm:spPr>
+        <a:blipFill>
+          <a:blip xmlns:r="http://schemas.openxmlformats.org/officeDocument/2006/relationships" r:embed="rId3">
+            <a:extLst>
+              <a:ext uri="{28A0092B-C50C-407E-A947-70E740481C1C}">
+                <a14:useLocalDpi xmlns:a14="http://schemas.microsoft.com/office/drawing/2010/main" val="0"/>
+              </a:ext>
+              <a:ext uri="{96DAC541-7B7A-43D3-8B79-37D633B846F1}">
+                <asvg:svgBlip xmlns:asvg="http://schemas.microsoft.com/office/drawing/2016/SVG/main" r:embed="rId4"/>
+              </a:ext>
+            </a:extLst>
+          </a:blip>
+          <a:stretch>
+            <a:fillRect/>
+          </a:stretch>
+        </a:blipFill>
+        <a:ln>
+          <a:noFill/>
+        </a:ln>
+      </dgm:spPr>
+      <dgm:extLst>
+        <a:ext uri="{E40237B7-FDA0-4F09-8148-C483321AD2D9}">
+          <dgm14:cNvPr xmlns:dgm14="http://schemas.microsoft.com/office/drawing/2010/diagram" id="0" name="" descr="Checkmark"/>
+        </a:ext>
+      </dgm:extLst>
+    </dgm:pt>
+    <dgm:pt modelId="{2AB5314E-660E-4ED1-846B-8434948EF46B}" type="pres">
+      <dgm:prSet presAssocID="{A6242D37-AF81-4A91-9692-C3B78C4C080A}" presName="spaceRect" presStyleCnt="0"/>
+      <dgm:spPr/>
+    </dgm:pt>
+    <dgm:pt modelId="{A3838D15-85D1-4048-B20D-9009920800B0}" type="pres">
+      <dgm:prSet presAssocID="{A6242D37-AF81-4A91-9692-C3B78C4C080A}" presName="textRect" presStyleLbl="revTx" presStyleIdx="1" presStyleCnt="2" custScaleX="147657">
+        <dgm:presLayoutVars>
+          <dgm:chMax val="1"/>
+          <dgm:chPref val="1"/>
+        </dgm:presLayoutVars>
+      </dgm:prSet>
+      <dgm:spPr/>
+    </dgm:pt>
+  </dgm:ptLst>
+  <dgm:cxnLst>
+    <dgm:cxn modelId="{34AD3E24-5AE2-4091-998E-71D41F9CDB89}" type="presOf" srcId="{A6242D37-AF81-4A91-9692-C3B78C4C080A}" destId="{A3838D15-85D1-4048-B20D-9009920800B0}" srcOrd="0" destOrd="0" presId="urn:microsoft.com/office/officeart/2018/5/layout/IconLeafLabelList"/>
+    <dgm:cxn modelId="{7E7C886D-A667-496F-8DDE-1B718561DB03}" srcId="{545DC5F4-D431-4A87-93B0-BBE05B35CCB1}" destId="{54983E92-0B7C-43A8-8C1F-984B0DFA982E}" srcOrd="0" destOrd="0" parTransId="{47D3E5B5-E005-481D-9366-7FFA245A3F46}" sibTransId="{9E0C94DC-193A-41FC-B82A-2A43E45C8107}"/>
+    <dgm:cxn modelId="{B47C2F55-9A4B-4FFB-AA38-9C2574693CD4}" type="presOf" srcId="{54983E92-0B7C-43A8-8C1F-984B0DFA982E}" destId="{4E513C3D-9C85-4581-9570-C87158EE7A8E}" srcOrd="0" destOrd="0" presId="urn:microsoft.com/office/officeart/2018/5/layout/IconLeafLabelList"/>
+    <dgm:cxn modelId="{53CEBE9C-EA76-48A8-8DF7-6953575A9C37}" type="presOf" srcId="{545DC5F4-D431-4A87-93B0-BBE05B35CCB1}" destId="{1CF3E5B1-FB46-4446-95BF-0E7408D9C151}" srcOrd="0" destOrd="0" presId="urn:microsoft.com/office/officeart/2018/5/layout/IconLeafLabelList"/>
+    <dgm:cxn modelId="{0F5369C5-3BD8-41EC-82BC-B46BD7C285F5}" srcId="{545DC5F4-D431-4A87-93B0-BBE05B35CCB1}" destId="{A6242D37-AF81-4A91-9692-C3B78C4C080A}" srcOrd="1" destOrd="0" parTransId="{A1582085-1655-4316-B7FE-C167B01E3451}" sibTransId="{487527DA-4CA7-40A4-8E27-547430E84424}"/>
+    <dgm:cxn modelId="{5C6FCB9C-3574-4EF1-979B-C82FE21FC231}" type="presParOf" srcId="{1CF3E5B1-FB46-4446-95BF-0E7408D9C151}" destId="{BE3E81CB-7E93-484B-AE32-12C58B09BCE0}" srcOrd="0" destOrd="0" presId="urn:microsoft.com/office/officeart/2018/5/layout/IconLeafLabelList"/>
+    <dgm:cxn modelId="{3BEBC4B0-3768-4D30-9883-ED03B1BB2AA3}" type="presParOf" srcId="{BE3E81CB-7E93-484B-AE32-12C58B09BCE0}" destId="{D2D6216C-9B23-402E-A942-468E0F624F5B}" srcOrd="0" destOrd="0" presId="urn:microsoft.com/office/officeart/2018/5/layout/IconLeafLabelList"/>
+    <dgm:cxn modelId="{9334B4F2-C5A7-478D-8C83-6B6B78937527}" type="presParOf" srcId="{BE3E81CB-7E93-484B-AE32-12C58B09BCE0}" destId="{F943F739-4EBC-47A7-A14C-25327E72C0F2}" srcOrd="1" destOrd="0" presId="urn:microsoft.com/office/officeart/2018/5/layout/IconLeafLabelList"/>
+    <dgm:cxn modelId="{722E4463-BB96-47A5-B05B-8394250686DE}" type="presParOf" srcId="{BE3E81CB-7E93-484B-AE32-12C58B09BCE0}" destId="{3085FCD0-B526-4BA1-831E-148271EBCA71}" srcOrd="2" destOrd="0" presId="urn:microsoft.com/office/officeart/2018/5/layout/IconLeafLabelList"/>
+    <dgm:cxn modelId="{4DDDB5E8-1F23-4A78-9605-45AAF5833E68}" type="presParOf" srcId="{BE3E81CB-7E93-484B-AE32-12C58B09BCE0}" destId="{4E513C3D-9C85-4581-9570-C87158EE7A8E}" srcOrd="3" destOrd="0" presId="urn:microsoft.com/office/officeart/2018/5/layout/IconLeafLabelList"/>
+    <dgm:cxn modelId="{123D8173-4B78-41DB-B068-2BA15E016A23}" type="presParOf" srcId="{1CF3E5B1-FB46-4446-95BF-0E7408D9C151}" destId="{00D865C2-7AA1-4413-870A-557561F6A99D}" srcOrd="1" destOrd="0" presId="urn:microsoft.com/office/officeart/2018/5/layout/IconLeafLabelList"/>
+    <dgm:cxn modelId="{E92967F1-54D1-402B-9BE3-03FB7BECA8E6}" type="presParOf" srcId="{1CF3E5B1-FB46-4446-95BF-0E7408D9C151}" destId="{0444C821-AE95-419C-A2C2-10FD435B3E72}" srcOrd="2" destOrd="0" presId="urn:microsoft.com/office/officeart/2018/5/layout/IconLeafLabelList"/>
+    <dgm:cxn modelId="{6A34589F-98DC-49A5-B284-AB8B04E10F1B}" type="presParOf" srcId="{0444C821-AE95-419C-A2C2-10FD435B3E72}" destId="{C1C41DF5-156F-4AFD-8177-5E65296E36DA}" srcOrd="0" destOrd="0" presId="urn:microsoft.com/office/officeart/2018/5/layout/IconLeafLabelList"/>
+    <dgm:cxn modelId="{E4BDC4E7-B33D-408F-A28A-9E646BDBCB86}" type="presParOf" srcId="{0444C821-AE95-419C-A2C2-10FD435B3E72}" destId="{BCD05D74-D5AE-459F-A6DF-06E0D3F03A72}" srcOrd="1" destOrd="0" presId="urn:microsoft.com/office/officeart/2018/5/layout/IconLeafLabelList"/>
+    <dgm:cxn modelId="{3D1E9DB2-C5D6-4774-8110-C1F4D3951E71}" type="presParOf" srcId="{0444C821-AE95-419C-A2C2-10FD435B3E72}" destId="{2AB5314E-660E-4ED1-846B-8434948EF46B}" srcOrd="2" destOrd="0" presId="urn:microsoft.com/office/officeart/2018/5/layout/IconLeafLabelList"/>
+    <dgm:cxn modelId="{2B9C7FC2-A255-4335-A004-2546E39B1238}" type="presParOf" srcId="{0444C821-AE95-419C-A2C2-10FD435B3E72}" destId="{A3838D15-85D1-4048-B20D-9009920800B0}" srcOrd="3" destOrd="0" presId="urn:microsoft.com/office/officeart/2018/5/layout/IconLeafLabelList"/>
+  </dgm:cxnLst>
+  <dgm:bg/>
+  <dgm:whole/>
+  <dgm:extLst>
+    <a:ext uri="http://schemas.microsoft.com/office/drawing/2008/diagram">
+      <dsp:dataModelExt xmlns:dsp="http://schemas.microsoft.com/office/drawing/2008/diagram" relId="rId7" minVer="http://schemas.openxmlformats.org/drawingml/2006/diagram"/>
+    </a:ext>
+  </dgm:extLst>
+</dgm:dataModel>
+</file>
+
+<file path=ppt/diagrams/drawing1.xml><?xml version="1.0" encoding="utf-8"?>
+<dsp:drawing xmlns:dgm="http://schemas.openxmlformats.org/drawingml/2006/diagram" xmlns:dsp="http://schemas.microsoft.com/office/drawing/2008/diagram" xmlns:a="http://schemas.openxmlformats.org/drawingml/2006/main">
+  <dsp:spTree>
+    <dsp:nvGrpSpPr>
+      <dsp:cNvPr id="0" name=""/>
+      <dsp:cNvGrpSpPr/>
+    </dsp:nvGrpSpPr>
+    <dsp:grpSpPr/>
+    <dsp:sp modelId="{D2D6216C-9B23-402E-A942-468E0F624F5B}">
+      <dsp:nvSpPr>
+        <dsp:cNvPr id="0" name=""/>
+        <dsp:cNvSpPr/>
+      </dsp:nvSpPr>
+      <dsp:spPr>
+        <a:xfrm>
+          <a:off x="1178341" y="15356"/>
+          <a:ext cx="1372500" cy="1372500"/>
+        </a:xfrm>
+        <a:prstGeom prst="round2DiagRect">
+          <a:avLst>
+            <a:gd name="adj1" fmla="val 29727"/>
+            <a:gd name="adj2" fmla="val 0"/>
+          </a:avLst>
+        </a:prstGeom>
+        <a:solidFill>
+          <a:schemeClr val="accent2">
+            <a:hueOff val="0"/>
+            <a:satOff val="0"/>
+            <a:lumOff val="0"/>
+            <a:alphaOff val="0"/>
+          </a:schemeClr>
+        </a:solidFill>
+        <a:ln>
+          <a:noFill/>
+        </a:ln>
+        <a:effectLst/>
+      </dsp:spPr>
+      <dsp:style>
+        <a:lnRef idx="0">
+          <a:scrgbClr r="0" g="0" b="0"/>
+        </a:lnRef>
+        <a:fillRef idx="1">
+          <a:scrgbClr r="0" g="0" b="0"/>
+        </a:fillRef>
+        <a:effectRef idx="0">
+          <a:scrgbClr r="0" g="0" b="0"/>
+        </a:effectRef>
+        <a:fontRef idx="minor"/>
+      </dsp:style>
+    </dsp:sp>
+    <dsp:sp modelId="{F943F739-4EBC-47A7-A14C-25327E72C0F2}">
+      <dsp:nvSpPr>
+        <dsp:cNvPr id="0" name=""/>
+        <dsp:cNvSpPr/>
+      </dsp:nvSpPr>
+      <dsp:spPr>
+        <a:xfrm>
+          <a:off x="1470841" y="307856"/>
+          <a:ext cx="787500" cy="787500"/>
+        </a:xfrm>
+        <a:prstGeom prst="rect">
+          <a:avLst/>
+        </a:prstGeom>
+        <a:blipFill>
+          <a:blip xmlns:r="http://schemas.openxmlformats.org/officeDocument/2006/relationships" r:embed="rId1">
+            <a:extLst>
+              <a:ext uri="{28A0092B-C50C-407E-A947-70E740481C1C}">
+                <a14:useLocalDpi xmlns:a14="http://schemas.microsoft.com/office/drawing/2010/main" val="0"/>
+              </a:ext>
+              <a:ext uri="{96DAC541-7B7A-43D3-8B79-37D633B846F1}">
+                <asvg:svgBlip xmlns:asvg="http://schemas.microsoft.com/office/drawing/2016/SVG/main" r:embed="rId2"/>
+              </a:ext>
+            </a:extLst>
+          </a:blip>
+          <a:stretch>
+            <a:fillRect/>
+          </a:stretch>
+        </a:blipFill>
+        <a:ln w="22225" cap="rnd" cmpd="sng" algn="ctr">
+          <a:noFill/>
+          <a:prstDash val="solid"/>
+        </a:ln>
+        <a:effectLst/>
+      </dsp:spPr>
+      <dsp:style>
+        <a:lnRef idx="2">
+          <a:scrgbClr r="0" g="0" b="0"/>
+        </a:lnRef>
+        <a:fillRef idx="1">
+          <a:scrgbClr r="0" g="0" b="0"/>
+        </a:fillRef>
+        <a:effectRef idx="0">
+          <a:scrgbClr r="0" g="0" b="0"/>
+        </a:effectRef>
+        <a:fontRef idx="minor">
+          <a:schemeClr val="lt1"/>
+        </a:fontRef>
+      </dsp:style>
+    </dsp:sp>
+    <dsp:sp modelId="{4E513C3D-9C85-4581-9570-C87158EE7A8E}">
+      <dsp:nvSpPr>
+        <dsp:cNvPr id="0" name=""/>
+        <dsp:cNvSpPr/>
+      </dsp:nvSpPr>
+      <dsp:spPr>
+        <a:xfrm>
+          <a:off x="281626" y="1815356"/>
+          <a:ext cx="3165930" cy="743927"/>
+        </a:xfrm>
+        <a:prstGeom prst="rect">
+          <a:avLst/>
+        </a:prstGeom>
+        <a:noFill/>
+        <a:ln>
+          <a:noFill/>
+        </a:ln>
+        <a:effectLst/>
+      </dsp:spPr>
+      <dsp:style>
+        <a:lnRef idx="0">
+          <a:scrgbClr r="0" g="0" b="0"/>
+        </a:lnRef>
+        <a:fillRef idx="0">
+          <a:scrgbClr r="0" g="0" b="0"/>
+        </a:fillRef>
+        <a:effectRef idx="0">
+          <a:scrgbClr r="0" g="0" b="0"/>
+        </a:effectRef>
+        <a:fontRef idx="minor"/>
+      </dsp:style>
+      <dsp:txBody>
+        <a:bodyPr spcFirstLastPara="0" vert="horz" wrap="square" lIns="0" tIns="0" rIns="0" bIns="0" numCol="1" spcCol="1270" anchor="t" anchorCtr="0">
+          <a:noAutofit/>
+        </a:bodyPr>
+        <a:lstStyle/>
+        <a:p>
+          <a:pPr marL="0" lvl="0" indent="0" algn="ctr" defTabSz="800100">
+            <a:lnSpc>
+              <a:spcPct val="90000"/>
+            </a:lnSpc>
+            <a:spcBef>
+              <a:spcPct val="0"/>
+            </a:spcBef>
+            <a:spcAft>
+              <a:spcPct val="35000"/>
+            </a:spcAft>
+            <a:buNone/>
+            <a:defRPr cap="all"/>
+          </a:pPr>
+          <a:r>
+            <a:rPr lang="en-US" sz="1800" kern="1200" dirty="0"/>
+            <a:t>Due by Midnight </a:t>
+          </a:r>
+          <a:r>
+            <a:rPr lang="en-US" sz="1800" kern="1200" dirty="0">
+              <a:solidFill>
+                <a:srgbClr val="C00000"/>
+              </a:solidFill>
+            </a:rPr>
+            <a:t>(11:59 pm) on Monday, Sep 29, 2025</a:t>
+          </a:r>
+        </a:p>
+      </dsp:txBody>
+      <dsp:txXfrm>
+        <a:off x="281626" y="1815356"/>
+        <a:ext cx="3165930" cy="743927"/>
+      </dsp:txXfrm>
+    </dsp:sp>
+    <dsp:sp modelId="{C1C41DF5-156F-4AFD-8177-5E65296E36DA}">
+      <dsp:nvSpPr>
+        <dsp:cNvPr id="0" name=""/>
+        <dsp:cNvSpPr/>
+      </dsp:nvSpPr>
+      <dsp:spPr>
+        <a:xfrm>
+          <a:off x="4816197" y="15356"/>
+          <a:ext cx="1372500" cy="1372500"/>
+        </a:xfrm>
+        <a:prstGeom prst="round2DiagRect">
+          <a:avLst>
+            <a:gd name="adj1" fmla="val 29727"/>
+            <a:gd name="adj2" fmla="val 0"/>
+          </a:avLst>
+        </a:prstGeom>
+        <a:solidFill>
+          <a:schemeClr val="accent3">
+            <a:hueOff val="0"/>
+            <a:satOff val="0"/>
+            <a:lumOff val="0"/>
+            <a:alphaOff val="0"/>
+          </a:schemeClr>
+        </a:solidFill>
+        <a:ln>
+          <a:noFill/>
+        </a:ln>
+        <a:effectLst/>
+      </dsp:spPr>
+      <dsp:style>
+        <a:lnRef idx="0">
+          <a:scrgbClr r="0" g="0" b="0"/>
+        </a:lnRef>
+        <a:fillRef idx="1">
+          <a:scrgbClr r="0" g="0" b="0"/>
+        </a:fillRef>
+        <a:effectRef idx="0">
+          <a:scrgbClr r="0" g="0" b="0"/>
+        </a:effectRef>
+        <a:fontRef idx="minor"/>
+      </dsp:style>
+    </dsp:sp>
+    <dsp:sp modelId="{BCD05D74-D5AE-459F-A6DF-06E0D3F03A72}">
+      <dsp:nvSpPr>
+        <dsp:cNvPr id="0" name=""/>
+        <dsp:cNvSpPr/>
+      </dsp:nvSpPr>
+      <dsp:spPr>
+        <a:xfrm>
+          <a:off x="5108697" y="307856"/>
+          <a:ext cx="787500" cy="787500"/>
+        </a:xfrm>
+        <a:prstGeom prst="rect">
+          <a:avLst/>
+        </a:prstGeom>
+        <a:blipFill>
+          <a:blip xmlns:r="http://schemas.openxmlformats.org/officeDocument/2006/relationships" r:embed="rId3">
+            <a:extLst>
+              <a:ext uri="{28A0092B-C50C-407E-A947-70E740481C1C}">
+                <a14:useLocalDpi xmlns:a14="http://schemas.microsoft.com/office/drawing/2010/main" val="0"/>
+              </a:ext>
+              <a:ext uri="{96DAC541-7B7A-43D3-8B79-37D633B846F1}">
+                <asvg:svgBlip xmlns:asvg="http://schemas.microsoft.com/office/drawing/2016/SVG/main" r:embed="rId4"/>
+              </a:ext>
+            </a:extLst>
+          </a:blip>
+          <a:stretch>
+            <a:fillRect/>
+          </a:stretch>
+        </a:blipFill>
+        <a:ln w="22225" cap="rnd" cmpd="sng" algn="ctr">
+          <a:noFill/>
+          <a:prstDash val="solid"/>
+        </a:ln>
+        <a:effectLst/>
+      </dsp:spPr>
+      <dsp:style>
+        <a:lnRef idx="2">
+          <a:scrgbClr r="0" g="0" b="0"/>
+        </a:lnRef>
+        <a:fillRef idx="1">
+          <a:scrgbClr r="0" g="0" b="0"/>
+        </a:fillRef>
+        <a:effectRef idx="0">
+          <a:scrgbClr r="0" g="0" b="0"/>
+        </a:effectRef>
+        <a:fontRef idx="minor">
+          <a:schemeClr val="lt1"/>
+        </a:fontRef>
+      </dsp:style>
+    </dsp:sp>
+    <dsp:sp modelId="{A3838D15-85D1-4048-B20D-9009920800B0}">
+      <dsp:nvSpPr>
+        <dsp:cNvPr id="0" name=""/>
+        <dsp:cNvSpPr/>
+      </dsp:nvSpPr>
+      <dsp:spPr>
+        <a:xfrm>
+          <a:off x="3841306" y="1815356"/>
+          <a:ext cx="3322282" cy="743927"/>
+        </a:xfrm>
+        <a:prstGeom prst="rect">
+          <a:avLst/>
+        </a:prstGeom>
+        <a:noFill/>
+        <a:ln>
+          <a:noFill/>
+        </a:ln>
+        <a:effectLst/>
+      </dsp:spPr>
+      <dsp:style>
+        <a:lnRef idx="0">
+          <a:scrgbClr r="0" g="0" b="0"/>
+        </a:lnRef>
+        <a:fillRef idx="0">
+          <a:scrgbClr r="0" g="0" b="0"/>
+        </a:fillRef>
+        <a:effectRef idx="0">
+          <a:scrgbClr r="0" g="0" b="0"/>
+        </a:effectRef>
+        <a:fontRef idx="minor"/>
+      </dsp:style>
+      <dsp:txBody>
+        <a:bodyPr spcFirstLastPara="0" vert="horz" wrap="square" lIns="0" tIns="0" rIns="0" bIns="0" numCol="1" spcCol="1270" anchor="t" anchorCtr="0">
+          <a:noAutofit/>
+        </a:bodyPr>
+        <a:lstStyle/>
+        <a:p>
+          <a:pPr marL="0" lvl="0" indent="0" algn="ctr" defTabSz="800100">
+            <a:lnSpc>
+              <a:spcPct val="90000"/>
+            </a:lnSpc>
+            <a:spcBef>
+              <a:spcPct val="0"/>
+            </a:spcBef>
+            <a:spcAft>
+              <a:spcPct val="35000"/>
+            </a:spcAft>
+            <a:buNone/>
+            <a:defRPr cap="all"/>
+          </a:pPr>
+          <a:r>
+            <a:rPr lang="en-US" sz="1800" kern="1200" dirty="0"/>
+            <a:t>Submit a word document only include </a:t>
+          </a:r>
+          <a:r>
+            <a:rPr lang="en-US" sz="1800" kern="1200" dirty="0">
+              <a:solidFill>
+                <a:srgbClr val="C00000"/>
+              </a:solidFill>
+            </a:rPr>
+            <a:t>question and answer</a:t>
+          </a:r>
+        </a:p>
+      </dsp:txBody>
+      <dsp:txXfrm>
+        <a:off x="3841306" y="1815356"/>
+        <a:ext cx="3322282" cy="743927"/>
+      </dsp:txXfrm>
+    </dsp:sp>
+  </dsp:spTree>
+</dsp:drawing>
+</file>
+
+<file path=ppt/diagrams/layout1.xml><?xml version="1.0" encoding="utf-8"?>
+<dgm:layoutDef xmlns:dgm="http://schemas.openxmlformats.org/drawingml/2006/diagram" xmlns:a="http://schemas.openxmlformats.org/drawingml/2006/main" uniqueId="urn:microsoft.com/office/officeart/2018/5/layout/IconLeafLabelList">
+  <dgm:title val="Icon Leaf Label List"/>
+  <dgm:desc val="Use to show non-sequential or grouped chunks of information accompanied by a related visuals. Works best with icons or small pictures with short text captions."/>
+  <dgm:catLst>
+    <dgm:cat type="icon" pri="500"/>
+  </dgm:catLst>
+  <dgm:sampData useDef="1">
+    <dgm:dataModel>
+      <dgm:ptLst/>
+      <dgm:bg/>
+      <dgm:whole/>
+    </dgm:dataModel>
+  </dgm:sampData>
+  <dgm:styleData useDef="1">
+    <dgm:dataModel>
+      <dgm:ptLst/>
+      <dgm:bg/>
+      <dgm:whole/>
+    </dgm:dataModel>
+  </dgm:styleData>
+  <dgm:clrData useDef="1">
+    <dgm:dataModel>
+      <dgm:ptLst/>
+      <dgm:bg/>
+      <dgm:whole/>
+    </dgm:dataModel>
+  </dgm:clrData>
+  <dgm:layoutNode name="root">
+    <dgm:varLst>
+      <dgm:dir/>
+      <dgm:resizeHandles val="exact"/>
+    </dgm:varLst>
+    <dgm:choose name="Name0">
+      <dgm:if name="Name1" axis="self" func="var" arg="dir" op="equ" val="norm">
+        <dgm:alg type="snake">
+          <dgm:param type="grDir" val="tL"/>
+          <dgm:param type="flowDir" val="row"/>
+          <dgm:param type="contDir" val="sameDir"/>
+          <dgm:param type="off" val="ctr"/>
+          <dgm:param type="vertAlign" val="mid"/>
+          <dgm:param type="horzAlign" val="ctr"/>
+        </dgm:alg>
+      </dgm:if>
+      <dgm:else name="Name2">
+        <dgm:alg type="snake">
+          <dgm:param type="grDir" val="tR"/>
+          <dgm:param type="flowDir" val="row"/>
+          <dgm:param type="contDir" val="sameDir"/>
+          <dgm:param type="off" val="ctr"/>
+          <dgm:param type="vertAlign" val="mid"/>
+          <dgm:param type="horzAlign" val="ctr"/>
+        </dgm:alg>
+      </dgm:else>
+    </dgm:choose>
+    <dgm:shape xmlns:r="http://schemas.openxmlformats.org/officeDocument/2006/relationships" r:blip="">
+      <dgm:adjLst/>
+    </dgm:shape>
+    <dgm:presOf/>
+    <dgm:choose name="Name3">
+      <dgm:if name="Name4" axis="ch" ptType="node" func="cnt" op="lte" val="2">
+        <dgm:constrLst>
+          <dgm:constr type="h" for="ch" forName="compNode" refType="h" fact="0.4"/>
+          <dgm:constr type="w" for="ch" forName="compNode" val="100"/>
+          <dgm:constr type="w" for="ch" forName="sibTrans" refType="w" refFor="ch" refForName="compNode" fact="0.175"/>
+          <dgm:constr type="sp" refType="w" refFor="ch" refForName="compNode" op="equ" fact="0.25"/>
+          <dgm:constr type="primFontSz" for="des" ptType="node" op="equ" val="44"/>
+          <dgm:constr type="h" for="des" forName="compNode" op="equ"/>
+          <dgm:constr type="h" for="des" forName="textRect" op="equ"/>
+        </dgm:constrLst>
+      </dgm:if>
+      <dgm:if name="Name5" axis="ch" ptType="node" func="cnt" op="lte" val="3">
+        <dgm:constrLst>
+          <dgm:constr type="h" for="ch" forName="compNode" refType="h" fact="0.4"/>
+          <dgm:constr type="w" for="ch" forName="compNode" val="100"/>
+          <dgm:constr type="w" for="ch" forName="sibTrans" refType="w" refFor="ch" refForName="compNode" fact="0.175"/>
+          <dgm:constr type="sp" refType="w" refFor="ch" refForName="compNode" op="equ" fact="0.25"/>
+          <dgm:constr type="primFontSz" for="des" ptType="node" op="equ" val="40"/>
+          <dgm:constr type="h" for="des" forName="compNode" op="equ"/>
+          <dgm:constr type="h" for="des" forName="textRect" op="equ"/>
+        </dgm:constrLst>
+      </dgm:if>
+      <dgm:if name="Name6" axis="ch" ptType="node" func="cnt" op="lte" val="4">
+        <dgm:constrLst>
+          <dgm:constr type="h" for="ch" forName="compNode" refType="h" fact="0.4"/>
+          <dgm:constr type="w" for="ch" forName="compNode" refType="w"/>
+          <dgm:constr type="w" for="ch" forName="sibTrans" refType="w" refFor="ch" refForName="compNode" fact="0.175"/>
+          <dgm:constr type="sp" refType="w" refFor="ch" refForName="compNode" op="equ" fact="0.25"/>
+          <dgm:constr type="primFontSz" for="des" ptType="node" op="equ" val="32"/>
+          <dgm:constr type="h" for="des" forName="compNode" op="equ"/>
+          <dgm:constr type="h" for="des" forName="textRect" op="equ"/>
+        </dgm:constrLst>
+      </dgm:if>
+      <dgm:else name="Name7">
+        <dgm:constrLst>
+          <dgm:constr type="h" for="ch" forName="compNode" refType="h" fact="0.4"/>
+          <dgm:constr type="w" for="ch" forName="compNode" refType="w"/>
+          <dgm:constr type="w" for="ch" forName="sibTrans" refType="w" refFor="ch" refForName="compNode" fact="0.175"/>
+          <dgm:constr type="sp" refType="w" refFor="ch" refForName="compNode" op="equ" fact="0.25"/>
+          <dgm:constr type="primFontSz" for="des" ptType="node" op="equ" val="24"/>
+          <dgm:constr type="h" for="des" forName="compNode" op="equ"/>
+          <dgm:constr type="h" for="des" forName="textRect" op="equ"/>
+        </dgm:constrLst>
+      </dgm:else>
+    </dgm:choose>
+    <dgm:ruleLst>
+      <dgm:rule type="w" for="ch" forName="compNode" val="50" fact="NaN" max="NaN"/>
+    </dgm:ruleLst>
+    <dgm:forEach name="Name8" axis="ch" ptType="node">
+      <dgm:layoutNode name="compNode">
+        <dgm:alg type="composite"/>
+        <dgm:shape xmlns:r="http://schemas.openxmlformats.org/officeDocument/2006/relationships" r:blip="">
+          <dgm:adjLst/>
+        </dgm:shape>
+        <dgm:presOf axis="self"/>
+        <dgm:constrLst>
+          <dgm:constr type="w" for="ch" forName="iconBgRect" refType="w" fact="0.61"/>
+          <dgm:constr type="h" for="ch" forName="iconBgRect" refType="w" refFor="ch" refForName="iconBgRect"/>
+          <dgm:constr type="t" for="ch" forName="iconBgRect"/>
+          <dgm:constr type="ctrX" for="ch" forName="iconBgRect" refType="w" fact="0.5"/>
+          <dgm:constr type="w" for="ch" forName="iconRect" refType="w" fact="0.35"/>
+          <dgm:constr type="h" for="ch" forName="iconRect" refType="w" refFor="ch" refForName="iconRect"/>
+          <dgm:constr type="ctrX" for="ch" forName="iconRect" refType="ctrX" refFor="ch" refForName="iconBgRect"/>
+          <dgm:constr type="ctrY" for="ch" forName="iconRect" refType="ctrY" refFor="ch" refForName="iconBgRect"/>
+          <dgm:constr type="h" for="ch" forName="spaceRect" refType="w" fact="0.19"/>
+          <dgm:constr type="w" for="ch" forName="spaceRect" refType="w"/>
+          <dgm:constr type="l" for="ch" forName="spaceRect"/>
+          <dgm:constr type="t" for="ch" forName="spaceRect" refType="b" refFor="ch" refForName="iconBgRect"/>
+          <dgm:constr type="h" for="ch" forName="textRect" val="20"/>
+          <dgm:constr type="w" for="ch" forName="textRect" refType="w"/>
+          <dgm:constr type="l" for="ch" forName="textRect"/>
+          <dgm:constr type="t" for="ch" forName="textRect" refType="b" refFor="ch" refForName="spaceRect"/>
+        </dgm:constrLst>
+        <dgm:ruleLst>
+          <dgm:rule type="h" val="INF" fact="NaN" max="NaN"/>
+        </dgm:ruleLst>
+        <dgm:layoutNode name="iconBgRect" styleLbl="bgShp">
+          <dgm:alg type="sp"/>
+          <dgm:shape xmlns:r="http://schemas.openxmlformats.org/officeDocument/2006/relationships" type="round2DiagRect" r:blip="">
+            <dgm:adjLst/>
+            <dgm:extLst>
+              <a:ext uri="{B698B0E9-8C71-41B9-8309-B3DCBF30829C}">
+                <dgm1612:spPr xmlns:dgm1612="http://schemas.microsoft.com/office/drawing/2016/12/diagram">
+                  <a:prstGeom prst="round2DiagRect">
+                    <a:avLst>
+                      <a:gd name="adj1" fmla="val 29727"/>
+                      <a:gd name="adj2" fmla="val 0"/>
+                    </a:avLst>
+                  </a:prstGeom>
+                </dgm1612:spPr>
+              </a:ext>
+            </dgm:extLst>
+          </dgm:shape>
+          <dgm:presOf/>
+          <dgm:constrLst/>
+          <dgm:ruleLst/>
+        </dgm:layoutNode>
+        <dgm:layoutNode name="iconRect" styleLbl="node1">
+          <dgm:alg type="sp"/>
+          <dgm:shape xmlns:r="http://schemas.openxmlformats.org/officeDocument/2006/relationships" type="rect" r:blip="" blipPhldr="1">
+            <dgm:adjLst/>
+          </dgm:shape>
+          <dgm:presOf/>
+          <dgm:constrLst/>
+          <dgm:ruleLst/>
+        </dgm:layoutNode>
+        <dgm:layoutNode name="spaceRect">
+          <dgm:alg type="sp"/>
+          <dgm:shape xmlns:r="http://schemas.openxmlformats.org/officeDocument/2006/relationships" r:blip="">
+            <dgm:adjLst/>
+          </dgm:shape>
+          <dgm:presOf/>
+          <dgm:constrLst/>
+          <dgm:ruleLst/>
+        </dgm:layoutNode>
+        <dgm:layoutNode name="textRect" styleLbl="revTx">
+          <dgm:varLst>
+            <dgm:chMax val="1"/>
+            <dgm:chPref val="1"/>
+          </dgm:varLst>
+          <dgm:alg type="tx">
+            <dgm:param type="txAnchorVert" val="t"/>
+          </dgm:alg>
+          <dgm:shape xmlns:r="http://schemas.openxmlformats.org/officeDocument/2006/relationships" type="rect" r:blip="">
+            <dgm:adjLst/>
+          </dgm:shape>
+          <dgm:presOf axis="self" ptType="node"/>
+          <dgm:constrLst>
+            <dgm:constr type="lMarg"/>
+            <dgm:constr type="rMarg"/>
+            <dgm:constr type="tMarg"/>
+            <dgm:constr type="bMarg"/>
+          </dgm:constrLst>
+          <dgm:ruleLst>
+            <dgm:rule type="primFontSz" val="11" fact="NaN" max="NaN"/>
+            <dgm:rule type="h" val="INF" fact="NaN" max="NaN"/>
+          </dgm:ruleLst>
+        </dgm:layoutNode>
+      </dgm:layoutNode>
+      <dgm:forEach name="Name9" axis="followSib" ptType="sibTrans" cnt="1">
+        <dgm:layoutNode name="sibTrans">
+          <dgm:alg type="sp"/>
+          <dgm:shape xmlns:r="http://schemas.openxmlformats.org/officeDocument/2006/relationships" r:blip="">
+            <dgm:adjLst/>
+          </dgm:shape>
+          <dgm:presOf axis="self"/>
+          <dgm:constrLst/>
+          <dgm:ruleLst/>
+        </dgm:layoutNode>
+      </dgm:forEach>
+    </dgm:forEach>
+  </dgm:layoutNode>
+  <dgm:extLst>
+    <a:ext uri="{68A01E43-0DF5-4B5B-8FA6-DAF915123BFB}">
+      <dgm1612:lstStyle xmlns:dgm1612="http://schemas.microsoft.com/office/drawing/2016/12/diagram">
+        <a:lvl1pPr>
+          <a:lnSpc>
+            <a:spcPct val="100000"/>
+          </a:lnSpc>
+          <a:defRPr cap="all"/>
+        </a:lvl1pPr>
+      </dgm1612:lstStyle>
+    </a:ext>
+  </dgm:extLst>
+</dgm:layoutDef>
+</file>
+
+<file path=ppt/diagrams/quickStyle1.xml><?xml version="1.0" encoding="utf-8"?>
+<dgm:styleDef xmlns:dgm="http://schemas.openxmlformats.org/drawingml/2006/diagram" xmlns:a="http://schemas.openxmlformats.org/drawingml/2006/main" uniqueId="urn:microsoft.com/office/officeart/2005/8/quickstyle/simple1">
+  <dgm:title val=""/>
+  <dgm:desc val=""/>
+  <dgm:catLst>
+    <dgm:cat type="simple" pri="10100"/>
+  </dgm:catLst>
+  <dgm:scene3d>
+    <a:camera prst="orthographicFront"/>
+    <a:lightRig rig="threePt" dir="t"/>
+  </dgm:scene3d>
+  <dgm:styleLbl name="node0">
+    <dgm:scene3d>
+      <a:camera prst="orthographicFront"/>
+      <a:lightRig rig="threePt" dir="t"/>
+    </dgm:scene3d>
+    <dgm:sp3d/>
+    <dgm:txPr/>
+    <dgm:style>
+      <a:lnRef idx="2">
+        <a:scrgbClr r="0" g="0" b="0"/>
+      </a:lnRef>
+      <a:fillRef idx="1">
+        <a:scrgbClr r="0" g="0" b="0"/>
+      </a:fillRef>
+      <a:effectRef idx="0">
+        <a:scrgbClr r="0" g="0" b="0"/>
+      </a:effectRef>
+      <a:fontRef idx="minor">
+        <a:schemeClr val="lt1"/>
+      </a:fontRef>
+    </dgm:style>
+  </dgm:styleLbl>
+  <dgm:styleLbl name="lnNode1">
+    <dgm:scene3d>
+      <a:camera prst="orthographicFront"/>
+      <a:lightRig rig="threePt" dir="t"/>
+    </dgm:scene3d>
+    <dgm:sp3d/>
+    <dgm:txPr/>
+    <dgm:style>
+      <a:lnRef idx="2">
+        <a:scrgbClr r="0" g="0" b="0"/>
+      </a:lnRef>
+      <a:fillRef idx="1">
+        <a:scrgbClr r="0" g="0" b="0"/>
+      </a:fillRef>
+      <a:effectRef idx="0">
+        <a:scrgbClr r="0" g="0" b="0"/>
+      </a:effectRef>
+      <a:fontRef idx="minor">
+        <a:schemeClr val="lt1"/>
+      </a:fontRef>
+    </dgm:style>
+  </dgm:styleLbl>
+  <dgm:styleLbl name="vennNode1">
+    <dgm:scene3d>
+      <a:camera prst="orthographicFront"/>
+      <a:lightRig rig="threePt" dir="t"/>
+    </dgm:scene3d>
+    <dgm:sp3d/>
+    <dgm:txPr/>
+    <dgm:style>
+      <a:lnRef idx="2">
+        <a:scrgbClr r="0" g="0" b="0"/>
+      </a:lnRef>
+      <a:fillRef idx="1">
+        <a:scrgbClr r="0" g="0" b="0"/>
+      </a:fillRef>
+      <a:effectRef idx="0">
+        <a:scrgbClr r="0" g="0" b="0"/>
+      </a:effectRef>
+      <a:fontRef idx="minor">
+        <a:schemeClr val="tx1"/>
+      </a:fontRef>
+    </dgm:style>
+  </dgm:styleLbl>
+  <dgm:styleLbl name="alignNode1">
+    <dgm:scene3d>
+      <a:camera prst="orthographicFront"/>
+      <a:lightRig rig="threePt" dir="t"/>
+    </dgm:scene3d>
+    <dgm:sp3d/>
+    <dgm:txPr/>
+    <dgm:style>
+      <a:lnRef idx="2">
+        <a:scrgbClr r="0" g="0" b="0"/>
+      </a:lnRef>
+      <a:fillRef idx="1">
+        <a:scrgbClr r="0" g="0" b="0"/>
+      </a:fillRef>
+      <a:effectRef idx="0">
+        <a:scrgbClr r="0" g="0" b="0"/>
+      </a:effectRef>
+      <a:fontRef idx="minor">
+        <a:schemeClr val="lt1"/>
+      </a:fontRef>
+    </dgm:style>
+  </dgm:styleLbl>
+  <dgm:styleLbl name="node1">
+    <dgm:scene3d>
+      <a:camera prst="orthographicFront"/>
+      <a:lightRig rig="threePt" dir="t"/>
+    </dgm:scene3d>
+    <dgm:sp3d/>
+    <dgm:txPr/>
+    <dgm:style>
+      <a:lnRef idx="2">
+        <a:scrgbClr r="0" g="0" b="0"/>
+      </a:lnRef>
+      <a:fillRef idx="1">
+        <a:scrgbClr r="0" g="0" b="0"/>
+      </a:fillRef>
+      <a:effectRef idx="0">
+        <a:scrgbClr r="0" g="0" b="0"/>
+      </a:effectRef>
+      <a:fontRef idx="minor">
+        <a:schemeClr val="lt1"/>
+      </a:fontRef>
+    </dgm:style>
+  </dgm:styleLbl>
+  <dgm:styleLbl name="node2">
+    <dgm:scene3d>
+      <a:camera prst="orthographicFront"/>
+      <a:lightRig rig="threePt" dir="t"/>
+    </dgm:scene3d>
+    <dgm:sp3d/>
+    <dgm:txPr/>
+    <dgm:style>
+      <a:lnRef idx="2">
+        <a:scrgbClr r="0" g="0" b="0"/>
+      </a:lnRef>
+      <a:fillRef idx="1">
+        <a:scrgbClr r="0" g="0" b="0"/>
+      </a:fillRef>
+      <a:effectRef idx="0">
+        <a:scrgbClr r="0" g="0" b="0"/>
+      </a:effectRef>
+      <a:fontRef idx="minor">
+        <a:schemeClr val="lt1"/>
+      </a:fontRef>
+    </dgm:style>
+  </dgm:styleLbl>
+  <dgm:styleLbl name="node3">
+    <dgm:scene3d>
+      <a:camera prst="orthographicFront"/>
+      <a:lightRig rig="threePt" dir="t"/>
+    </dgm:scene3d>
+    <dgm:sp3d/>
+    <dgm:txPr/>
+    <dgm:style>
+      <a:lnRef idx="2">
+        <a:scrgbClr r="0" g="0" b="0"/>
+      </a:lnRef>
+      <a:fillRef idx="1">
+        <a:scrgbClr r="0" g="0" b="0"/>
+      </a:fillRef>
+      <a:effectRef idx="0">
+        <a:scrgbClr r="0" g="0" b="0"/>
+      </a:effectRef>
+      <a:fontRef idx="minor">
+        <a:schemeClr val="lt1"/>
+      </a:fontRef>
+    </dgm:style>
+  </dgm:styleLbl>
+  <dgm:styleLbl name="node4">
+    <dgm:scene3d>
+      <a:camera prst="orthographicFront"/>
+      <a:lightRig rig="threePt" dir="t"/>
+    </dgm:scene3d>
+    <dgm:sp3d/>
+    <dgm:txPr/>
+    <dgm:style>
+      <a:lnRef idx="2">
+        <a:scrgbClr r="0" g="0" b="0"/>
+      </a:lnRef>
+      <a:fillRef idx="1">
+        <a:scrgbClr r="0" g="0" b="0"/>
+      </a:fillRef>
+      <a:effectRef idx="0">
+        <a:scrgbClr r="0" g="0" b="0"/>
+      </a:effectRef>
+      <a:fontRef idx="minor">
+        <a:schemeClr val="lt1"/>
+      </a:fontRef>
+    </dgm:style>
+  </dgm:styleLbl>
+  <dgm:styleLbl name="fgImgPlace1">
+    <dgm:scene3d>
+      <a:camera prst="orthographicFront"/>
+      <a:lightRig rig="threePt" dir="t"/>
+    </dgm:scene3d>
+    <dgm:sp3d/>
+    <dgm:txPr/>
+    <dgm:style>
+      <a:lnRef idx="2">
+        <a:scrgbClr r="0" g="0" b="0"/>
+      </a:lnRef>
+      <a:fillRef idx="1">
+        <a:scrgbClr r="0" g="0" b="0"/>
+      </a:fillRef>
+      <a:effectRef idx="0">
+        <a:scrgbClr r="0" g="0" b="0"/>
+      </a:effectRef>
+      <a:fontRef idx="minor"/>
+    </dgm:style>
+  </dgm:styleLbl>
+  <dgm:styleLbl name="alignImgPlace1">
+    <dgm:scene3d>
+      <a:camera prst="orthographicFront"/>
+      <a:lightRig rig="threePt" dir="t"/>
+    </dgm:scene3d>
+    <dgm:sp3d/>
+    <dgm:txPr/>
+    <dgm:style>
+      <a:lnRef idx="2">
+        <a:scrgbClr r="0" g="0" b="0"/>
+      </a:lnRef>
+      <a:fillRef idx="1">
+        <a:scrgbClr r="0" g="0" b="0"/>
+      </a:fillRef>
+      <a:effectRef idx="0">
+        <a:scrgbClr r="0" g="0" b="0"/>
+      </a:effectRef>
+      <a:fontRef idx="minor"/>
+    </dgm:style>
+  </dgm:styleLbl>
+  <dgm:styleLbl name="bgImgPlace1">
+    <dgm:scene3d>
+      <a:camera prst="orthographicFront"/>
+      <a:lightRig rig="threePt" dir="t"/>
+    </dgm:scene3d>
+    <dgm:sp3d/>
+    <dgm:txPr/>
+    <dgm:style>
+      <a:lnRef idx="2">
+        <a:scrgbClr r="0" g="0" b="0"/>
+      </a:lnRef>
+      <a:fillRef idx="1">
+        <a:scrgbClr r="0" g="0" b="0"/>
+      </a:fillRef>
+      <a:effectRef idx="0">
+        <a:scrgbClr r="0" g="0" b="0"/>
+      </a:effectRef>
+      <a:fontRef idx="minor"/>
+    </dgm:style>
+  </dgm:styleLbl>
+  <dgm:styleLbl name="sibTrans2D1">
+    <dgm:scene3d>
+      <a:camera prst="orthographicFront"/>
+      <a:lightRig rig="threePt" dir="t"/>
+    </dgm:scene3d>
+    <dgm:sp3d/>
+    <dgm:txPr/>
+    <dgm:style>
+      <a:lnRef idx="0">
+        <a:scrgbClr r="0" g="0" b="0"/>
+      </a:lnRef>
+      <a:fillRef idx="1">
+        <a:scrgbClr r="0" g="0" b="0"/>
+      </a:fillRef>
+      <a:effectRef idx="0">
+        <a:scrgbClr r="0" g="0" b="0"/>
+      </a:effectRef>
+      <a:fontRef idx="minor">
+        <a:schemeClr val="lt1"/>
+      </a:fontRef>
+    </dgm:style>
+  </dgm:styleLbl>
+  <dgm:styleLbl name="fgSibTrans2D1">
+    <dgm:scene3d>
+      <a:camera prst="orthographicFront"/>
+      <a:lightRig rig="threePt" dir="t"/>
+    </dgm:scene3d>
+    <dgm:sp3d/>
+    <dgm:txPr/>
+    <dgm:style>
+      <a:lnRef idx="0">
+        <a:scrgbClr r="0" g="0" b="0"/>
+      </a:lnRef>
+      <a:fillRef idx="1">
+        <a:scrgbClr r="0" g="0" b="0"/>
+      </a:fillRef>
+      <a:effectRef idx="0">
+        <a:scrgbClr r="0" g="0" b="0"/>
+      </a:effectRef>
+      <a:fontRef idx="minor">
+        <a:schemeClr val="lt1"/>
+      </a:fontRef>
+    </dgm:style>
+  </dgm:styleLbl>
+  <dgm:styleLbl name="bgSibTrans2D1">
+    <dgm:scene3d>
+      <a:camera prst="orthographicFront"/>
+      <a:lightRig rig="threePt" dir="t"/>
+    </dgm:scene3d>
+    <dgm:sp3d/>
+    <dgm:txPr/>
+    <dgm:style>
+      <a:lnRef idx="0">
+        <a:scrgbClr r="0" g="0" b="0"/>
+      </a:lnRef>
+      <a:fillRef idx="1">
+        <a:scrgbClr r="0" g="0" b="0"/>
+      </a:fillRef>
+      <a:effectRef idx="0">
+        <a:scrgbClr r="0" g="0" b="0"/>
+      </a:effectRef>
+      <a:fontRef idx="minor">
+        <a:schemeClr val="lt1"/>
+      </a:fontRef>
+    </dgm:style>
+  </dgm:styleLbl>
+  <dgm:styleLbl name="sibTrans1D1">
+    <dgm:scene3d>
+      <a:camera prst="orthographicFront"/>
+      <a:lightRig rig="threePt" dir="t"/>
+    </dgm:scene3d>
+    <dgm:sp3d/>
+    <dgm:txPr/>
+    <dgm:style>
+      <a:lnRef idx="1">
+        <a:scrgbClr r="0" g="0" b="0"/>
+      </a:lnRef>
+      <a:fillRef idx="0">
+        <a:scrgbClr r="0" g="0" b="0"/>
+      </a:fillRef>
+      <a:effectRef idx="0">
+        <a:scrgbClr r="0" g="0" b="0"/>
+      </a:effectRef>
+      <a:fontRef idx="minor"/>
+    </dgm:style>
+  </dgm:styleLbl>
+  <dgm:styleLbl name="callout">
+    <dgm:scene3d>
+      <a:camera prst="orthographicFront"/>
+      <a:lightRig rig="threePt" dir="t"/>
+    </dgm:scene3d>
+    <dgm:sp3d/>
+    <dgm:txPr/>
+    <dgm:style>
+      <a:lnRef idx="2">
+        <a:scrgbClr r="0" g="0" b="0"/>
+      </a:lnRef>
+      <a:fillRef idx="1">
+        <a:scrgbClr r="0" g="0" b="0"/>
+      </a:fillRef>
+      <a:effectRef idx="0">
+        <a:scrgbClr r="0" g="0" b="0"/>
+      </a:effectRef>
+      <a:fontRef idx="minor"/>
+    </dgm:style>
+  </dgm:styleLbl>
+  <dgm:styleLbl name="asst0">
+    <dgm:scene3d>
+      <a:camera prst="orthographicFront"/>
+      <a:lightRig rig="threePt" dir="t"/>
+    </dgm:scene3d>
+    <dgm:sp3d/>
+    <dgm:txPr/>
+    <dgm:style>
+      <a:lnRef idx="2">
+        <a:scrgbClr r="0" g="0" b="0"/>
+      </a:lnRef>
+      <a:fillRef idx="1">
+        <a:scrgbClr r="0" g="0" b="0"/>
+      </a:fillRef>
+      <a:effectRef idx="0">
+        <a:scrgbClr r="0" g="0" b="0"/>
+      </a:effectRef>
+      <a:fontRef idx="minor">
+        <a:schemeClr val="lt1"/>
+      </a:fontRef>
+    </dgm:style>
+  </dgm:styleLbl>
+  <dgm:styleLbl name="asst1">
+    <dgm:scene3d>
+      <a:camera prst="orthographicFront"/>
+      <a:lightRig rig="threePt" dir="t"/>
+    </dgm:scene3d>
+    <dgm:sp3d/>
+    <dgm:txPr/>
+    <dgm:style>
+      <a:lnRef idx="2">
+        <a:scrgbClr r="0" g="0" b="0"/>
+      </a:lnRef>
+      <a:fillRef idx="1">
+        <a:scrgbClr r="0" g="0" b="0"/>
+      </a:fillRef>
+      <a:effectRef idx="0">
+        <a:scrgbClr r="0" g="0" b="0"/>
+      </a:effectRef>
+      <a:fontRef idx="minor">
+        <a:schemeClr val="lt1"/>
+      </a:fontRef>
+    </dgm:style>
+  </dgm:styleLbl>
+  <dgm:styleLbl name="asst2">
+    <dgm:scene3d>
+      <a:camera prst="orthographicFront"/>
+      <a:lightRig rig="threePt" dir="t"/>
+    </dgm:scene3d>
+    <dgm:sp3d/>
+    <dgm:txPr/>
+    <dgm:style>
+      <a:lnRef idx="2">
+        <a:scrgbClr r="0" g="0" b="0"/>
+      </a:lnRef>
+      <a:fillRef idx="1">
+        <a:scrgbClr r="0" g="0" b="0"/>
+      </a:fillRef>
+      <a:effectRef idx="0">
+        <a:scrgbClr r="0" g="0" b="0"/>
+      </a:effectRef>
+      <a:fontRef idx="minor">
+        <a:schemeClr val="lt1"/>
+      </a:fontRef>
+    </dgm:style>
+  </dgm:styleLbl>
+  <dgm:styleLbl name="asst3">
+    <dgm:scene3d>
+      <a:camera prst="orthographicFront"/>
+      <a:lightRig rig="threePt" dir="t"/>
+    </dgm:scene3d>
+    <dgm:sp3d/>
+    <dgm:txPr/>
+    <dgm:style>
+      <a:lnRef idx="2">
+        <a:scrgbClr r="0" g="0" b="0"/>
+      </a:lnRef>
+      <a:fillRef idx="1">
+        <a:scrgbClr r="0" g="0" b="0"/>
+      </a:fillRef>
+      <a:effectRef idx="0">
+        <a:scrgbClr r="0" g="0" b="0"/>
+      </a:effectRef>
+      <a:fontRef idx="minor">
+        <a:schemeClr val="lt1"/>
+      </a:fontRef>
+    </dgm:style>
+  </dgm:styleLbl>
+  <dgm:styleLbl name="asst4">
+    <dgm:scene3d>
+      <a:camera prst="orthographicFront"/>
+      <a:lightRig rig="threePt" dir="t"/>
+    </dgm:scene3d>
+    <dgm:sp3d/>
+    <dgm:txPr/>
+    <dgm:style>
+      <a:lnRef idx="2">
+        <a:scrgbClr r="0" g="0" b="0"/>
+      </a:lnRef>
+      <a:fillRef idx="1">
+        <a:scrgbClr r="0" g="0" b="0"/>
+      </a:fillRef>
+      <a:effectRef idx="0">
+        <a:scrgbClr r="0" g="0" b="0"/>
+      </a:effectRef>
+      <a:fontRef idx="minor">
+        <a:schemeClr val="lt1"/>
+      </a:fontRef>
+    </dgm:style>
+  </dgm:styleLbl>
+  <dgm:styleLbl name="parChTrans2D1">
+    <dgm:scene3d>
+      <a:camera prst="orthographicFront"/>
+      <a:lightRig rig="threePt" dir="t"/>
+    </dgm:scene3d>
+    <dgm:sp3d/>
+    <dgm:txPr/>
+    <dgm:style>
+      <a:lnRef idx="2">
+        <a:scrgbClr r="0" g="0" b="0"/>
+      </a:lnRef>
+      <a:fillRef idx="1">
+        <a:scrgbClr r="0" g="0" b="0"/>
+      </a:fillRef>
+      <a:effectRef idx="0">
+        <a:scrgbClr r="0" g="0" b="0"/>
+      </a:effectRef>
+      <a:fontRef idx="minor">
+        <a:schemeClr val="lt1"/>
+      </a:fontRef>
+    </dgm:style>
+  </dgm:styleLbl>
+  <dgm:styleLbl name="parChTrans2D2">
+    <dgm:scene3d>
+      <a:camera prst="orthographicFront"/>
+      <a:lightRig rig="threePt" dir="t"/>
+    </dgm:scene3d>
+    <dgm:sp3d/>
+    <dgm:txPr/>
+    <dgm:style>
+      <a:lnRef idx="2">
+        <a:scrgbClr r="0" g="0" b="0"/>
+      </a:lnRef>
+      <a:fillRef idx="1">
+        <a:scrgbClr r="0" g="0" b="0"/>
+      </a:fillRef>
+      <a:effectRef idx="0">
+        <a:scrgbClr r="0" g="0" b="0"/>
+      </a:effectRef>
+      <a:fontRef idx="minor">
+        <a:schemeClr val="lt1"/>
+      </a:fontRef>
+    </dgm:style>
+  </dgm:styleLbl>
+  <dgm:styleLbl name="parChTrans2D3">
+    <dgm:scene3d>
+      <a:camera prst="orthographicFront"/>
+      <a:lightRig rig="threePt" dir="t"/>
+    </dgm:scene3d>
+    <dgm:sp3d/>
+    <dgm:txPr/>
+    <dgm:style>
+      <a:lnRef idx="2">
+        <a:scrgbClr r="0" g="0" b="0"/>
+      </a:lnRef>
+      <a:fillRef idx="1">
+        <a:scrgbClr r="0" g="0" b="0"/>
+      </a:fillRef>
+      <a:effectRef idx="0">
+        <a:scrgbClr r="0" g="0" b="0"/>
+      </a:effectRef>
+      <a:fontRef idx="minor">
+        <a:schemeClr val="lt1"/>
+      </a:fontRef>
+    </dgm:style>
+  </dgm:styleLbl>
+  <dgm:styleLbl name="parChTrans2D4">
+    <dgm:scene3d>
+      <a:camera prst="orthographicFront"/>
+      <a:lightRig rig="threePt" dir="t"/>
+    </dgm:scene3d>
+    <dgm:sp3d/>
+    <dgm:txPr/>
+    <dgm:style>
+      <a:lnRef idx="2">
+        <a:scrgbClr r="0" g="0" b="0"/>
+      </a:lnRef>
+      <a:fillRef idx="1">
+        <a:scrgbClr r="0" g="0" b="0"/>
+      </a:fillRef>
+      <a:effectRef idx="0">
+        <a:scrgbClr r="0" g="0" b="0"/>
+      </a:effectRef>
+      <a:fontRef idx="minor">
+        <a:schemeClr val="lt1"/>
+      </a:fontRef>
+    </dgm:style>
+  </dgm:styleLbl>
+  <dgm:styleLbl name="parChTrans1D1">
+    <dgm:scene3d>
+      <a:camera prst="orthographicFront"/>
+      <a:lightRig rig="threePt" dir="t"/>
+    </dgm:scene3d>
+    <dgm:sp3d/>
+    <dgm:txPr/>
+    <dgm:style>
+      <a:lnRef idx="2">
+        <a:scrgbClr r="0" g="0" b="0"/>
+      </a:lnRef>
+      <a:fillRef idx="0">
+        <a:scrgbClr r="0" g="0" b="0"/>
+      </a:fillRef>
+      <a:effectRef idx="0">
+        <a:scrgbClr r="0" g="0" b="0"/>
+      </a:effectRef>
+      <a:fontRef idx="minor"/>
+    </dgm:style>
+  </dgm:styleLbl>
+  <dgm:styleLbl name="parChTrans1D2">
+    <dgm:scene3d>
+      <a:camera prst="orthographicFront"/>
+      <a:lightRig rig="threePt" dir="t"/>
+    </dgm:scene3d>
+    <dgm:sp3d/>
+    <dgm:txPr/>
+    <dgm:style>
+      <a:lnRef idx="2">
+        <a:scrgbClr r="0" g="0" b="0"/>
+      </a:lnRef>
+      <a:fillRef idx="0">
+        <a:scrgbClr r="0" g="0" b="0"/>
+      </a:fillRef>
+      <a:effectRef idx="0">
+        <a:scrgbClr r="0" g="0" b="0"/>
+      </a:effectRef>
+      <a:fontRef idx="minor"/>
+    </dgm:style>
+  </dgm:styleLbl>
+  <dgm:styleLbl name="parChTrans1D3">
+    <dgm:scene3d>
+      <a:camera prst="orthographicFront"/>
+      <a:lightRig rig="threePt" dir="t"/>
+    </dgm:scene3d>
+    <dgm:sp3d/>
+    <dgm:txPr/>
+    <dgm:style>
+      <a:lnRef idx="2">
+        <a:scrgbClr r="0" g="0" b="0"/>
+      </a:lnRef>
+      <a:fillRef idx="0">
+        <a:scrgbClr r="0" g="0" b="0"/>
+      </a:fillRef>
+      <a:effectRef idx="0">
+        <a:scrgbClr r="0" g="0" b="0"/>
+      </a:effectRef>
+      <a:fontRef idx="minor"/>
+    </dgm:style>
+  </dgm:styleLbl>
+  <dgm:styleLbl name="parChTrans1D4">
+    <dgm:scene3d>
+      <a:camera prst="orthographicFront"/>
+      <a:lightRig rig="threePt" dir="t"/>
+    </dgm:scene3d>
+    <dgm:sp3d/>
+    <dgm:txPr/>
+    <dgm:style>
+      <a:lnRef idx="2">
+        <a:scrgbClr r="0" g="0" b="0"/>
+      </a:lnRef>
+      <a:fillRef idx="0">
+        <a:scrgbClr r="0" g="0" b="0"/>
+      </a:fillRef>
+      <a:effectRef idx="0">
+        <a:scrgbClr r="0" g="0" b="0"/>
+      </a:effectRef>
+      <a:fontRef idx="minor"/>
+    </dgm:style>
+  </dgm:styleLbl>
+  <dgm:styleLbl name="fgAcc1">
+    <dgm:scene3d>
+      <a:camera prst="orthographicFront"/>
+      <a:lightRig rig="threePt" dir="t"/>
+    </dgm:scene3d>
+    <dgm:sp3d/>
+    <dgm:txPr/>
+    <dgm:style>
+      <a:lnRef idx="2">
+        <a:scrgbClr r="0" g="0" b="0"/>
+      </a:lnRef>
+      <a:fillRef idx="1">
+        <a:scrgbClr r="0" g="0" b="0"/>
+      </a:fillRef>
+      <a:effectRef idx="0">
+        <a:scrgbClr r="0" g="0" b="0"/>
+      </a:effectRef>
+      <a:fontRef idx="minor"/>
+    </dgm:style>
+  </dgm:styleLbl>
+  <dgm:styleLbl name="conFgAcc1">
+    <dgm:scene3d>
+      <a:camera prst="orthographicFront"/>
+      <a:lightRig rig="threePt" dir="t"/>
+    </dgm:scene3d>
+    <dgm:sp3d/>
+    <dgm:txPr/>
+    <dgm:style>
+      <a:lnRef idx="2">
+        <a:scrgbClr r="0" g="0" b="0"/>
+      </a:lnRef>
+      <a:fillRef idx="1">
+        <a:scrgbClr r="0" g="0" b="0"/>
+      </a:fillRef>
+      <a:effectRef idx="0">
+        <a:scrgbClr r="0" g="0" b="0"/>
+      </a:effectRef>
+      <a:fontRef idx="minor"/>
+    </dgm:style>
+  </dgm:styleLbl>
+  <dgm:styleLbl name="alignAcc1">
+    <dgm:scene3d>
+      <a:camera prst="orthographicFront"/>
+      <a:lightRig rig="threePt" dir="t"/>
+    </dgm:scene3d>
+    <dgm:sp3d/>
+    <dgm:txPr/>
+    <dgm:style>
+      <a:lnRef idx="2">
+        <a:scrgbClr r="0" g="0" b="0"/>
+      </a:lnRef>
+      <a:fillRef idx="1">
+        <a:scrgbClr r="0" g="0" b="0"/>
+      </a:fillRef>
+      <a:effectRef idx="0">
+        <a:scrgbClr r="0" g="0" b="0"/>
+      </a:effectRef>
+      <a:fontRef idx="minor"/>
+    </dgm:style>
+  </dgm:styleLbl>
+  <dgm:styleLbl name="trAlignAcc1">
+    <dgm:scene3d>
+      <a:camera prst="orthographicFront"/>
+      <a:lightRig rig="threePt" dir="t"/>
+    </dgm:scene3d>
+    <dgm:sp3d/>
+    <dgm:txPr/>
+    <dgm:style>
+      <a:lnRef idx="1">
+        <a:scrgbClr r="0" g="0" b="0"/>
+      </a:lnRef>
+      <a:fillRef idx="1">
+        <a:scrgbClr r="0" g="0" b="0"/>
+      </a:fillRef>
+      <a:effectRef idx="0">
+        <a:scrgbClr r="0" g="0" b="0"/>
+      </a:effectRef>
+      <a:fontRef idx="minor"/>
+    </dgm:style>
+  </dgm:styleLbl>
+  <dgm:styleLbl name="bgAcc1">
+    <dgm:scene3d>
+      <a:camera prst="orthographicFront"/>
+      <a:lightRig rig="threePt" dir="t"/>
+    </dgm:scene3d>
+    <dgm:sp3d/>
+    <dgm:txPr/>
+    <dgm:style>
+      <a:lnRef idx="2">
+        <a:scrgbClr r="0" g="0" b="0"/>
+      </a:lnRef>
+      <a:fillRef idx="1">
+        <a:scrgbClr r="0" g="0" b="0"/>
+      </a:fillRef>
+      <a:effectRef idx="0">
+        <a:scrgbClr r="0" g="0" b="0"/>
+      </a:effectRef>
+      <a:fontRef idx="minor"/>
+    </dgm:style>
+  </dgm:styleLbl>
+  <dgm:styleLbl name="solidFgAcc1">
+    <dgm:scene3d>
+      <a:camera prst="orthographicFront"/>
+      <a:lightRig rig="threePt" dir="t"/>
+    </dgm:scene3d>
+    <dgm:sp3d/>
+    <dgm:txPr/>
+    <dgm:style>
+      <a:lnRef idx="2">
+        <a:scrgbClr r="0" g="0" b="0"/>
+      </a:lnRef>
+      <a:fillRef idx="1">
+        <a:scrgbClr r="0" g="0" b="0"/>
+      </a:fillRef>
+      <a:effectRef idx="0">
+        <a:scrgbClr r="0" g="0" b="0"/>
+      </a:effectRef>
+      <a:fontRef idx="minor"/>
+    </dgm:style>
+  </dgm:styleLbl>
+  <dgm:styleLbl name="solidAlignAcc1">
+    <dgm:scene3d>
+      <a:camera prst="orthographicFront"/>
+      <a:lightRig rig="threePt" dir="t"/>
+    </dgm:scene3d>
+    <dgm:sp3d/>
+    <dgm:txPr/>
+    <dgm:style>
+      <a:lnRef idx="2">
+        <a:scrgbClr r="0" g="0" b="0"/>
+      </a:lnRef>
+      <a:fillRef idx="1">
+        <a:scrgbClr r="0" g="0" b="0"/>
+      </a:fillRef>
+      <a:effectRef idx="0">
+        <a:scrgbClr r="0" g="0" b="0"/>
+      </a:effectRef>
+      <a:fontRef idx="minor"/>
+    </dgm:style>
+  </dgm:styleLbl>
+  <dgm:styleLbl name="solidBgAcc1">
+    <dgm:scene3d>
+      <a:camera prst="orthographicFront"/>
+      <a:lightRig rig="threePt" dir="t"/>
+    </dgm:scene3d>
+    <dgm:sp3d/>
+    <dgm:txPr/>
+    <dgm:style>
+      <a:lnRef idx="2">
+        <a:scrgbClr r="0" g="0" b="0"/>
+      </a:lnRef>
+      <a:fillRef idx="1">
+        <a:scrgbClr r="0" g="0" b="0"/>
+      </a:fillRef>
+      <a:effectRef idx="0">
+        <a:scrgbClr r="0" g="0" b="0"/>
+      </a:effectRef>
+      <a:fontRef idx="minor"/>
+    </dgm:style>
+  </dgm:styleLbl>
+  <dgm:styleLbl name="fgAccFollowNode1">
+    <dgm:scene3d>
+      <a:camera prst="orthographicFront"/>
+      <a:lightRig rig="threePt" dir="t"/>
+    </dgm:scene3d>
+    <dgm:sp3d/>
+    <dgm:txPr/>
+    <dgm:style>
+      <a:lnRef idx="2">
+        <a:scrgbClr r="0" g="0" b="0"/>
+      </a:lnRef>
+      <a:fillRef idx="1">
+        <a:scrgbClr r="0" g="0" b="0"/>
+      </a:fillRef>
+      <a:effectRef idx="0">
+        <a:scrgbClr r="0" g="0" b="0"/>
+      </a:effectRef>
+      <a:fontRef idx="minor"/>
+    </dgm:style>
+  </dgm:styleLbl>
+  <dgm:styleLbl name="alignAccFollowNode1">
+    <dgm:scene3d>
+      <a:camera prst="orthographicFront"/>
+      <a:lightRig rig="threePt" dir="t"/>
+    </dgm:scene3d>
+    <dgm:sp3d/>
+    <dgm:txPr/>
+    <dgm:style>
+      <a:lnRef idx="2">
+        <a:scrgbClr r="0" g="0" b="0"/>
+      </a:lnRef>
+      <a:fillRef idx="1">
+        <a:scrgbClr r="0" g="0" b="0"/>
+      </a:fillRef>
+      <a:effectRef idx="0">
+        <a:scrgbClr r="0" g="0" b="0"/>
+      </a:effectRef>
+      <a:fontRef idx="minor"/>
+    </dgm:style>
+  </dgm:styleLbl>
+  <dgm:styleLbl name="bgAccFollowNode1">
+    <dgm:scene3d>
+      <a:camera prst="orthographicFront"/>
+      <a:lightRig rig="threePt" dir="t"/>
+    </dgm:scene3d>
+    <dgm:sp3d/>
+    <dgm:txPr/>
+    <dgm:style>
+      <a:lnRef idx="2">
+        <a:scrgbClr r="0" g="0" b="0"/>
+      </a:lnRef>
+      <a:fillRef idx="1">
+        <a:scrgbClr r="0" g="0" b="0"/>
+      </a:fillRef>
+      <a:effectRef idx="0">
+        <a:scrgbClr r="0" g="0" b="0"/>
+      </a:effectRef>
+      <a:fontRef idx="minor"/>
+    </dgm:style>
+  </dgm:styleLbl>
+  <dgm:styleLbl name="fgAcc0">
+    <dgm:scene3d>
+      <a:camera prst="orthographicFront"/>
+      <a:lightRig rig="threePt" dir="t"/>
+    </dgm:scene3d>
+    <dgm:sp3d/>
+    <dgm:txPr/>
+    <dgm:style>
+      <a:lnRef idx="2">
+        <a:scrgbClr r="0" g="0" b="0"/>
+      </a:lnRef>
+      <a:fillRef idx="1">
+        <a:scrgbClr r="0" g="0" b="0"/>
+      </a:fillRef>
+      <a:effectRef idx="0">
+        <a:scrgbClr r="0" g="0" b="0"/>
+      </a:effectRef>
+      <a:fontRef idx="minor"/>
+    </dgm:style>
+  </dgm:styleLbl>
+  <dgm:styleLbl name="fgAcc2">
+    <dgm:scene3d>
+      <a:camera prst="orthographicFront"/>
+      <a:lightRig rig="threePt" dir="t"/>
+    </dgm:scene3d>
+    <dgm:sp3d/>
+    <dgm:txPr/>
+    <dgm:style>
+      <a:lnRef idx="2">
+        <a:scrgbClr r="0" g="0" b="0"/>
+      </a:lnRef>
+      <a:fillRef idx="1">
+        <a:scrgbClr r="0" g="0" b="0"/>
+      </a:fillRef>
+      <a:effectRef idx="0">
+        <a:scrgbClr r="0" g="0" b="0"/>
+      </a:effectRef>
+      <a:fontRef idx="minor"/>
+    </dgm:style>
+  </dgm:styleLbl>
+  <dgm:styleLbl name="fgAcc3">
+    <dgm:scene3d>
+      <a:camera prst="orthographicFront"/>
+      <a:lightRig rig="threePt" dir="t"/>
+    </dgm:scene3d>
+    <dgm:sp3d/>
+    <dgm:txPr/>
+    <dgm:style>
+      <a:lnRef idx="2">
+        <a:scrgbClr r="0" g="0" b="0"/>
+      </a:lnRef>
+      <a:fillRef idx="1">
+        <a:scrgbClr r="0" g="0" b="0"/>
+      </a:fillRef>
+      <a:effectRef idx="0">
+        <a:scrgbClr r="0" g="0" b="0"/>
+      </a:effectRef>
+      <a:fontRef idx="minor"/>
+    </dgm:style>
+  </dgm:styleLbl>
+  <dgm:styleLbl name="fgAcc4">
+    <dgm:scene3d>
+      <a:camera prst="orthographicFront"/>
+      <a:lightRig rig="threePt" dir="t"/>
+    </dgm:scene3d>
+    <dgm:sp3d/>
+    <dgm:txPr/>
+    <dgm:style>
+      <a:lnRef idx="2">
+        <a:scrgbClr r="0" g="0" b="0"/>
+      </a:lnRef>
+      <a:fillRef idx="1">
+        <a:scrgbClr r="0" g="0" b="0"/>
+      </a:fillRef>
+      <a:effectRef idx="0">
+        <a:scrgbClr r="0" g="0" b="0"/>
+      </a:effectRef>
+      <a:fontRef idx="minor"/>
+    </dgm:style>
+  </dgm:styleLbl>
+  <dgm:styleLbl name="bgShp">
+    <dgm:scene3d>
+      <a:camera prst="orthographicFront"/>
+      <a:lightRig rig="threePt" dir="t"/>
+    </dgm:scene3d>
+    <dgm:sp3d/>
+    <dgm:txPr/>
+    <dgm:style>
+      <a:lnRef idx="0">
+        <a:scrgbClr r="0" g="0" b="0"/>
+      </a:lnRef>
+      <a:fillRef idx="1">
+        <a:scrgbClr r="0" g="0" b="0"/>
+      </a:fillRef>
+      <a:effectRef idx="0">
+        <a:scrgbClr r="0" g="0" b="0"/>
+      </a:effectRef>
+      <a:fontRef idx="minor"/>
+    </dgm:style>
+  </dgm:styleLbl>
+  <dgm:styleLbl name="dkBgShp">
+    <dgm:scene3d>
+      <a:camera prst="orthographicFront"/>
+      <a:lightRig rig="threePt" dir="t"/>
+    </dgm:scene3d>
+    <dgm:sp3d/>
+    <dgm:txPr/>
+    <dgm:style>
+      <a:lnRef idx="0">
+        <a:scrgbClr r="0" g="0" b="0"/>
+      </a:lnRef>
+      <a:fillRef idx="1">
+        <a:scrgbClr r="0" g="0" b="0"/>
+      </a:fillRef>
+      <a:effectRef idx="0">
+        <a:scrgbClr r="0" g="0" b="0"/>
+      </a:effectRef>
+      <a:fontRef idx="minor"/>
+    </dgm:style>
+  </dgm:styleLbl>
+  <dgm:styleLbl name="trBgShp">
+    <dgm:scene3d>
+      <a:camera prst="orthographicFront"/>
+      <a:lightRig rig="threePt" dir="t"/>
+    </dgm:scene3d>
+    <dgm:sp3d/>
+    <dgm:txPr/>
+    <dgm:style>
+      <a:lnRef idx="0">
+        <a:scrgbClr r="0" g="0" b="0"/>
+      </a:lnRef>
+      <a:fillRef idx="1">
+        <a:scrgbClr r="0" g="0" b="0"/>
+      </a:fillRef>
+      <a:effectRef idx="0">
+        <a:scrgbClr r="0" g="0" b="0"/>
+      </a:effectRef>
+      <a:fontRef idx="minor"/>
+    </dgm:style>
+  </dgm:styleLbl>
+  <dgm:styleLbl name="fgShp">
+    <dgm:scene3d>
+      <a:camera prst="orthographicFront"/>
+      <a:lightRig rig="threePt" dir="t"/>
+    </dgm:scene3d>
+    <dgm:sp3d/>
+    <dgm:txPr/>
+    <dgm:style>
+      <a:lnRef idx="2">
+        <a:scrgbClr r="0" g="0" b="0"/>
+      </a:lnRef>
+      <a:fillRef idx="1">
+        <a:scrgbClr r="0" g="0" b="0"/>
+      </a:fillRef>
+      <a:effectRef idx="0">
+        <a:scrgbClr r="0" g="0" b="0"/>
+      </a:effectRef>
+      <a:fontRef idx="minor"/>
+    </dgm:style>
+  </dgm:styleLbl>
+  <dgm:styleLbl name="revTx">
+    <dgm:scene3d>
+      <a:camera prst="orthographicFront"/>
+      <a:lightRig rig="threePt" dir="t"/>
+    </dgm:scene3d>
+    <dgm:sp3d/>
+    <dgm:txPr/>
+    <dgm:style>
+      <a:lnRef idx="0">
+        <a:scrgbClr r="0" g="0" b="0"/>
+      </a:lnRef>
+      <a:fillRef idx="0">
+        <a:scrgbClr r="0" g="0" b="0"/>
+      </a:fillRef>
+      <a:effectRef idx="0">
+        <a:scrgbClr r="0" g="0" b="0"/>
+      </a:effectRef>
+      <a:fontRef idx="minor"/>
+    </dgm:style>
+  </dgm:styleLbl>
+</dgm:styleDef>
+</file>
+
 <file path=ppt/notesMasters/notesMaster1.xml><?xml version="1.0" encoding="utf-8"?>
 <p:notesMaster xmlns:a="http://schemas.openxmlformats.org/drawingml/2006/main" xmlns:r="http://schemas.openxmlformats.org/officeDocument/2006/relationships" xmlns:p="http://schemas.openxmlformats.org/presentationml/2006/main">
   <p:cSld>
@@ -240,7 +3017,7 @@
             <a:fld id="{66C520B4-85AA-9542-8CF7-3D2DDCE6041D}" type="datetimeFigureOut">
               <a:rPr lang="en-US" smtClean="0"/>
               <a:pPr/>
-              <a:t>9/23/2025</a:t>
+              <a:t>9/25/2025</a:t>
             </a:fld>
             <a:endParaRPr lang="en-US"/>
           </a:p>
@@ -996,7 +3773,7 @@
           <a:bodyPr/>
           <a:lstStyle/>
           <a:p>
-            <a:endParaRPr lang="en-US" dirty="0"/>
+            <a:endParaRPr lang="zh-CN" altLang="en-US" dirty="0"/>
           </a:p>
         </p:txBody>
       </p:sp>
@@ -1015,19 +3792,78 @@
           <a:bodyPr/>
           <a:lstStyle/>
           <a:p>
+            <a:pPr marL="0" marR="0" lvl="0" indent="0" algn="r" defTabSz="914400" rtl="0" eaLnBrk="1" fontAlgn="auto" latinLnBrk="0" hangingPunct="1">
+              <a:lnSpc>
+                <a:spcPct val="100000"/>
+              </a:lnSpc>
+              <a:spcBef>
+                <a:spcPts val="0"/>
+              </a:spcBef>
+              <a:spcAft>
+                <a:spcPts val="0"/>
+              </a:spcAft>
+              <a:buClrTx/>
+              <a:buSzTx/>
+              <a:buFontTx/>
+              <a:buNone/>
+              <a:tabLst/>
+              <a:defRPr/>
+            </a:pPr>
             <a:fld id="{56507943-197E-CE46-82F0-5A323A24AE7A}" type="slidenum">
-              <a:rPr lang="en-US" smtClean="0"/>
-              <a:pPr/>
-              <a:t>26</a:t>
+              <a:rPr kumimoji="0" lang="en-US" sz="1200" b="0" i="0" u="none" strike="noStrike" kern="1200" cap="none" spc="0" normalizeH="0" baseline="0" noProof="0" smtClean="0">
+                <a:ln>
+                  <a:noFill/>
+                </a:ln>
+                <a:solidFill>
+                  <a:prstClr val="black"/>
+                </a:solidFill>
+                <a:effectLst/>
+                <a:uLnTx/>
+                <a:uFillTx/>
+                <a:latin typeface="Calibri"/>
+                <a:ea typeface="+mn-ea"/>
+                <a:cs typeface="+mn-cs"/>
+              </a:rPr>
+              <a:pPr marL="0" marR="0" lvl="0" indent="0" algn="r" defTabSz="914400" rtl="0" eaLnBrk="1" fontAlgn="auto" latinLnBrk="0" hangingPunct="1">
+                <a:lnSpc>
+                  <a:spcPct val="100000"/>
+                </a:lnSpc>
+                <a:spcBef>
+                  <a:spcPts val="0"/>
+                </a:spcBef>
+                <a:spcAft>
+                  <a:spcPts val="0"/>
+                </a:spcAft>
+                <a:buClrTx/>
+                <a:buSzTx/>
+                <a:buFontTx/>
+                <a:buNone/>
+                <a:tabLst/>
+                <a:defRPr/>
+              </a:pPr>
+              <a:t>27</a:t>
             </a:fld>
-            <a:endParaRPr lang="en-US"/>
+            <a:endParaRPr kumimoji="0" lang="en-US" sz="1200" b="0" i="0" u="none" strike="noStrike" kern="1200" cap="none" spc="0" normalizeH="0" baseline="0" noProof="0">
+              <a:ln>
+                <a:noFill/>
+              </a:ln>
+              <a:solidFill>
+                <a:prstClr val="black"/>
+              </a:solidFill>
+              <a:effectLst/>
+              <a:uLnTx/>
+              <a:uFillTx/>
+              <a:latin typeface="Calibri"/>
+              <a:ea typeface="+mn-ea"/>
+              <a:cs typeface="+mn-cs"/>
+            </a:endParaRPr>
           </a:p>
         </p:txBody>
       </p:sp>
     </p:spTree>
     <p:extLst>
       <p:ext uri="{BB962C8B-B14F-4D97-AF65-F5344CB8AC3E}">
-        <p14:creationId xmlns:p14="http://schemas.microsoft.com/office/powerpoint/2010/main" val="2956007665"/>
+        <p14:creationId xmlns:p14="http://schemas.microsoft.com/office/powerpoint/2010/main" val="2089123374"/>
       </p:ext>
     </p:extLst>
   </p:cSld>
@@ -1275,7 +4111,7 @@
           <a:p>
             <a:fld id="{2BAC3D6C-4C04-4098-BFD3-3A35EE232A02}" type="datetime1">
               <a:rPr lang="en-US" smtClean="0"/>
-              <a:t>9/23/2025</a:t>
+              <a:t>9/25/2025</a:t>
             </a:fld>
             <a:endParaRPr lang="en-US"/>
           </a:p>
@@ -1479,7 +4315,7 @@
           <a:p>
             <a:fld id="{463367AB-96C5-48C1-ABEF-4922F06666CC}" type="datetime1">
               <a:rPr lang="en-US" smtClean="0"/>
-              <a:t>9/23/2025</a:t>
+              <a:t>9/25/2025</a:t>
             </a:fld>
             <a:endParaRPr lang="en-US"/>
           </a:p>
@@ -1842,7 +4678,7 @@
           <a:p>
             <a:fld id="{004F2300-F914-44F4-9F48-323AB4F049A8}" type="datetime1">
               <a:rPr lang="en-US" smtClean="0"/>
-              <a:t>9/23/2025</a:t>
+              <a:t>9/25/2025</a:t>
             </a:fld>
             <a:endParaRPr lang="en-US"/>
           </a:p>
@@ -2154,7 +4990,7 @@
           <a:p>
             <a:fld id="{7B6AF446-C7A3-4A2D-B01C-4080BC0DDC51}" type="datetime1">
               <a:rPr lang="en-US" smtClean="0"/>
-              <a:t>9/23/2025</a:t>
+              <a:t>9/25/2025</a:t>
             </a:fld>
             <a:endParaRPr lang="en-US"/>
           </a:p>
@@ -2353,7 +5189,7 @@
           <a:p>
             <a:fld id="{E77A5B41-BFC4-4275-B283-99B49DA65AE7}" type="datetime1">
               <a:rPr lang="en-US" smtClean="0"/>
-              <a:t>9/23/2025</a:t>
+              <a:t>9/25/2025</a:t>
             </a:fld>
             <a:endParaRPr lang="en-US"/>
           </a:p>
@@ -2666,7 +5502,7 @@
           <a:p>
             <a:fld id="{FC9F5041-7C46-4557-A8EF-D9C07452E04F}" type="datetime1">
               <a:rPr lang="en-US" smtClean="0"/>
-              <a:t>9/23/2025</a:t>
+              <a:t>9/25/2025</a:t>
             </a:fld>
             <a:endParaRPr lang="en-US"/>
           </a:p>
@@ -2920,7 +5756,7 @@
           <a:p>
             <a:fld id="{9165F29B-8031-46B1-B8C6-0E15991220BD}" type="datetime1">
               <a:rPr lang="en-US" smtClean="0"/>
-              <a:t>9/23/2025</a:t>
+              <a:t>9/25/2025</a:t>
             </a:fld>
             <a:endParaRPr lang="en-US"/>
           </a:p>
@@ -3343,7 +6179,7 @@
           <a:p>
             <a:fld id="{EA26BC96-89B3-4A8F-8C3A-8FECB7F0AF50}" type="datetime1">
               <a:rPr lang="en-US" smtClean="0"/>
-              <a:t>9/23/2025</a:t>
+              <a:t>9/25/2025</a:t>
             </a:fld>
             <a:endParaRPr lang="en-US"/>
           </a:p>
@@ -3467,7 +6303,7 @@
           <a:p>
             <a:fld id="{979F6BEE-F3E4-4F76-B56D-1C48BBD7AEA9}" type="datetime1">
               <a:rPr lang="en-US" smtClean="0"/>
-              <a:t>9/23/2025</a:t>
+              <a:t>9/25/2025</a:t>
             </a:fld>
             <a:endParaRPr lang="en-US"/>
           </a:p>
@@ -3563,7 +6399,7 @@
           <a:p>
             <a:fld id="{5EBF79E3-AE5C-4717-978E-15FC3620ACEF}" type="datetime1">
               <a:rPr lang="en-US" smtClean="0"/>
-              <a:t>9/23/2025</a:t>
+              <a:t>9/25/2025</a:t>
             </a:fld>
             <a:endParaRPr lang="en-US"/>
           </a:p>
@@ -3941,7 +6777,7 @@
           <a:p>
             <a:fld id="{07B82B69-02FF-4A00-BF94-063310C8EF70}" type="datetime1">
               <a:rPr lang="en-US" smtClean="0"/>
-              <a:t>9/23/2025</a:t>
+              <a:t>9/25/2025</a:t>
             </a:fld>
             <a:endParaRPr lang="en-US"/>
           </a:p>
@@ -4150,7 +6986,7 @@
           <a:p>
             <a:fld id="{F4D4FE18-0348-44C2-B6F7-2E0D6E3F701A}" type="datetime1">
               <a:rPr lang="en-US" smtClean="0"/>
-              <a:t>9/23/2025</a:t>
+              <a:t>9/25/2025</a:t>
             </a:fld>
             <a:endParaRPr lang="en-US"/>
           </a:p>
@@ -4433,7 +7269,7 @@
           <a:p>
             <a:fld id="{8C7A3C19-50BF-43F6-AD63-C05469BE5035}" type="datetime1">
               <a:rPr lang="en-US" smtClean="0"/>
-              <a:t>9/23/2025</a:t>
+              <a:t>9/25/2025</a:t>
             </a:fld>
             <a:endParaRPr lang="en-US"/>
           </a:p>
@@ -4625,7 +7461,7 @@
           <a:p>
             <a:fld id="{FED35F4A-7979-4619-A182-7748F9FBAA45}" type="datetime1">
               <a:rPr lang="en-US" smtClean="0"/>
-              <a:t>9/23/2025</a:t>
+              <a:t>9/25/2025</a:t>
             </a:fld>
             <a:endParaRPr lang="en-US"/>
           </a:p>
@@ -4988,7 +7824,7 @@
           <a:p>
             <a:fld id="{4E8A0E10-3CDB-43FE-B1B5-7D3654751138}" type="datetime1">
               <a:rPr lang="en-US" smtClean="0"/>
-              <a:t>9/23/2025</a:t>
+              <a:t>9/25/2025</a:t>
             </a:fld>
             <a:endParaRPr lang="en-US"/>
           </a:p>
@@ -5300,7 +8136,7 @@
           <a:p>
             <a:fld id="{C6B0FEA4-C6CA-4262-94C7-989766AA3A47}" type="datetime1">
               <a:rPr lang="en-US" smtClean="0"/>
-              <a:t>9/23/2025</a:t>
+              <a:t>9/25/2025</a:t>
             </a:fld>
             <a:endParaRPr lang="en-US"/>
           </a:p>
@@ -5499,7 +8335,7 @@
           <a:p>
             <a:fld id="{6F65A5F7-BE7B-4360-B821-FCDB8E9197AC}" type="datetime1">
               <a:rPr lang="en-US" smtClean="0"/>
-              <a:t>9/23/2025</a:t>
+              <a:t>9/25/2025</a:t>
             </a:fld>
             <a:endParaRPr lang="en-US"/>
           </a:p>
@@ -5812,7 +8648,7 @@
           <a:p>
             <a:fld id="{6145D492-0F60-495A-BAAC-3C877C1D64A2}" type="datetime1">
               <a:rPr lang="en-US" smtClean="0"/>
-              <a:t>9/23/2025</a:t>
+              <a:t>9/25/2025</a:t>
             </a:fld>
             <a:endParaRPr lang="en-US"/>
           </a:p>
@@ -6066,7 +8902,7 @@
           <a:p>
             <a:fld id="{4A322FED-C97B-4E3C-B05B-1278829CCA0F}" type="datetime1">
               <a:rPr lang="en-US" smtClean="0"/>
-              <a:t>9/23/2025</a:t>
+              <a:t>9/25/2025</a:t>
             </a:fld>
             <a:endParaRPr lang="en-US"/>
           </a:p>
@@ -6489,7 +9325,7 @@
           <a:p>
             <a:fld id="{1BBF91E7-DD27-45EE-9FAC-A58839C2E3FB}" type="datetime1">
               <a:rPr lang="en-US" smtClean="0"/>
-              <a:t>9/23/2025</a:t>
+              <a:t>9/25/2025</a:t>
             </a:fld>
             <a:endParaRPr lang="en-US"/>
           </a:p>
@@ -6613,7 +9449,7 @@
           <a:p>
             <a:fld id="{470DB943-D34E-498D-BB5B-1BC0D01A4C3C}" type="datetime1">
               <a:rPr lang="en-US" smtClean="0"/>
-              <a:t>9/23/2025</a:t>
+              <a:t>9/25/2025</a:t>
             </a:fld>
             <a:endParaRPr lang="en-US"/>
           </a:p>
@@ -6709,7 +9545,7 @@
           <a:p>
             <a:fld id="{0EF88AC7-A362-47DE-B037-3A7E785BA73D}" type="datetime1">
               <a:rPr lang="en-US" smtClean="0"/>
-              <a:t>9/23/2025</a:t>
+              <a:t>9/25/2025</a:t>
             </a:fld>
             <a:endParaRPr lang="en-US"/>
           </a:p>
@@ -7010,7 +9846,7 @@
           <a:p>
             <a:fld id="{736F0D2F-BB82-470C-9FE9-67ACBD4EA48C}" type="datetime1">
               <a:rPr lang="en-US" smtClean="0"/>
-              <a:t>9/23/2025</a:t>
+              <a:t>9/25/2025</a:t>
             </a:fld>
             <a:endParaRPr lang="en-US"/>
           </a:p>
@@ -7400,7 +10236,7 @@
           <a:p>
             <a:fld id="{1E09BAED-B7FC-4220-8037-60663F890984}" type="datetime1">
               <a:rPr lang="en-US" smtClean="0"/>
-              <a:t>9/23/2025</a:t>
+              <a:t>9/25/2025</a:t>
             </a:fld>
             <a:endParaRPr lang="en-US"/>
           </a:p>
@@ -7693,7 +10529,7 @@
           <a:p>
             <a:fld id="{BB3C0B96-D43B-410F-A514-3967CACDF6C4}" type="datetime1">
               <a:rPr lang="en-US" smtClean="0"/>
-              <a:t>9/23/2025</a:t>
+              <a:t>9/25/2025</a:t>
             </a:fld>
             <a:endParaRPr lang="en-US"/>
           </a:p>
@@ -7885,7 +10721,7 @@
           <a:p>
             <a:fld id="{C63DFB46-027F-4778-8182-714012A6E051}" type="datetime1">
               <a:rPr lang="en-US" smtClean="0"/>
-              <a:t>9/23/2025</a:t>
+              <a:t>9/25/2025</a:t>
             </a:fld>
             <a:endParaRPr lang="en-US"/>
           </a:p>
@@ -8248,7 +11084,7 @@
           <a:p>
             <a:fld id="{770FD05A-9631-4BEE-9AA4-5575ADA850E9}" type="datetime1">
               <a:rPr lang="en-US" smtClean="0"/>
-              <a:t>9/23/2025</a:t>
+              <a:t>9/25/2025</a:t>
             </a:fld>
             <a:endParaRPr lang="en-US"/>
           </a:p>
@@ -8560,7 +11396,7 @@
           <a:p>
             <a:fld id="{ED291B17-9318-49DB-B28B-6E5994AE9581}" type="datetime1">
               <a:rPr lang="en-US" smtClean="0"/>
-              <a:t>9/23/2025</a:t>
+              <a:t>9/25/2025</a:t>
             </a:fld>
             <a:endParaRPr lang="en-US" dirty="0"/>
           </a:p>
@@ -8758,7 +11594,7 @@
           <a:p>
             <a:fld id="{78DD82B9-B8EE-4375-B6FF-88FA6ABB15D9}" type="datetime1">
               <a:rPr lang="en-US" smtClean="0"/>
-              <a:t>9/23/2025</a:t>
+              <a:t>9/25/2025</a:t>
             </a:fld>
             <a:endParaRPr lang="en-US" dirty="0"/>
           </a:p>
@@ -9070,7 +11906,7 @@
           <a:p>
             <a:fld id="{B2497495-0637-405E-AE64-5CC7506D51F5}" type="datetime1">
               <a:rPr lang="en-US" smtClean="0"/>
-              <a:t>9/23/2025</a:t>
+              <a:t>9/25/2025</a:t>
             </a:fld>
             <a:endParaRPr lang="en-US" dirty="0"/>
           </a:p>
@@ -9323,7 +12159,7 @@
           <a:p>
             <a:fld id="{7BFFD690-9426-415D-8B65-26881E07B2D4}" type="datetime1">
               <a:rPr lang="en-US" smtClean="0"/>
-              <a:t>9/23/2025</a:t>
+              <a:t>9/25/2025</a:t>
             </a:fld>
             <a:endParaRPr lang="en-US" dirty="0"/>
           </a:p>
@@ -9745,7 +12581,7 @@
           <a:p>
             <a:fld id="{04C4989A-474C-40DE-95B9-011C28B71673}" type="datetime1">
               <a:rPr lang="en-US" smtClean="0"/>
-              <a:t>9/23/2025</a:t>
+              <a:t>9/25/2025</a:t>
             </a:fld>
             <a:endParaRPr lang="en-US" dirty="0"/>
           </a:p>
@@ -9868,7 +12704,7 @@
           <a:p>
             <a:fld id="{5DB4ED54-5B5E-4A04-93D3-5772E3CE3818}" type="datetime1">
               <a:rPr lang="en-US" smtClean="0"/>
-              <a:t>9/23/2025</a:t>
+              <a:t>9/25/2025</a:t>
             </a:fld>
             <a:endParaRPr lang="en-US" dirty="0"/>
           </a:p>
@@ -10109,7 +12945,7 @@
           <a:p>
             <a:fld id="{E43A95C9-8F46-4670-8D9D-84E56B4CFD5A}" type="datetime1">
               <a:rPr lang="en-US" smtClean="0"/>
-              <a:t>9/23/2025</a:t>
+              <a:t>9/25/2025</a:t>
             </a:fld>
             <a:endParaRPr lang="en-US"/>
           </a:p>
@@ -10205,7 +13041,7 @@
           <a:p>
             <a:fld id="{4EDE50D6-574B-40AF-946F-D52A04ADE379}" type="datetime1">
               <a:rPr lang="en-US" smtClean="0"/>
-              <a:t>9/23/2025</a:t>
+              <a:t>9/25/2025</a:t>
             </a:fld>
             <a:endParaRPr lang="en-US" dirty="0"/>
           </a:p>
@@ -10582,7 +13418,7 @@
           <a:p>
             <a:fld id="{D82884F1-FFEA-405F-9602-3DCA865EDA4E}" type="datetime1">
               <a:rPr lang="en-US" smtClean="0"/>
-              <a:t>9/23/2025</a:t>
+              <a:t>9/25/2025</a:t>
             </a:fld>
             <a:endParaRPr lang="en-US" dirty="0"/>
           </a:p>
@@ -10875,7 +13711,7 @@
           <a:p>
             <a:fld id="{7E18DB4A-8810-4A10-AD5C-D5E2C667F5B3}" type="datetime1">
               <a:rPr lang="en-US" smtClean="0"/>
-              <a:t>9/23/2025</a:t>
+              <a:t>9/25/2025</a:t>
             </a:fld>
             <a:endParaRPr lang="en-US" dirty="0"/>
           </a:p>
@@ -11067,7 +13903,7 @@
           <a:p>
             <a:fld id="{2CED4963-E985-44C4-B8C4-FDD613B7C2F8}" type="datetime1">
               <a:rPr lang="en-US" smtClean="0"/>
-              <a:t>9/23/2025</a:t>
+              <a:t>9/25/2025</a:t>
             </a:fld>
             <a:endParaRPr lang="en-US" dirty="0"/>
           </a:p>
@@ -11429,7 +14265,7 @@
           <a:p>
             <a:fld id="{ED291B17-9318-49DB-B28B-6E5994AE9581}" type="datetime1">
               <a:rPr lang="en-US" smtClean="0"/>
-              <a:t>9/23/2025</a:t>
+              <a:t>9/25/2025</a:t>
             </a:fld>
             <a:endParaRPr lang="en-US" dirty="0"/>
           </a:p>
@@ -11909,7 +14745,7 @@
           <a:p>
             <a:fld id="{ED291B17-9318-49DB-B28B-6E5994AE9581}" type="datetime1">
               <a:rPr lang="en-US" smtClean="0"/>
-              <a:t>9/23/2025</a:t>
+              <a:t>9/25/2025</a:t>
             </a:fld>
             <a:endParaRPr lang="en-US" dirty="0"/>
           </a:p>
@@ -12107,7 +14943,7 @@
           <a:p>
             <a:fld id="{78DD82B9-B8EE-4375-B6FF-88FA6ABB15D9}" type="datetime1">
               <a:rPr lang="en-US" smtClean="0"/>
-              <a:t>9/23/2025</a:t>
+              <a:t>9/25/2025</a:t>
             </a:fld>
             <a:endParaRPr lang="en-US" dirty="0"/>
           </a:p>
@@ -12419,7 +15255,7 @@
           <a:p>
             <a:fld id="{B2497495-0637-405E-AE64-5CC7506D51F5}" type="datetime1">
               <a:rPr lang="en-US" smtClean="0"/>
-              <a:t>9/23/2025</a:t>
+              <a:t>9/25/2025</a:t>
             </a:fld>
             <a:endParaRPr lang="en-US" dirty="0"/>
           </a:p>
@@ -12672,7 +15508,7 @@
           <a:p>
             <a:fld id="{7BFFD690-9426-415D-8B65-26881E07B2D4}" type="datetime1">
               <a:rPr lang="en-US" smtClean="0"/>
-              <a:t>9/23/2025</a:t>
+              <a:t>9/25/2025</a:t>
             </a:fld>
             <a:endParaRPr lang="en-US" dirty="0"/>
           </a:p>
@@ -13094,7 +15930,7 @@
           <a:p>
             <a:fld id="{E5975E7C-2B02-474E-8FA0-86410A5FC033}" type="datetime1">
               <a:rPr lang="en-US" smtClean="0"/>
-              <a:t>9/23/2025</a:t>
+              <a:t>9/25/2025</a:t>
             </a:fld>
             <a:endParaRPr lang="en-US"/>
           </a:p>
@@ -13517,7 +16353,7 @@
           <a:p>
             <a:fld id="{04C4989A-474C-40DE-95B9-011C28B71673}" type="datetime1">
               <a:rPr lang="en-US" smtClean="0"/>
-              <a:t>9/23/2025</a:t>
+              <a:t>9/25/2025</a:t>
             </a:fld>
             <a:endParaRPr lang="en-US" dirty="0"/>
           </a:p>
@@ -13640,7 +16476,7 @@
           <a:p>
             <a:fld id="{5DB4ED54-5B5E-4A04-93D3-5772E3CE3818}" type="datetime1">
               <a:rPr lang="en-US" smtClean="0"/>
-              <a:t>9/23/2025</a:t>
+              <a:t>9/25/2025</a:t>
             </a:fld>
             <a:endParaRPr lang="en-US" dirty="0"/>
           </a:p>
@@ -13735,7 +16571,7 @@
           <a:p>
             <a:fld id="{4EDE50D6-574B-40AF-946F-D52A04ADE379}" type="datetime1">
               <a:rPr lang="en-US" smtClean="0"/>
-              <a:t>9/23/2025</a:t>
+              <a:t>9/25/2025</a:t>
             </a:fld>
             <a:endParaRPr lang="en-US" dirty="0"/>
           </a:p>
@@ -14112,7 +16948,7 @@
           <a:p>
             <a:fld id="{D82884F1-FFEA-405F-9602-3DCA865EDA4E}" type="datetime1">
               <a:rPr lang="en-US" smtClean="0"/>
-              <a:t>9/23/2025</a:t>
+              <a:t>9/25/2025</a:t>
             </a:fld>
             <a:endParaRPr lang="en-US" dirty="0"/>
           </a:p>
@@ -14405,7 +17241,7 @@
           <a:p>
             <a:fld id="{7E18DB4A-8810-4A10-AD5C-D5E2C667F5B3}" type="datetime1">
               <a:rPr lang="en-US" smtClean="0"/>
-              <a:t>9/23/2025</a:t>
+              <a:t>9/25/2025</a:t>
             </a:fld>
             <a:endParaRPr lang="en-US" dirty="0"/>
           </a:p>
@@ -14597,7 +17433,7 @@
           <a:p>
             <a:fld id="{2CED4963-E985-44C4-B8C4-FDD613B7C2F8}" type="datetime1">
               <a:rPr lang="en-US" smtClean="0"/>
-              <a:t>9/23/2025</a:t>
+              <a:t>9/25/2025</a:t>
             </a:fld>
             <a:endParaRPr lang="en-US" dirty="0"/>
           </a:p>
@@ -14959,7 +17795,7 @@
           <a:p>
             <a:fld id="{ED291B17-9318-49DB-B28B-6E5994AE9581}" type="datetime1">
               <a:rPr lang="en-US" smtClean="0"/>
-              <a:t>9/23/2025</a:t>
+              <a:t>9/25/2025</a:t>
             </a:fld>
             <a:endParaRPr lang="en-US" dirty="0"/>
           </a:p>
@@ -15254,6 +18090,13 @@
             <a:schemeClr val="lt1"/>
           </a:fontRef>
         </p:style>
+        <p:txBody>
+          <a:bodyPr/>
+          <a:lstStyle/>
+          <a:p>
+            <a:endParaRPr lang="zh-CN" altLang="en-US"/>
+          </a:p>
+        </p:txBody>
       </p:sp>
       <p:sp>
         <p:nvSpPr>
@@ -15439,7 +18282,7 @@
           <a:p>
             <a:fld id="{ED291B17-9318-49DB-B28B-6E5994AE9581}" type="datetime1">
               <a:rPr lang="en-US" smtClean="0"/>
-              <a:t>9/23/2025</a:t>
+              <a:t>9/25/2025</a:t>
             </a:fld>
             <a:endParaRPr lang="en-US" dirty="0"/>
           </a:p>
@@ -15635,7 +18478,7 @@
           <a:p>
             <a:fld id="{78DD82B9-B8EE-4375-B6FF-88FA6ABB15D9}" type="datetime1">
               <a:rPr lang="en-US" smtClean="0"/>
-              <a:t>9/23/2025</a:t>
+              <a:t>9/25/2025</a:t>
             </a:fld>
             <a:endParaRPr lang="en-US" dirty="0"/>
           </a:p>
@@ -15770,7 +18613,7 @@
           <a:p>
             <a:fld id="{79154FF1-2CCB-4C67-BF4F-DF19FC698996}" type="datetime1">
               <a:rPr lang="en-US" smtClean="0"/>
-              <a:t>9/23/2025</a:t>
+              <a:t>9/25/2025</a:t>
             </a:fld>
             <a:endParaRPr lang="en-US"/>
           </a:p>
@@ -16070,7 +18913,7 @@
           <a:p>
             <a:fld id="{B2497495-0637-405E-AE64-5CC7506D51F5}" type="datetime1">
               <a:rPr lang="en-US" smtClean="0"/>
-              <a:t>9/23/2025</a:t>
+              <a:t>9/25/2025</a:t>
             </a:fld>
             <a:endParaRPr lang="en-US" dirty="0"/>
           </a:p>
@@ -16321,7 +19164,7 @@
           <a:p>
             <a:fld id="{7BFFD690-9426-415D-8B65-26881E07B2D4}" type="datetime1">
               <a:rPr lang="en-US" smtClean="0"/>
-              <a:t>9/23/2025</a:t>
+              <a:t>9/25/2025</a:t>
             </a:fld>
             <a:endParaRPr lang="en-US" dirty="0"/>
           </a:p>
@@ -16741,7 +19584,7 @@
           <a:p>
             <a:fld id="{04C4989A-474C-40DE-95B9-011C28B71673}" type="datetime1">
               <a:rPr lang="en-US" smtClean="0"/>
-              <a:t>9/23/2025</a:t>
+              <a:t>9/25/2025</a:t>
             </a:fld>
             <a:endParaRPr lang="en-US" dirty="0"/>
           </a:p>
@@ -16864,7 +19707,7 @@
           <a:p>
             <a:fld id="{5DB4ED54-5B5E-4A04-93D3-5772E3CE3818}" type="datetime1">
               <a:rPr lang="en-US" smtClean="0"/>
-              <a:t>9/23/2025</a:t>
+              <a:t>9/25/2025</a:t>
             </a:fld>
             <a:endParaRPr lang="en-US" dirty="0"/>
           </a:p>
@@ -16959,7 +19802,7 @@
           <a:p>
             <a:fld id="{4EDE50D6-574B-40AF-946F-D52A04ADE379}" type="datetime1">
               <a:rPr lang="en-US" smtClean="0"/>
-              <a:t>9/23/2025</a:t>
+              <a:t>9/25/2025</a:t>
             </a:fld>
             <a:endParaRPr lang="en-US" dirty="0"/>
           </a:p>
@@ -17335,7 +20178,7 @@
           <a:p>
             <a:fld id="{D82884F1-FFEA-405F-9602-3DCA865EDA4E}" type="datetime1">
               <a:rPr lang="en-US" smtClean="0"/>
-              <a:t>9/23/2025</a:t>
+              <a:t>9/25/2025</a:t>
             </a:fld>
             <a:endParaRPr lang="en-US" dirty="0"/>
           </a:p>
@@ -17628,7 +20471,7 @@
           <a:p>
             <a:fld id="{7E18DB4A-8810-4A10-AD5C-D5E2C667F5B3}" type="datetime1">
               <a:rPr lang="en-US" smtClean="0"/>
-              <a:t>9/23/2025</a:t>
+              <a:t>9/25/2025</a:t>
             </a:fld>
             <a:endParaRPr lang="en-US" dirty="0"/>
           </a:p>
@@ -17820,7 +20663,7 @@
           <a:p>
             <a:fld id="{2CED4963-E985-44C4-B8C4-FDD613B7C2F8}" type="datetime1">
               <a:rPr lang="en-US" smtClean="0"/>
-              <a:t>9/23/2025</a:t>
+              <a:t>9/25/2025</a:t>
             </a:fld>
             <a:endParaRPr lang="en-US" dirty="0"/>
           </a:p>
@@ -18182,7 +21025,7 @@
           <a:p>
             <a:fld id="{ED291B17-9318-49DB-B28B-6E5994AE9581}" type="datetime1">
               <a:rPr lang="en-US" smtClean="0"/>
-              <a:t>9/23/2025</a:t>
+              <a:t>9/25/2025</a:t>
             </a:fld>
             <a:endParaRPr lang="en-US" dirty="0"/>
           </a:p>
@@ -18493,7 +21336,7 @@
           <a:p>
             <a:fld id="{ED291B17-9318-49DB-B28B-6E5994AE9581}" type="datetime1">
               <a:rPr lang="en-US" smtClean="0"/>
-              <a:t>9/23/2025</a:t>
+              <a:t>9/25/2025</a:t>
             </a:fld>
             <a:endParaRPr lang="en-US" dirty="0"/>
           </a:p>
@@ -18600,7 +21443,7 @@
           <a:p>
             <a:fld id="{D33F9D0A-F538-4910-B89C-0793149889D3}" type="datetime1">
               <a:rPr lang="en-US" smtClean="0"/>
-              <a:t>9/23/2025</a:t>
+              <a:t>9/25/2025</a:t>
             </a:fld>
             <a:endParaRPr lang="en-US"/>
           </a:p>
@@ -18787,7 +21630,7 @@
           <a:p>
             <a:fld id="{78DD82B9-B8EE-4375-B6FF-88FA6ABB15D9}" type="datetime1">
               <a:rPr lang="en-US" smtClean="0"/>
-              <a:t>9/23/2025</a:t>
+              <a:t>9/25/2025</a:t>
             </a:fld>
             <a:endParaRPr lang="en-US" dirty="0"/>
           </a:p>
@@ -19099,7 +21942,7 @@
           <a:p>
             <a:fld id="{B2497495-0637-405E-AE64-5CC7506D51F5}" type="datetime1">
               <a:rPr lang="en-US" smtClean="0"/>
-              <a:t>9/23/2025</a:t>
+              <a:t>9/25/2025</a:t>
             </a:fld>
             <a:endParaRPr lang="en-US" dirty="0"/>
           </a:p>
@@ -19352,7 +22195,7 @@
           <a:p>
             <a:fld id="{7BFFD690-9426-415D-8B65-26881E07B2D4}" type="datetime1">
               <a:rPr lang="en-US" smtClean="0"/>
-              <a:t>9/23/2025</a:t>
+              <a:t>9/25/2025</a:t>
             </a:fld>
             <a:endParaRPr lang="en-US" dirty="0"/>
           </a:p>
@@ -19774,7 +22617,7 @@
           <a:p>
             <a:fld id="{04C4989A-474C-40DE-95B9-011C28B71673}" type="datetime1">
               <a:rPr lang="en-US" smtClean="0"/>
-              <a:t>9/23/2025</a:t>
+              <a:t>9/25/2025</a:t>
             </a:fld>
             <a:endParaRPr lang="en-US" dirty="0"/>
           </a:p>
@@ -19897,7 +22740,7 @@
           <a:p>
             <a:fld id="{5DB4ED54-5B5E-4A04-93D3-5772E3CE3818}" type="datetime1">
               <a:rPr lang="en-US" smtClean="0"/>
-              <a:t>9/23/2025</a:t>
+              <a:t>9/25/2025</a:t>
             </a:fld>
             <a:endParaRPr lang="en-US" dirty="0"/>
           </a:p>
@@ -19992,7 +22835,7 @@
           <a:p>
             <a:fld id="{4EDE50D6-574B-40AF-946F-D52A04ADE379}" type="datetime1">
               <a:rPr lang="en-US" smtClean="0"/>
-              <a:t>9/23/2025</a:t>
+              <a:t>9/25/2025</a:t>
             </a:fld>
             <a:endParaRPr lang="en-US" dirty="0"/>
           </a:p>
@@ -20369,7 +23212,7 @@
           <a:p>
             <a:fld id="{D82884F1-FFEA-405F-9602-3DCA865EDA4E}" type="datetime1">
               <a:rPr lang="en-US" smtClean="0"/>
-              <a:t>9/23/2025</a:t>
+              <a:t>9/25/2025</a:t>
             </a:fld>
             <a:endParaRPr lang="en-US" dirty="0"/>
           </a:p>
@@ -20662,7 +23505,7 @@
           <a:p>
             <a:fld id="{7E18DB4A-8810-4A10-AD5C-D5E2C667F5B3}" type="datetime1">
               <a:rPr lang="en-US" smtClean="0"/>
-              <a:t>9/23/2025</a:t>
+              <a:t>9/25/2025</a:t>
             </a:fld>
             <a:endParaRPr lang="en-US" dirty="0"/>
           </a:p>
@@ -20854,7 +23697,7 @@
           <a:p>
             <a:fld id="{2CED4963-E985-44C4-B8C4-FDD613B7C2F8}" type="datetime1">
               <a:rPr lang="en-US" smtClean="0"/>
-              <a:t>9/23/2025</a:t>
+              <a:t>9/25/2025</a:t>
             </a:fld>
             <a:endParaRPr lang="en-US" dirty="0"/>
           </a:p>
@@ -21216,7 +24059,7 @@
           <a:p>
             <a:fld id="{ED291B17-9318-49DB-B28B-6E5994AE9581}" type="datetime1">
               <a:rPr lang="en-US" smtClean="0"/>
-              <a:t>9/23/2025</a:t>
+              <a:t>9/25/2025</a:t>
             </a:fld>
             <a:endParaRPr lang="en-US" dirty="0"/>
           </a:p>
@@ -21605,7 +24448,7 @@
           <a:p>
             <a:fld id="{5CF7382D-DEC2-4064-84F2-56AF48079030}" type="datetime1">
               <a:rPr lang="en-US" smtClean="0"/>
-              <a:t>9/23/2025</a:t>
+              <a:t>9/25/2025</a:t>
             </a:fld>
             <a:endParaRPr lang="en-US"/>
           </a:p>
@@ -22067,7 +24910,7 @@
           <a:p>
             <a:fld id="{D59E25F9-7C58-4ADD-B4E8-3E3F2DD7C261}" type="datetime1">
               <a:rPr lang="en-US" smtClean="0"/>
-              <a:t>9/23/2025</a:t>
+              <a:t>9/25/2025</a:t>
             </a:fld>
             <a:endParaRPr lang="en-US"/>
           </a:p>
@@ -22282,7 +25125,7 @@
           <a:p>
             <a:fld id="{78F82ABC-BB26-4212-BE76-C6A697540B8D}" type="datetime1">
               <a:rPr lang="en-US" smtClean="0"/>
-              <a:t>9/23/2025</a:t>
+              <a:t>9/25/2025</a:t>
             </a:fld>
             <a:endParaRPr lang="en-US"/>
           </a:p>
@@ -22405,6 +25248,13 @@
             <a:schemeClr val="lt1"/>
           </a:fontRef>
         </p:style>
+        <p:txBody>
+          <a:bodyPr/>
+          <a:lstStyle/>
+          <a:p>
+            <a:endParaRPr lang="zh-CN" altLang="en-US"/>
+          </a:p>
+        </p:txBody>
       </p:sp>
       <p:sp>
         <p:nvSpPr>
@@ -22442,6 +25292,13 @@
             <a:schemeClr val="lt1"/>
           </a:fontRef>
         </p:style>
+        <p:txBody>
+          <a:bodyPr/>
+          <a:lstStyle/>
+          <a:p>
+            <a:endParaRPr lang="zh-CN" altLang="en-US"/>
+          </a:p>
+        </p:txBody>
       </p:sp>
       <p:sp>
         <p:nvSpPr>
@@ -22479,6 +25336,13 @@
             <a:schemeClr val="lt1"/>
           </a:fontRef>
         </p:style>
+        <p:txBody>
+          <a:bodyPr/>
+          <a:lstStyle/>
+          <a:p>
+            <a:endParaRPr lang="zh-CN" altLang="en-US"/>
+          </a:p>
+        </p:txBody>
       </p:sp>
     </p:spTree>
     <p:extLst>
@@ -23063,7 +25927,7 @@
           <a:p>
             <a:fld id="{61ED8BDC-014F-440E-B651-A3D5A758B980}" type="datetime1">
               <a:rPr lang="en-US" smtClean="0"/>
-              <a:t>9/23/2025</a:t>
+              <a:t>9/25/2025</a:t>
             </a:fld>
             <a:endParaRPr lang="en-US"/>
           </a:p>
@@ -23186,6 +26050,13 @@
             <a:schemeClr val="lt1"/>
           </a:fontRef>
         </p:style>
+        <p:txBody>
+          <a:bodyPr/>
+          <a:lstStyle/>
+          <a:p>
+            <a:endParaRPr lang="zh-CN" altLang="en-US"/>
+          </a:p>
+        </p:txBody>
       </p:sp>
       <p:sp>
         <p:nvSpPr>
@@ -23223,6 +26094,13 @@
             <a:schemeClr val="lt1"/>
           </a:fontRef>
         </p:style>
+        <p:txBody>
+          <a:bodyPr/>
+          <a:lstStyle/>
+          <a:p>
+            <a:endParaRPr lang="zh-CN" altLang="en-US"/>
+          </a:p>
+        </p:txBody>
       </p:sp>
       <p:sp>
         <p:nvSpPr>
@@ -23260,6 +26138,13 @@
             <a:schemeClr val="lt1"/>
           </a:fontRef>
         </p:style>
+        <p:txBody>
+          <a:bodyPr/>
+          <a:lstStyle/>
+          <a:p>
+            <a:endParaRPr lang="zh-CN" altLang="en-US"/>
+          </a:p>
+        </p:txBody>
       </p:sp>
     </p:spTree>
     <p:extLst>
@@ -23844,7 +26729,7 @@
           <a:p>
             <a:fld id="{8234BEC2-5A9D-42E1-9C16-1E9F257755B7}" type="datetime1">
               <a:rPr lang="en-US" smtClean="0"/>
-              <a:t>9/23/2025</a:t>
+              <a:t>9/25/2025</a:t>
             </a:fld>
             <a:endParaRPr lang="en-US"/>
           </a:p>
@@ -23967,6 +26852,13 @@
             <a:schemeClr val="lt1"/>
           </a:fontRef>
         </p:style>
+        <p:txBody>
+          <a:bodyPr/>
+          <a:lstStyle/>
+          <a:p>
+            <a:endParaRPr lang="zh-CN" altLang="en-US"/>
+          </a:p>
+        </p:txBody>
       </p:sp>
       <p:sp>
         <p:nvSpPr>
@@ -24004,6 +26896,13 @@
             <a:schemeClr val="lt1"/>
           </a:fontRef>
         </p:style>
+        <p:txBody>
+          <a:bodyPr/>
+          <a:lstStyle/>
+          <a:p>
+            <a:endParaRPr lang="zh-CN" altLang="en-US"/>
+          </a:p>
+        </p:txBody>
       </p:sp>
       <p:sp>
         <p:nvSpPr>
@@ -24041,6 +26940,13 @@
             <a:schemeClr val="lt1"/>
           </a:fontRef>
         </p:style>
+        <p:txBody>
+          <a:bodyPr/>
+          <a:lstStyle/>
+          <a:p>
+            <a:endParaRPr lang="zh-CN" altLang="en-US"/>
+          </a:p>
+        </p:txBody>
       </p:sp>
     </p:spTree>
     <p:extLst>
@@ -24625,7 +27531,7 @@
           <a:p>
             <a:fld id="{ED291B17-9318-49DB-B28B-6E5994AE9581}" type="datetime1">
               <a:rPr lang="en-US" smtClean="0"/>
-              <a:t>9/23/2025</a:t>
+              <a:t>9/25/2025</a:t>
             </a:fld>
             <a:endParaRPr lang="en-US" dirty="0"/>
           </a:p>
@@ -24747,6 +27653,13 @@
             <a:schemeClr val="lt1"/>
           </a:fontRef>
         </p:style>
+        <p:txBody>
+          <a:bodyPr/>
+          <a:lstStyle/>
+          <a:p>
+            <a:endParaRPr lang="zh-CN" altLang="en-US"/>
+          </a:p>
+        </p:txBody>
       </p:sp>
       <p:sp>
         <p:nvSpPr>
@@ -24784,6 +27697,13 @@
             <a:schemeClr val="lt1"/>
           </a:fontRef>
         </p:style>
+        <p:txBody>
+          <a:bodyPr/>
+          <a:lstStyle/>
+          <a:p>
+            <a:endParaRPr lang="zh-CN" altLang="en-US"/>
+          </a:p>
+        </p:txBody>
       </p:sp>
       <p:sp>
         <p:nvSpPr>
@@ -24821,6 +27741,13 @@
             <a:schemeClr val="lt1"/>
           </a:fontRef>
         </p:style>
+        <p:txBody>
+          <a:bodyPr/>
+          <a:lstStyle/>
+          <a:p>
+            <a:endParaRPr lang="zh-CN" altLang="en-US"/>
+          </a:p>
+        </p:txBody>
       </p:sp>
     </p:spTree>
     <p:extLst>
@@ -25406,7 +28333,7 @@
           <a:p>
             <a:fld id="{ED291B17-9318-49DB-B28B-6E5994AE9581}" type="datetime1">
               <a:rPr lang="en-US" smtClean="0"/>
-              <a:t>9/23/2025</a:t>
+              <a:t>9/25/2025</a:t>
             </a:fld>
             <a:endParaRPr lang="en-US" dirty="0"/>
           </a:p>
@@ -25528,6 +28455,13 @@
             <a:schemeClr val="lt1"/>
           </a:fontRef>
         </p:style>
+        <p:txBody>
+          <a:bodyPr/>
+          <a:lstStyle/>
+          <a:p>
+            <a:endParaRPr lang="zh-CN" altLang="en-US"/>
+          </a:p>
+        </p:txBody>
       </p:sp>
       <p:sp>
         <p:nvSpPr>
@@ -25565,6 +28499,13 @@
             <a:schemeClr val="lt1"/>
           </a:fontRef>
         </p:style>
+        <p:txBody>
+          <a:bodyPr/>
+          <a:lstStyle/>
+          <a:p>
+            <a:endParaRPr lang="zh-CN" altLang="en-US"/>
+          </a:p>
+        </p:txBody>
       </p:sp>
       <p:sp>
         <p:nvSpPr>
@@ -25602,6 +28543,13 @@
             <a:schemeClr val="lt1"/>
           </a:fontRef>
         </p:style>
+        <p:txBody>
+          <a:bodyPr/>
+          <a:lstStyle/>
+          <a:p>
+            <a:endParaRPr lang="zh-CN" altLang="en-US"/>
+          </a:p>
+        </p:txBody>
       </p:sp>
     </p:spTree>
     <p:extLst>
@@ -26187,7 +29135,7 @@
           <a:p>
             <a:fld id="{ED291B17-9318-49DB-B28B-6E5994AE9581}" type="datetime1">
               <a:rPr lang="en-US" smtClean="0"/>
-              <a:t>9/23/2025</a:t>
+              <a:t>9/25/2025</a:t>
             </a:fld>
             <a:endParaRPr lang="en-US" dirty="0"/>
           </a:p>
@@ -26309,6 +29257,13 @@
             <a:schemeClr val="lt1"/>
           </a:fontRef>
         </p:style>
+        <p:txBody>
+          <a:bodyPr/>
+          <a:lstStyle/>
+          <a:p>
+            <a:endParaRPr lang="zh-CN" altLang="en-US"/>
+          </a:p>
+        </p:txBody>
       </p:sp>
       <p:sp>
         <p:nvSpPr>
@@ -26346,6 +29301,13 @@
             <a:schemeClr val="lt1"/>
           </a:fontRef>
         </p:style>
+        <p:txBody>
+          <a:bodyPr/>
+          <a:lstStyle/>
+          <a:p>
+            <a:endParaRPr lang="zh-CN" altLang="en-US"/>
+          </a:p>
+        </p:txBody>
       </p:sp>
       <p:sp>
         <p:nvSpPr>
@@ -26383,6 +29345,13 @@
             <a:schemeClr val="lt1"/>
           </a:fontRef>
         </p:style>
+        <p:txBody>
+          <a:bodyPr/>
+          <a:lstStyle/>
+          <a:p>
+            <a:endParaRPr lang="zh-CN" altLang="en-US"/>
+          </a:p>
+        </p:txBody>
       </p:sp>
     </p:spTree>
     <p:extLst>
@@ -26967,7 +29936,7 @@
           <a:p>
             <a:fld id="{ED291B17-9318-49DB-B28B-6E5994AE9581}" type="datetime1">
               <a:rPr lang="en-US" smtClean="0"/>
-              <a:t>9/23/2025</a:t>
+              <a:t>9/25/2025</a:t>
             </a:fld>
             <a:endParaRPr lang="en-US" dirty="0"/>
           </a:p>
@@ -27089,6 +30058,13 @@
             <a:schemeClr val="lt1"/>
           </a:fontRef>
         </p:style>
+        <p:txBody>
+          <a:bodyPr/>
+          <a:lstStyle/>
+          <a:p>
+            <a:endParaRPr lang="zh-CN" altLang="en-US"/>
+          </a:p>
+        </p:txBody>
       </p:sp>
       <p:sp>
         <p:nvSpPr>
@@ -27126,6 +30102,13 @@
             <a:schemeClr val="lt1"/>
           </a:fontRef>
         </p:style>
+        <p:txBody>
+          <a:bodyPr/>
+          <a:lstStyle/>
+          <a:p>
+            <a:endParaRPr lang="zh-CN" altLang="en-US"/>
+          </a:p>
+        </p:txBody>
       </p:sp>
       <p:sp>
         <p:nvSpPr>
@@ -27163,6 +30146,13 @@
             <a:schemeClr val="lt1"/>
           </a:fontRef>
         </p:style>
+        <p:txBody>
+          <a:bodyPr/>
+          <a:lstStyle/>
+          <a:p>
+            <a:endParaRPr lang="zh-CN" altLang="en-US"/>
+          </a:p>
+        </p:txBody>
       </p:sp>
     </p:spTree>
     <p:extLst>
@@ -29104,38 +32094,6 @@
           </a:p>
         </p:txBody>
       </p:sp>
-      <p:pic>
-        <p:nvPicPr>
-          <p:cNvPr id="1026" name="Picture 2"/>
-          <p:cNvPicPr>
-            <a:picLocks noChangeAspect="1" noChangeArrowheads="1"/>
-          </p:cNvPicPr>
-          <p:nvPr/>
-        </p:nvPicPr>
-        <p:blipFill>
-          <a:blip r:embed="rId3" cstate="print"/>
-          <a:srcRect/>
-          <a:stretch>
-            <a:fillRect/>
-          </a:stretch>
-        </p:blipFill>
-        <p:spPr bwMode="auto">
-          <a:xfrm>
-            <a:off x="4692700" y="3707524"/>
-            <a:ext cx="1763049" cy="217362"/>
-          </a:xfrm>
-          <a:prstGeom prst="rect">
-            <a:avLst/>
-          </a:prstGeom>
-          <a:noFill/>
-          <a:ln w="9525">
-            <a:noFill/>
-            <a:miter lim="800000"/>
-            <a:headEnd/>
-            <a:tailEnd/>
-          </a:ln>
-        </p:spPr>
-      </p:pic>
       <p:cxnSp>
         <p:nvCxnSpPr>
           <p:cNvPr id="13" name="Straight Connector 12">
@@ -29425,51 +32383,6 @@
                                         </p:cTn>
                                         <p:tgtEl>
                                           <p:spTgt spid="305157"/>
-                                        </p:tgtEl>
-                                        <p:attrNameLst>
-                                          <p:attrName>style.visibility</p:attrName>
-                                        </p:attrNameLst>
-                                      </p:cBhvr>
-                                      <p:to>
-                                        <p:strVal val="visible"/>
-                                      </p:to>
-                                    </p:set>
-                                  </p:childTnLst>
-                                </p:cTn>
-                              </p:par>
-                            </p:childTnLst>
-                          </p:cTn>
-                        </p:par>
-                      </p:childTnLst>
-                    </p:cTn>
-                  </p:par>
-                  <p:par>
-                    <p:cTn id="13" fill="hold">
-                      <p:stCondLst>
-                        <p:cond delay="indefinite"/>
-                      </p:stCondLst>
-                      <p:childTnLst>
-                        <p:par>
-                          <p:cTn id="14" fill="hold">
-                            <p:stCondLst>
-                              <p:cond delay="0"/>
-                            </p:stCondLst>
-                            <p:childTnLst>
-                              <p:par>
-                                <p:cTn id="15" presetID="1" presetClass="entr" presetSubtype="0" fill="hold" nodeType="clickEffect">
-                                  <p:stCondLst>
-                                    <p:cond delay="0"/>
-                                  </p:stCondLst>
-                                  <p:childTnLst>
-                                    <p:set>
-                                      <p:cBhvr>
-                                        <p:cTn id="16" dur="1" fill="hold">
-                                          <p:stCondLst>
-                                            <p:cond delay="0"/>
-                                          </p:stCondLst>
-                                        </p:cTn>
-                                        <p:tgtEl>
-                                          <p:spTgt spid="1026"/>
                                         </p:tgtEl>
                                         <p:attrNameLst>
                                           <p:attrName>style.visibility</p:attrName>
@@ -36063,7 +38976,7 @@
         <p:spPr>
           <a:xfrm>
             <a:off x="209880" y="1002854"/>
-            <a:ext cx="7809840" cy="4154984"/>
+            <a:ext cx="7809840" cy="3416320"/>
           </a:xfrm>
           <a:prstGeom prst="rect">
             <a:avLst/>
@@ -36117,21 +39030,6 @@
             <a:r>
               <a:rPr lang="zh-CN" altLang="en-US" sz="2400" dirty="0"/>
               <a:t>？</a:t>
-            </a:r>
-            <a:endParaRPr lang="en-US" sz="2400" dirty="0"/>
-          </a:p>
-          <a:p>
-            <a:pPr lvl="1">
-              <a:buFont typeface="Wingdings" panose="05000000000000000000" pitchFamily="2" charset="2"/>
-              <a:buChar char="ü"/>
-            </a:pPr>
-            <a:r>
-              <a:rPr lang="en-US" sz="2400" dirty="0"/>
-              <a:t>W</a:t>
-            </a:r>
-            <a:r>
-              <a:rPr lang="en-US" altLang="zh-CN" sz="2400" dirty="0"/>
-              <a:t>hich population density is relatively higher in this region?</a:t>
             </a:r>
             <a:endParaRPr lang="en-US" sz="2400" dirty="0"/>
           </a:p>
@@ -36593,6 +39491,14 @@
 <file path=ppt/slides/slide26.xml><?xml version="1.0" encoding="utf-8"?>
 <p:sld xmlns:a="http://schemas.openxmlformats.org/drawingml/2006/main" xmlns:r="http://schemas.openxmlformats.org/officeDocument/2006/relationships" xmlns:p="http://schemas.openxmlformats.org/presentationml/2006/main">
   <p:cSld>
+    <p:bg>
+      <p:bgPr>
+        <a:solidFill>
+          <a:schemeClr val="bg1"/>
+        </a:solidFill>
+        <a:effectLst/>
+      </p:bgPr>
+    </p:bg>
     <p:spTree>
       <p:nvGrpSpPr>
         <p:cNvPr id="1" name=""/>
@@ -36609,163 +39515,1387 @@
       </p:grpSpPr>
       <p:sp>
         <p:nvSpPr>
-          <p:cNvPr id="2" name="Rectangle 1"/>
-          <p:cNvSpPr/>
-          <p:nvPr/>
+          <p:cNvPr id="36" name="Rectangle 35">
+            <a:extLst>
+              <a:ext uri="{FF2B5EF4-FFF2-40B4-BE49-F238E27FC236}">
+                <a16:creationId xmlns:a16="http://schemas.microsoft.com/office/drawing/2014/main" id="{DCF4EB5C-ED25-4675-8255-2F5B12CFFCF0}"/>
+              </a:ext>
+              <a:ext uri="{C183D7F6-B498-43B3-948B-1728B52AA6E4}">
+                <adec:decorative xmlns:adec="http://schemas.microsoft.com/office/drawing/2017/decorative" val="1"/>
+              </a:ext>
+            </a:extLst>
+          </p:cNvPr>
+          <p:cNvSpPr>
+            <a:spLocks noGrp="1" noRot="1" noChangeAspect="1" noMove="1" noResize="1" noEditPoints="1" noAdjustHandles="1" noChangeArrowheads="1" noChangeShapeType="1" noTextEdit="1"/>
+          </p:cNvSpPr>
+          <p:nvPr>
+            <p:extLst>
+              <p:ext uri="{386F3935-93C4-4BCD-93E2-E3B085C9AB24}">
+                <p16:designElem xmlns:p16="http://schemas.microsoft.com/office/powerpoint/2015/main" val="1"/>
+              </p:ext>
+            </p:extLst>
+          </p:nvPr>
         </p:nvSpPr>
         <p:spPr>
           <a:xfrm>
-            <a:off x="2471305" y="1325254"/>
-            <a:ext cx="3286989" cy="830997"/>
+            <a:off x="301410" y="565785"/>
+            <a:ext cx="2499741" cy="64123"/>
           </a:xfrm>
           <a:prstGeom prst="rect">
             <a:avLst/>
           </a:prstGeom>
-          <a:noFill/>
+          <a:solidFill>
+            <a:srgbClr val="465359"/>
+          </a:solidFill>
+          <a:ln>
+            <a:noFill/>
+          </a:ln>
+          <a:effectLst/>
         </p:spPr>
-        <p:txBody>
-          <a:bodyPr wrap="none" lIns="82296" tIns="41148" rIns="82296" bIns="41148">
-            <a:spAutoFit/>
-          </a:bodyPr>
+        <p:style>
+          <a:lnRef idx="1">
+            <a:schemeClr val="accent1"/>
+          </a:lnRef>
+          <a:fillRef idx="3">
+            <a:schemeClr val="accent1"/>
+          </a:fillRef>
+          <a:effectRef idx="2">
+            <a:schemeClr val="accent1"/>
+          </a:effectRef>
+          <a:fontRef idx="minor">
+            <a:schemeClr val="lt1"/>
+          </a:fontRef>
+        </p:style>
+        <p:txBody>
+          <a:bodyPr/>
           <a:lstStyle/>
           <a:p>
-            <a:pPr algn="ctr"/>
-            <a:r>
-              <a:rPr lang="en-US" sz="4860" b="1" spc="180" dirty="0">
-                <a:ln w="29210">
-                  <a:solidFill>
-                    <a:schemeClr val="accent3">
-                      <a:tint val="10000"/>
-                    </a:schemeClr>
-                  </a:solidFill>
-                </a:ln>
-                <a:solidFill>
-                  <a:srgbClr val="008000">
-                    <a:alpha val="50000"/>
-                  </a:srgbClr>
-                </a:solidFill>
-                <a:effectLst>
-                  <a:innerShdw blurRad="50800" dist="50800" dir="8100000">
-                    <a:srgbClr val="7D7D7D">
-                      <a:alpha val="73000"/>
-                    </a:srgbClr>
-                  </a:innerShdw>
-                </a:effectLst>
-              </a:rPr>
-              <a:t>Thank you!</a:t>
-            </a:r>
-          </a:p>
-        </p:txBody>
-      </p:sp>
-      <p:sp>
-        <p:nvSpPr>
-          <p:cNvPr id="3" name="Slide Number Placeholder 2">
+            <a:pPr marL="0" marR="0" lvl="0" indent="0" algn="l" defTabSz="308610" rtl="0" eaLnBrk="1" fontAlgn="auto" latinLnBrk="0" hangingPunct="1">
+              <a:lnSpc>
+                <a:spcPct val="100000"/>
+              </a:lnSpc>
+              <a:spcBef>
+                <a:spcPts val="0"/>
+              </a:spcBef>
+              <a:spcAft>
+                <a:spcPts val="0"/>
+              </a:spcAft>
+              <a:buClrTx/>
+              <a:buSzTx/>
+              <a:buFontTx/>
+              <a:buNone/>
+              <a:tabLst/>
+              <a:defRPr/>
+            </a:pPr>
+            <a:endParaRPr kumimoji="0" lang="en-US" sz="1215" b="0" i="0" u="none" strike="noStrike" kern="1200" cap="none" spc="0" normalizeH="0" baseline="0" noProof="0">
+              <a:ln>
+                <a:noFill/>
+              </a:ln>
+              <a:solidFill>
+                <a:srgbClr val="FFFFFF"/>
+              </a:solidFill>
+              <a:effectLst/>
+              <a:uLnTx/>
+              <a:uFillTx/>
+              <a:latin typeface="Calibri"/>
+              <a:ea typeface="+mn-ea"/>
+              <a:cs typeface="+mn-cs"/>
+            </a:endParaRPr>
+          </a:p>
+        </p:txBody>
+      </p:sp>
+      <p:sp>
+        <p:nvSpPr>
+          <p:cNvPr id="38" name="Rectangle 37">
             <a:extLst>
               <a:ext uri="{FF2B5EF4-FFF2-40B4-BE49-F238E27FC236}">
-                <a16:creationId xmlns:a16="http://schemas.microsoft.com/office/drawing/2014/main" id="{863C9EAE-E5B7-4784-94CD-D062E17813E3}"/>
+                <a16:creationId xmlns:a16="http://schemas.microsoft.com/office/drawing/2014/main" id="{9514EC6E-A557-42A2-BCDC-3ABFFC5E564D}"/>
+              </a:ext>
+              <a:ext uri="{C183D7F6-B498-43B3-948B-1728B52AA6E4}">
+                <adec:decorative xmlns:adec="http://schemas.microsoft.com/office/drawing/2017/decorative" val="1"/>
               </a:ext>
             </a:extLst>
           </p:cNvPr>
           <p:cNvSpPr>
-            <a:spLocks noGrp="1"/>
-          </p:cNvSpPr>
-          <p:nvPr>
-            <p:ph type="sldNum" sz="quarter" idx="12"/>
-          </p:nvPr>
-        </p:nvSpPr>
-        <p:spPr/>
-        <p:txBody>
-          <a:bodyPr/>
-          <a:lstStyle/>
-          <a:p>
-            <a:fld id="{127DDC20-79C9-9647-820E-6D40A3D210C3}" type="slidenum">
-              <a:rPr lang="en-US" smtClean="0"/>
-              <a:pPr/>
-              <a:t>26</a:t>
-            </a:fld>
-            <a:endParaRPr lang="en-US"/>
-          </a:p>
-        </p:txBody>
-      </p:sp>
-      <p:pic>
-        <p:nvPicPr>
-          <p:cNvPr id="6" name="Picture 5">
-            <a:extLst>
-              <a:ext uri="{FF2B5EF4-FFF2-40B4-BE49-F238E27FC236}">
-                <a16:creationId xmlns:a16="http://schemas.microsoft.com/office/drawing/2014/main" id="{32DE135F-68C6-4911-85BA-92ABB3F9F85C}"/>
-              </a:ext>
-            </a:extLst>
-          </p:cNvPr>
-          <p:cNvPicPr/>
-          <p:nvPr/>
-        </p:nvPicPr>
-        <p:blipFill>
-          <a:blip r:embed="rId3"/>
-          <a:stretch>
-            <a:fillRect/>
-          </a:stretch>
-        </p:blipFill>
+            <a:spLocks noGrp="1" noRot="1" noChangeAspect="1" noMove="1" noResize="1" noEditPoints="1" noAdjustHandles="1" noChangeArrowheads="1" noChangeShapeType="1" noTextEdit="1"/>
+          </p:cNvSpPr>
+          <p:nvPr>
+            <p:extLst>
+              <p:ext uri="{386F3935-93C4-4BCD-93E2-E3B085C9AB24}">
+                <p16:designElem xmlns:p16="http://schemas.microsoft.com/office/powerpoint/2015/main" val="1"/>
+              </p:ext>
+            </p:extLst>
+          </p:nvPr>
+        </p:nvSpPr>
         <p:spPr>
           <a:xfrm>
-            <a:off x="152400" y="4275667"/>
-            <a:ext cx="5915025" cy="758190"/>
+            <a:off x="5428449" y="563384"/>
+            <a:ext cx="2499741" cy="66524"/>
           </a:xfrm>
           <a:prstGeom prst="rect">
             <a:avLst/>
           </a:prstGeom>
-        </p:spPr>
-      </p:pic>
-      <p:cxnSp>
-        <p:nvCxnSpPr>
-          <p:cNvPr id="7" name="Straight Connector 6">
-            <a:extLst>
-              <a:ext uri="{FF2B5EF4-FFF2-40B4-BE49-F238E27FC236}">
-                <a16:creationId xmlns:a16="http://schemas.microsoft.com/office/drawing/2014/main" id="{5ADF13BC-3A5F-4415-94E6-85FAF42998C9}"/>
-              </a:ext>
-            </a:extLst>
-          </p:cNvPr>
-          <p:cNvCxnSpPr/>
-          <p:nvPr/>
-        </p:nvCxnSpPr>
-        <p:spPr>
-          <a:xfrm>
-            <a:off x="152400" y="4182575"/>
-            <a:ext cx="8001000" cy="0"/>
-          </a:xfrm>
-          <a:prstGeom prst="line">
-            <a:avLst/>
-          </a:prstGeom>
+          <a:solidFill>
+            <a:srgbClr val="969FA7"/>
+          </a:solidFill>
           <a:ln>
-            <a:solidFill>
-              <a:schemeClr val="tx1"/>
-            </a:solidFill>
+            <a:noFill/>
           </a:ln>
           <a:effectLst/>
         </p:spPr>
         <p:style>
-          <a:lnRef idx="2">
+          <a:lnRef idx="1">
             <a:schemeClr val="accent1"/>
           </a:lnRef>
-          <a:fillRef idx="0">
+          <a:fillRef idx="3">
             <a:schemeClr val="accent1"/>
           </a:fillRef>
-          <a:effectRef idx="1">
+          <a:effectRef idx="2">
             <a:schemeClr val="accent1"/>
           </a:effectRef>
           <a:fontRef idx="minor">
-            <a:schemeClr val="tx1"/>
+            <a:schemeClr val="lt1"/>
           </a:fontRef>
         </p:style>
-      </p:cxnSp>
+        <p:txBody>
+          <a:bodyPr/>
+          <a:lstStyle/>
+          <a:p>
+            <a:pPr marL="0" marR="0" lvl="0" indent="0" algn="l" defTabSz="308610" rtl="0" eaLnBrk="1" fontAlgn="auto" latinLnBrk="0" hangingPunct="1">
+              <a:lnSpc>
+                <a:spcPct val="100000"/>
+              </a:lnSpc>
+              <a:spcBef>
+                <a:spcPts val="0"/>
+              </a:spcBef>
+              <a:spcAft>
+                <a:spcPts val="0"/>
+              </a:spcAft>
+              <a:buClrTx/>
+              <a:buSzTx/>
+              <a:buFontTx/>
+              <a:buNone/>
+              <a:tabLst/>
+              <a:defRPr/>
+            </a:pPr>
+            <a:endParaRPr kumimoji="0" lang="en-US" sz="1215" b="0" i="0" u="none" strike="noStrike" kern="1200" cap="none" spc="0" normalizeH="0" baseline="0" noProof="0">
+              <a:ln>
+                <a:noFill/>
+              </a:ln>
+              <a:solidFill>
+                <a:srgbClr val="FFFFFF"/>
+              </a:solidFill>
+              <a:effectLst/>
+              <a:uLnTx/>
+              <a:uFillTx/>
+              <a:latin typeface="Calibri"/>
+              <a:ea typeface="+mn-ea"/>
+              <a:cs typeface="+mn-cs"/>
+            </a:endParaRPr>
+          </a:p>
+        </p:txBody>
+      </p:sp>
+      <p:sp>
+        <p:nvSpPr>
+          <p:cNvPr id="40" name="Rectangle 39">
+            <a:extLst>
+              <a:ext uri="{FF2B5EF4-FFF2-40B4-BE49-F238E27FC236}">
+                <a16:creationId xmlns:a16="http://schemas.microsoft.com/office/drawing/2014/main" id="{905482C9-EB42-4BFE-95BF-7FD661F07657}"/>
+              </a:ext>
+              <a:ext uri="{C183D7F6-B498-43B3-948B-1728B52AA6E4}">
+                <adec:decorative xmlns:adec="http://schemas.microsoft.com/office/drawing/2017/decorative" val="1"/>
+              </a:ext>
+            </a:extLst>
+          </p:cNvPr>
+          <p:cNvSpPr>
+            <a:spLocks noGrp="1" noRot="1" noChangeAspect="1" noMove="1" noResize="1" noEditPoints="1" noAdjustHandles="1" noChangeArrowheads="1" noChangeShapeType="1" noTextEdit="1"/>
+          </p:cNvSpPr>
+          <p:nvPr>
+            <p:extLst>
+              <p:ext uri="{386F3935-93C4-4BCD-93E2-E3B085C9AB24}">
+                <p16:designElem xmlns:p16="http://schemas.microsoft.com/office/powerpoint/2015/main" val="1"/>
+              </p:ext>
+            </p:extLst>
+          </p:nvPr>
+        </p:nvSpPr>
+        <p:spPr>
+          <a:xfrm>
+            <a:off x="2863235" y="565785"/>
+            <a:ext cx="2499741" cy="61722"/>
+          </a:xfrm>
+          <a:prstGeom prst="rect">
+            <a:avLst/>
+          </a:prstGeom>
+          <a:solidFill>
+            <a:schemeClr val="accent1"/>
+          </a:solidFill>
+          <a:ln>
+            <a:noFill/>
+          </a:ln>
+          <a:effectLst/>
+        </p:spPr>
+        <p:style>
+          <a:lnRef idx="1">
+            <a:schemeClr val="accent1"/>
+          </a:lnRef>
+          <a:fillRef idx="3">
+            <a:schemeClr val="accent1"/>
+          </a:fillRef>
+          <a:effectRef idx="2">
+            <a:schemeClr val="accent1"/>
+          </a:effectRef>
+          <a:fontRef idx="minor">
+            <a:schemeClr val="lt1"/>
+          </a:fontRef>
+        </p:style>
+        <p:txBody>
+          <a:bodyPr/>
+          <a:lstStyle/>
+          <a:p>
+            <a:pPr marL="0" marR="0" lvl="0" indent="0" algn="l" defTabSz="308610" rtl="0" eaLnBrk="1" fontAlgn="auto" latinLnBrk="0" hangingPunct="1">
+              <a:lnSpc>
+                <a:spcPct val="100000"/>
+              </a:lnSpc>
+              <a:spcBef>
+                <a:spcPts val="0"/>
+              </a:spcBef>
+              <a:spcAft>
+                <a:spcPts val="0"/>
+              </a:spcAft>
+              <a:buClrTx/>
+              <a:buSzTx/>
+              <a:buFontTx/>
+              <a:buNone/>
+              <a:tabLst/>
+              <a:defRPr/>
+            </a:pPr>
+            <a:endParaRPr kumimoji="0" lang="en-US" sz="1215" b="0" i="0" u="none" strike="noStrike" kern="1200" cap="none" spc="0" normalizeH="0" baseline="0" noProof="0">
+              <a:ln>
+                <a:noFill/>
+              </a:ln>
+              <a:solidFill>
+                <a:srgbClr val="FFFFFF"/>
+              </a:solidFill>
+              <a:effectLst/>
+              <a:uLnTx/>
+              <a:uFillTx/>
+              <a:latin typeface="Calibri"/>
+              <a:ea typeface="+mn-ea"/>
+              <a:cs typeface="+mn-cs"/>
+            </a:endParaRPr>
+          </a:p>
+        </p:txBody>
+      </p:sp>
+      <p:sp>
+        <p:nvSpPr>
+          <p:cNvPr id="42" name="Rectangle 41">
+            <a:extLst>
+              <a:ext uri="{FF2B5EF4-FFF2-40B4-BE49-F238E27FC236}">
+                <a16:creationId xmlns:a16="http://schemas.microsoft.com/office/drawing/2014/main" id="{7539E646-A625-4A26-86ED-BD90EDD329F7}"/>
+              </a:ext>
+              <a:ext uri="{C183D7F6-B498-43B3-948B-1728B52AA6E4}">
+                <adec:decorative xmlns:adec="http://schemas.microsoft.com/office/drawing/2017/decorative" val="1"/>
+              </a:ext>
+            </a:extLst>
+          </p:cNvPr>
+          <p:cNvSpPr>
+            <a:spLocks noGrp="1" noRot="1" noChangeAspect="1" noMove="1" noResize="1" noEditPoints="1" noAdjustHandles="1" noChangeArrowheads="1" noChangeShapeType="1" noTextEdit="1"/>
+          </p:cNvSpPr>
+          <p:nvPr>
+            <p:extLst>
+              <p:ext uri="{386F3935-93C4-4BCD-93E2-E3B085C9AB24}">
+                <p16:designElem xmlns:p16="http://schemas.microsoft.com/office/powerpoint/2015/main" val="1"/>
+              </p:ext>
+            </p:extLst>
+          </p:nvPr>
+        </p:nvSpPr>
+        <p:spPr>
+          <a:xfrm>
+            <a:off x="301411" y="2340066"/>
+            <a:ext cx="7626779" cy="2253251"/>
+          </a:xfrm>
+          <a:prstGeom prst="rect">
+            <a:avLst/>
+          </a:prstGeom>
+          <a:solidFill>
+            <a:srgbClr val="465359"/>
+          </a:solidFill>
+          <a:ln>
+            <a:noFill/>
+          </a:ln>
+          <a:effectLst/>
+        </p:spPr>
+        <p:style>
+          <a:lnRef idx="1">
+            <a:schemeClr val="accent1"/>
+          </a:lnRef>
+          <a:fillRef idx="3">
+            <a:schemeClr val="accent1"/>
+          </a:fillRef>
+          <a:effectRef idx="2">
+            <a:schemeClr val="accent1"/>
+          </a:effectRef>
+          <a:fontRef idx="minor">
+            <a:schemeClr val="lt1"/>
+          </a:fontRef>
+        </p:style>
+        <p:txBody>
+          <a:bodyPr/>
+          <a:lstStyle/>
+          <a:p>
+            <a:pPr marL="0" marR="0" lvl="0" indent="0" algn="l" defTabSz="308610" rtl="0" eaLnBrk="1" fontAlgn="auto" latinLnBrk="0" hangingPunct="1">
+              <a:lnSpc>
+                <a:spcPct val="100000"/>
+              </a:lnSpc>
+              <a:spcBef>
+                <a:spcPts val="0"/>
+              </a:spcBef>
+              <a:spcAft>
+                <a:spcPts val="0"/>
+              </a:spcAft>
+              <a:buClrTx/>
+              <a:buSzTx/>
+              <a:buFontTx/>
+              <a:buNone/>
+              <a:tabLst/>
+              <a:defRPr/>
+            </a:pPr>
+            <a:endParaRPr kumimoji="0" lang="en-US" sz="1215" b="0" i="0" u="none" strike="noStrike" kern="1200" cap="none" spc="0" normalizeH="0" baseline="0" noProof="0">
+              <a:ln>
+                <a:noFill/>
+              </a:ln>
+              <a:solidFill>
+                <a:srgbClr val="FFFFFF"/>
+              </a:solidFill>
+              <a:effectLst/>
+              <a:uLnTx/>
+              <a:uFillTx/>
+              <a:latin typeface="Calibri"/>
+              <a:ea typeface="+mn-ea"/>
+              <a:cs typeface="+mn-cs"/>
+            </a:endParaRPr>
+          </a:p>
+        </p:txBody>
+      </p:sp>
+      <p:sp useBgFill="1">
+        <p:nvSpPr>
+          <p:cNvPr id="44" name="Rectangle 43">
+            <a:extLst>
+              <a:ext uri="{FF2B5EF4-FFF2-40B4-BE49-F238E27FC236}">
+                <a16:creationId xmlns:a16="http://schemas.microsoft.com/office/drawing/2014/main" id="{39171204-6A50-40E1-B631-84CEDFC9396A}"/>
+              </a:ext>
+              <a:ext uri="{C183D7F6-B498-43B3-948B-1728B52AA6E4}">
+                <adec:decorative xmlns:adec="http://schemas.microsoft.com/office/drawing/2017/decorative" val="1"/>
+              </a:ext>
+            </a:extLst>
+          </p:cNvPr>
+          <p:cNvSpPr>
+            <a:spLocks noGrp="1" noRot="1" noChangeAspect="1" noMove="1" noResize="1" noEditPoints="1" noAdjustHandles="1" noChangeArrowheads="1" noChangeShapeType="1" noTextEdit="1"/>
+          </p:cNvSpPr>
+          <p:nvPr>
+            <p:extLst>
+              <p:ext uri="{386F3935-93C4-4BCD-93E2-E3B085C9AB24}">
+                <p16:designElem xmlns:p16="http://schemas.microsoft.com/office/powerpoint/2015/main" val="1"/>
+              </p:ext>
+            </p:extLst>
+          </p:nvPr>
+        </p:nvSpPr>
+        <p:spPr>
+          <a:xfrm>
+            <a:off x="0" y="257175"/>
+            <a:ext cx="8229600" cy="4629150"/>
+          </a:xfrm>
+          <a:prstGeom prst="rect">
+            <a:avLst/>
+          </a:prstGeom>
+          <a:ln>
+            <a:noFill/>
+          </a:ln>
+        </p:spPr>
+        <p:style>
+          <a:lnRef idx="2">
+            <a:schemeClr val="accent1">
+              <a:shade val="50000"/>
+            </a:schemeClr>
+          </a:lnRef>
+          <a:fillRef idx="1">
+            <a:schemeClr val="accent1"/>
+          </a:fillRef>
+          <a:effectRef idx="0">
+            <a:schemeClr val="accent1"/>
+          </a:effectRef>
+          <a:fontRef idx="minor">
+            <a:schemeClr val="lt1"/>
+          </a:fontRef>
+        </p:style>
+        <p:txBody>
+          <a:bodyPr rtlCol="0" anchor="ctr"/>
+          <a:lstStyle/>
+          <a:p>
+            <a:pPr marL="0" marR="0" lvl="0" indent="0" algn="ctr" defTabSz="308610" rtl="0" eaLnBrk="1" fontAlgn="auto" latinLnBrk="0" hangingPunct="1">
+              <a:lnSpc>
+                <a:spcPct val="100000"/>
+              </a:lnSpc>
+              <a:spcBef>
+                <a:spcPts val="0"/>
+              </a:spcBef>
+              <a:spcAft>
+                <a:spcPts val="0"/>
+              </a:spcAft>
+              <a:buClrTx/>
+              <a:buSzTx/>
+              <a:buFontTx/>
+              <a:buNone/>
+              <a:tabLst/>
+              <a:defRPr/>
+            </a:pPr>
+            <a:endParaRPr kumimoji="0" lang="en-US" sz="1215" b="0" i="0" u="none" strike="noStrike" kern="1200" cap="none" spc="0" normalizeH="0" baseline="0" noProof="0">
+              <a:ln>
+                <a:noFill/>
+              </a:ln>
+              <a:solidFill>
+                <a:srgbClr val="FFFFFF"/>
+              </a:solidFill>
+              <a:effectLst/>
+              <a:uLnTx/>
+              <a:uFillTx/>
+              <a:latin typeface="Calibri"/>
+              <a:ea typeface="+mn-ea"/>
+              <a:cs typeface="+mn-cs"/>
+            </a:endParaRPr>
+          </a:p>
+        </p:txBody>
+      </p:sp>
+      <p:sp>
+        <p:nvSpPr>
+          <p:cNvPr id="46" name="Rectangle 45">
+            <a:extLst>
+              <a:ext uri="{FF2B5EF4-FFF2-40B4-BE49-F238E27FC236}">
+                <a16:creationId xmlns:a16="http://schemas.microsoft.com/office/drawing/2014/main" id="{06C973F6-5187-412F-AACC-6E3FF8A6A12C}"/>
+              </a:ext>
+              <a:ext uri="{C183D7F6-B498-43B3-948B-1728B52AA6E4}">
+                <adec:decorative xmlns:adec="http://schemas.microsoft.com/office/drawing/2017/decorative" val="1"/>
+              </a:ext>
+            </a:extLst>
+          </p:cNvPr>
+          <p:cNvSpPr>
+            <a:spLocks noGrp="1" noRot="1" noChangeAspect="1" noMove="1" noResize="1" noEditPoints="1" noAdjustHandles="1" noChangeArrowheads="1" noChangeShapeType="1" noTextEdit="1"/>
+          </p:cNvSpPr>
+          <p:nvPr>
+            <p:extLst>
+              <p:ext uri="{386F3935-93C4-4BCD-93E2-E3B085C9AB24}">
+                <p16:designElem xmlns:p16="http://schemas.microsoft.com/office/powerpoint/2015/main" val="1"/>
+              </p:ext>
+            </p:extLst>
+          </p:nvPr>
+        </p:nvSpPr>
+        <p:spPr>
+          <a:xfrm>
+            <a:off x="343999" y="592623"/>
+            <a:ext cx="746661" cy="3955321"/>
+          </a:xfrm>
+          <a:prstGeom prst="rect">
+            <a:avLst/>
+          </a:prstGeom>
+          <a:solidFill>
+            <a:srgbClr val="465359"/>
+          </a:solidFill>
+          <a:ln>
+            <a:noFill/>
+          </a:ln>
+          <a:effectLst/>
+        </p:spPr>
+        <p:style>
+          <a:lnRef idx="1">
+            <a:schemeClr val="accent1"/>
+          </a:lnRef>
+          <a:fillRef idx="3">
+            <a:schemeClr val="accent1"/>
+          </a:fillRef>
+          <a:effectRef idx="2">
+            <a:schemeClr val="accent1"/>
+          </a:effectRef>
+          <a:fontRef idx="minor">
+            <a:schemeClr val="lt1"/>
+          </a:fontRef>
+        </p:style>
+        <p:txBody>
+          <a:bodyPr/>
+          <a:lstStyle/>
+          <a:p>
+            <a:pPr marL="0" marR="0" lvl="0" indent="0" algn="l" defTabSz="308610" rtl="0" eaLnBrk="1" fontAlgn="auto" latinLnBrk="0" hangingPunct="1">
+              <a:lnSpc>
+                <a:spcPct val="100000"/>
+              </a:lnSpc>
+              <a:spcBef>
+                <a:spcPts val="0"/>
+              </a:spcBef>
+              <a:spcAft>
+                <a:spcPts val="0"/>
+              </a:spcAft>
+              <a:buClrTx/>
+              <a:buSzTx/>
+              <a:buFontTx/>
+              <a:buNone/>
+              <a:tabLst/>
+              <a:defRPr/>
+            </a:pPr>
+            <a:endParaRPr kumimoji="0" lang="en-US" sz="1215" b="0" i="0" u="none" strike="noStrike" kern="1200" cap="none" spc="0" normalizeH="0" baseline="0" noProof="0">
+              <a:ln>
+                <a:noFill/>
+              </a:ln>
+              <a:solidFill>
+                <a:srgbClr val="FFFFFF"/>
+              </a:solidFill>
+              <a:effectLst/>
+              <a:uLnTx/>
+              <a:uFillTx/>
+              <a:latin typeface="Calibri"/>
+              <a:ea typeface="+mn-ea"/>
+              <a:cs typeface="+mn-cs"/>
+            </a:endParaRPr>
+          </a:p>
+        </p:txBody>
+      </p:sp>
+      <p:sp>
+        <p:nvSpPr>
+          <p:cNvPr id="48" name="Rectangle 47">
+            <a:extLst>
+              <a:ext uri="{FF2B5EF4-FFF2-40B4-BE49-F238E27FC236}">
+                <a16:creationId xmlns:a16="http://schemas.microsoft.com/office/drawing/2014/main" id="{D11AE14F-1B7E-41E6-B579-2F71D135036C}"/>
+              </a:ext>
+              <a:ext uri="{C183D7F6-B498-43B3-948B-1728B52AA6E4}">
+                <adec:decorative xmlns:adec="http://schemas.microsoft.com/office/drawing/2017/decorative" val="1"/>
+              </a:ext>
+            </a:extLst>
+          </p:cNvPr>
+          <p:cNvSpPr>
+            <a:spLocks noGrp="1" noRot="1" noChangeAspect="1" noMove="1" noResize="1" noEditPoints="1" noAdjustHandles="1" noChangeArrowheads="1" noChangeShapeType="1" noTextEdit="1"/>
+          </p:cNvSpPr>
+          <p:nvPr>
+            <p:extLst>
+              <p:ext uri="{386F3935-93C4-4BCD-93E2-E3B085C9AB24}">
+                <p16:designElem xmlns:p16="http://schemas.microsoft.com/office/powerpoint/2015/main" val="1"/>
+              </p:ext>
+            </p:extLst>
+          </p:nvPr>
+        </p:nvSpPr>
+        <p:spPr>
+          <a:xfrm>
+            <a:off x="1156178" y="592621"/>
+            <a:ext cx="6723707" cy="2482699"/>
+          </a:xfrm>
+          <a:prstGeom prst="rect">
+            <a:avLst/>
+          </a:prstGeom>
+          <a:solidFill>
+            <a:schemeClr val="accent1"/>
+          </a:solidFill>
+          <a:ln>
+            <a:noFill/>
+          </a:ln>
+          <a:effectLst/>
+        </p:spPr>
+        <p:style>
+          <a:lnRef idx="1">
+            <a:schemeClr val="accent1"/>
+          </a:lnRef>
+          <a:fillRef idx="3">
+            <a:schemeClr val="accent1"/>
+          </a:fillRef>
+          <a:effectRef idx="2">
+            <a:schemeClr val="accent1"/>
+          </a:effectRef>
+          <a:fontRef idx="minor">
+            <a:schemeClr val="lt1"/>
+          </a:fontRef>
+        </p:style>
+        <p:txBody>
+          <a:bodyPr/>
+          <a:lstStyle/>
+          <a:p>
+            <a:pPr marL="0" marR="0" lvl="0" indent="0" algn="l" defTabSz="308610" rtl="0" eaLnBrk="1" fontAlgn="auto" latinLnBrk="0" hangingPunct="1">
+              <a:lnSpc>
+                <a:spcPct val="100000"/>
+              </a:lnSpc>
+              <a:spcBef>
+                <a:spcPts val="0"/>
+              </a:spcBef>
+              <a:spcAft>
+                <a:spcPts val="0"/>
+              </a:spcAft>
+              <a:buClrTx/>
+              <a:buSzTx/>
+              <a:buFontTx/>
+              <a:buNone/>
+              <a:tabLst/>
+              <a:defRPr/>
+            </a:pPr>
+            <a:endParaRPr kumimoji="0" lang="en-US" sz="1215" b="0" i="0" u="none" strike="noStrike" kern="1200" cap="none" spc="0" normalizeH="0" baseline="0" noProof="0">
+              <a:ln>
+                <a:noFill/>
+              </a:ln>
+              <a:solidFill>
+                <a:srgbClr val="FFFFFF"/>
+              </a:solidFill>
+              <a:effectLst/>
+              <a:uLnTx/>
+              <a:uFillTx/>
+              <a:latin typeface="Calibri"/>
+              <a:ea typeface="+mn-ea"/>
+              <a:cs typeface="+mn-cs"/>
+            </a:endParaRPr>
+          </a:p>
+        </p:txBody>
+      </p:sp>
+      <p:sp>
+        <p:nvSpPr>
+          <p:cNvPr id="2" name="Title 1">
+            <a:extLst>
+              <a:ext uri="{FF2B5EF4-FFF2-40B4-BE49-F238E27FC236}">
+                <a16:creationId xmlns:a16="http://schemas.microsoft.com/office/drawing/2014/main" id="{3778BAB5-C1DE-8DAD-E76F-BECA6F24C1F4}"/>
+              </a:ext>
+            </a:extLst>
+          </p:cNvPr>
+          <p:cNvSpPr>
+            <a:spLocks noGrp="1"/>
+          </p:cNvSpPr>
+          <p:nvPr>
+            <p:ph type="title"/>
+          </p:nvPr>
+        </p:nvSpPr>
+        <p:spPr>
+          <a:xfrm>
+            <a:off x="1278258" y="735412"/>
+            <a:ext cx="6492542" cy="2247787"/>
+          </a:xfrm>
+        </p:spPr>
+        <p:txBody>
+          <a:bodyPr vert="horz" lIns="61722" tIns="30861" rIns="61722" bIns="30861" rtlCol="0" anchor="ctr">
+            <a:normAutofit/>
+          </a:bodyPr>
+          <a:lstStyle/>
+          <a:p>
+            <a:r>
+              <a:rPr lang="en-US" sz="4050" dirty="0">
+                <a:solidFill>
+                  <a:srgbClr val="FFFFFF"/>
+                </a:solidFill>
+              </a:rPr>
+              <a:t>6.2 </a:t>
+            </a:r>
+            <a:br>
+              <a:rPr lang="en-US" sz="4050" dirty="0">
+                <a:solidFill>
+                  <a:srgbClr val="FFFFFF"/>
+                </a:solidFill>
+              </a:rPr>
+            </a:br>
+            <a:r>
+              <a:rPr lang="en-US" sz="4050" dirty="0">
+                <a:solidFill>
+                  <a:srgbClr val="FFFFFF"/>
+                </a:solidFill>
+              </a:rPr>
+              <a:t>Lab session</a:t>
+            </a:r>
+          </a:p>
+        </p:txBody>
+      </p:sp>
+      <p:sp>
+        <p:nvSpPr>
+          <p:cNvPr id="50" name="Rectangle 49">
+            <a:extLst>
+              <a:ext uri="{FF2B5EF4-FFF2-40B4-BE49-F238E27FC236}">
+                <a16:creationId xmlns:a16="http://schemas.microsoft.com/office/drawing/2014/main" id="{752BB805-F7B7-4B80-A1C5-385D4DAF74D0}"/>
+              </a:ext>
+              <a:ext uri="{C183D7F6-B498-43B3-948B-1728B52AA6E4}">
+                <adec:decorative xmlns:adec="http://schemas.microsoft.com/office/drawing/2017/decorative" val="1"/>
+              </a:ext>
+            </a:extLst>
+          </p:cNvPr>
+          <p:cNvSpPr>
+            <a:spLocks noGrp="1" noRot="1" noChangeAspect="1" noMove="1" noResize="1" noEditPoints="1" noAdjustHandles="1" noChangeArrowheads="1" noChangeShapeType="1" noTextEdit="1"/>
+          </p:cNvSpPr>
+          <p:nvPr>
+            <p:extLst>
+              <p:ext uri="{386F3935-93C4-4BCD-93E2-E3B085C9AB24}">
+                <p16:designElem xmlns:p16="http://schemas.microsoft.com/office/powerpoint/2015/main" val="1"/>
+              </p:ext>
+            </p:extLst>
+          </p:nvPr>
+        </p:nvSpPr>
+        <p:spPr>
+          <a:xfrm>
+            <a:off x="1156133" y="3149018"/>
+            <a:ext cx="6723753" cy="1398925"/>
+          </a:xfrm>
+          <a:prstGeom prst="rect">
+            <a:avLst/>
+          </a:prstGeom>
+          <a:solidFill>
+            <a:srgbClr val="6C7781">
+              <a:alpha val="80000"/>
+            </a:srgbClr>
+          </a:solidFill>
+          <a:ln>
+            <a:noFill/>
+          </a:ln>
+          <a:effectLst/>
+        </p:spPr>
+        <p:style>
+          <a:lnRef idx="1">
+            <a:schemeClr val="accent1"/>
+          </a:lnRef>
+          <a:fillRef idx="3">
+            <a:schemeClr val="accent1"/>
+          </a:fillRef>
+          <a:effectRef idx="2">
+            <a:schemeClr val="accent1"/>
+          </a:effectRef>
+          <a:fontRef idx="minor">
+            <a:schemeClr val="lt1"/>
+          </a:fontRef>
+        </p:style>
+        <p:txBody>
+          <a:bodyPr/>
+          <a:lstStyle/>
+          <a:p>
+            <a:pPr marL="0" marR="0" lvl="0" indent="0" algn="l" defTabSz="308610" rtl="0" eaLnBrk="1" fontAlgn="auto" latinLnBrk="0" hangingPunct="1">
+              <a:lnSpc>
+                <a:spcPct val="100000"/>
+              </a:lnSpc>
+              <a:spcBef>
+                <a:spcPts val="0"/>
+              </a:spcBef>
+              <a:spcAft>
+                <a:spcPts val="0"/>
+              </a:spcAft>
+              <a:buClrTx/>
+              <a:buSzTx/>
+              <a:buFontTx/>
+              <a:buNone/>
+              <a:tabLst/>
+              <a:defRPr/>
+            </a:pPr>
+            <a:endParaRPr kumimoji="0" lang="en-US" sz="1215" b="0" i="0" u="none" strike="noStrike" kern="1200" cap="none" spc="0" normalizeH="0" baseline="0" noProof="0">
+              <a:ln>
+                <a:noFill/>
+              </a:ln>
+              <a:solidFill>
+                <a:srgbClr val="FFFFFF"/>
+              </a:solidFill>
+              <a:effectLst/>
+              <a:uLnTx/>
+              <a:uFillTx/>
+              <a:latin typeface="Calibri"/>
+              <a:ea typeface="+mn-ea"/>
+              <a:cs typeface="+mn-cs"/>
+            </a:endParaRPr>
+          </a:p>
+        </p:txBody>
+      </p:sp>
     </p:spTree>
     <p:extLst>
       <p:ext uri="{BB962C8B-B14F-4D97-AF65-F5344CB8AC3E}">
-        <p14:creationId xmlns:p14="http://schemas.microsoft.com/office/powerpoint/2010/main" val="2635223018"/>
+        <p14:creationId xmlns:p14="http://schemas.microsoft.com/office/powerpoint/2010/main" val="2268424521"/>
       </p:ext>
     </p:extLst>
   </p:cSld>
   <p:clrMapOvr>
     <a:masterClrMapping/>
+  </p:clrMapOvr>
+  <p:timing>
+    <p:tnLst>
+      <p:par>
+        <p:cTn id="1" dur="indefinite" restart="never" nodeType="tmRoot">
+          <p:childTnLst>
+            <p:seq concurrent="1" nextAc="seek">
+              <p:cTn id="2" dur="indefinite" nodeType="mainSeq">
+                <p:childTnLst>
+                  <p:par>
+                    <p:cTn id="3" fill="hold">
+                      <p:stCondLst>
+                        <p:cond delay="indefinite"/>
+                        <p:cond evt="onBegin" delay="0">
+                          <p:tn val="2"/>
+                        </p:cond>
+                      </p:stCondLst>
+                      <p:childTnLst>
+                        <p:par>
+                          <p:cTn id="4" fill="hold">
+                            <p:stCondLst>
+                              <p:cond delay="0"/>
+                            </p:stCondLst>
+                            <p:childTnLst>
+                              <p:par>
+                                <p:cTn id="5" presetID="10" presetClass="entr" presetSubtype="0" fill="hold" grpId="0" nodeType="withEffect">
+                                  <p:stCondLst>
+                                    <p:cond delay="500"/>
+                                  </p:stCondLst>
+                                  <p:iterate type="wd">
+                                    <p:tmPct val="15000"/>
+                                  </p:iterate>
+                                  <p:childTnLst>
+                                    <p:set>
+                                      <p:cBhvr>
+                                        <p:cTn id="6" dur="1" fill="hold">
+                                          <p:stCondLst>
+                                            <p:cond delay="0"/>
+                                          </p:stCondLst>
+                                        </p:cTn>
+                                        <p:tgtEl>
+                                          <p:spTgt spid="2"/>
+                                        </p:tgtEl>
+                                        <p:attrNameLst>
+                                          <p:attrName>style.visibility</p:attrName>
+                                        </p:attrNameLst>
+                                      </p:cBhvr>
+                                      <p:to>
+                                        <p:strVal val="visible"/>
+                                      </p:to>
+                                    </p:set>
+                                    <p:animEffect transition="in" filter="fade">
+                                      <p:cBhvr>
+                                        <p:cTn id="7" dur="1000"/>
+                                        <p:tgtEl>
+                                          <p:spTgt spid="2"/>
+                                        </p:tgtEl>
+                                      </p:cBhvr>
+                                    </p:animEffect>
+                                  </p:childTnLst>
+                                </p:cTn>
+                              </p:par>
+                            </p:childTnLst>
+                          </p:cTn>
+                        </p:par>
+                      </p:childTnLst>
+                    </p:cTn>
+                  </p:par>
+                </p:childTnLst>
+              </p:cTn>
+              <p:prevCondLst>
+                <p:cond evt="onPrev" delay="0">
+                  <p:tgtEl>
+                    <p:sldTgt/>
+                  </p:tgtEl>
+                </p:cond>
+              </p:prevCondLst>
+              <p:nextCondLst>
+                <p:cond evt="onNext" delay="0">
+                  <p:tgtEl>
+                    <p:sldTgt/>
+                  </p:tgtEl>
+                </p:cond>
+              </p:nextCondLst>
+            </p:seq>
+          </p:childTnLst>
+        </p:cTn>
+      </p:par>
+    </p:tnLst>
+    <p:bldLst>
+      <p:bldP spid="2" grpId="0"/>
+    </p:bldLst>
+  </p:timing>
+</p:sld>
+</file>
+
+<file path=ppt/slides/slide27.xml><?xml version="1.0" encoding="utf-8"?>
+<p:sld xmlns:a="http://schemas.openxmlformats.org/drawingml/2006/main" xmlns:r="http://schemas.openxmlformats.org/officeDocument/2006/relationships" xmlns:p="http://schemas.openxmlformats.org/presentationml/2006/main">
+  <p:cSld>
+    <p:bg>
+      <p:bgPr>
+        <a:solidFill>
+          <a:schemeClr val="bg1"/>
+        </a:solidFill>
+        <a:effectLst/>
+      </p:bgPr>
+    </p:bg>
+    <p:spTree>
+      <p:nvGrpSpPr>
+        <p:cNvPr id="1" name=""/>
+        <p:cNvGrpSpPr/>
+        <p:nvPr/>
+      </p:nvGrpSpPr>
+      <p:grpSpPr>
+        <a:xfrm>
+          <a:off x="0" y="0"/>
+          <a:ext cx="0" cy="0"/>
+          <a:chOff x="0" y="0"/>
+          <a:chExt cx="0" cy="0"/>
+        </a:xfrm>
+      </p:grpSpPr>
+      <p:sp>
+        <p:nvSpPr>
+          <p:cNvPr id="9" name="Rectangle 8">
+            <a:extLst>
+              <a:ext uri="{FF2B5EF4-FFF2-40B4-BE49-F238E27FC236}">
+                <a16:creationId xmlns:a16="http://schemas.microsoft.com/office/drawing/2014/main" id="{BFABBCE0-E08C-4BBE-9FD2-E2B253D4D5F2}"/>
+              </a:ext>
+              <a:ext uri="{C183D7F6-B498-43B3-948B-1728B52AA6E4}">
+                <adec:decorative xmlns:adec="http://schemas.microsoft.com/office/drawing/2017/decorative" val="1"/>
+              </a:ext>
+            </a:extLst>
+          </p:cNvPr>
+          <p:cNvSpPr>
+            <a:spLocks noGrp="1" noRot="1" noChangeAspect="1" noMove="1" noResize="1" noEditPoints="1" noAdjustHandles="1" noChangeArrowheads="1" noChangeShapeType="1" noTextEdit="1"/>
+          </p:cNvSpPr>
+          <p:nvPr>
+            <p:extLst>
+              <p:ext uri="{386F3935-93C4-4BCD-93E2-E3B085C9AB24}">
+                <p16:designElem xmlns:p16="http://schemas.microsoft.com/office/powerpoint/2015/main" val="1"/>
+              </p:ext>
+            </p:extLst>
+          </p:nvPr>
+        </p:nvSpPr>
+        <p:spPr>
+          <a:xfrm>
+            <a:off x="0" y="257176"/>
+            <a:ext cx="8229600" cy="4629149"/>
+          </a:xfrm>
+          <a:prstGeom prst="rect">
+            <a:avLst/>
+          </a:prstGeom>
+          <a:solidFill>
+            <a:schemeClr val="bg1">
+              <a:lumMod val="75000"/>
+              <a:lumOff val="25000"/>
+            </a:schemeClr>
+          </a:solidFill>
+          <a:ln>
+            <a:noFill/>
+          </a:ln>
+        </p:spPr>
+        <p:style>
+          <a:lnRef idx="2">
+            <a:schemeClr val="accent1">
+              <a:shade val="50000"/>
+            </a:schemeClr>
+          </a:lnRef>
+          <a:fillRef idx="1">
+            <a:schemeClr val="accent1"/>
+          </a:fillRef>
+          <a:effectRef idx="0">
+            <a:schemeClr val="accent1"/>
+          </a:effectRef>
+          <a:fontRef idx="minor">
+            <a:schemeClr val="lt1"/>
+          </a:fontRef>
+        </p:style>
+        <p:txBody>
+          <a:bodyPr rtlCol="0" anchor="ctr"/>
+          <a:lstStyle/>
+          <a:p>
+            <a:pPr marL="0" marR="0" lvl="0" indent="0" algn="ctr" defTabSz="308610" rtl="0" eaLnBrk="1" fontAlgn="auto" latinLnBrk="0" hangingPunct="1">
+              <a:lnSpc>
+                <a:spcPct val="100000"/>
+              </a:lnSpc>
+              <a:spcBef>
+                <a:spcPts val="0"/>
+              </a:spcBef>
+              <a:spcAft>
+                <a:spcPts val="0"/>
+              </a:spcAft>
+              <a:buClrTx/>
+              <a:buSzTx/>
+              <a:buFontTx/>
+              <a:buNone/>
+              <a:tabLst/>
+              <a:defRPr/>
+            </a:pPr>
+            <a:endParaRPr kumimoji="0" lang="en-US" sz="1215" b="0" i="0" u="none" strike="noStrike" kern="1200" cap="none" spc="0" normalizeH="0" baseline="0" noProof="0">
+              <a:ln>
+                <a:noFill/>
+              </a:ln>
+              <a:solidFill>
+                <a:prstClr val="white"/>
+              </a:solidFill>
+              <a:effectLst/>
+              <a:uLnTx/>
+              <a:uFillTx/>
+              <a:latin typeface="Gill Sans MT" panose="020B0502020104020203"/>
+              <a:ea typeface="+mn-ea"/>
+              <a:cs typeface="+mn-cs"/>
+            </a:endParaRPr>
+          </a:p>
+        </p:txBody>
+      </p:sp>
+      <p:sp>
+        <p:nvSpPr>
+          <p:cNvPr id="2" name="Title 1">
+            <a:extLst>
+              <a:ext uri="{FF2B5EF4-FFF2-40B4-BE49-F238E27FC236}">
+                <a16:creationId xmlns:a16="http://schemas.microsoft.com/office/drawing/2014/main" id="{500F975A-F937-77A1-413D-F51FF137F9AD}"/>
+              </a:ext>
+            </a:extLst>
+          </p:cNvPr>
+          <p:cNvSpPr>
+            <a:spLocks noGrp="1"/>
+          </p:cNvSpPr>
+          <p:nvPr>
+            <p:ph type="title"/>
+          </p:nvPr>
+        </p:nvSpPr>
+        <p:spPr>
+          <a:xfrm>
+            <a:off x="392417" y="865356"/>
+            <a:ext cx="7444991" cy="462049"/>
+          </a:xfrm>
+        </p:spPr>
+        <p:txBody>
+          <a:bodyPr>
+            <a:normAutofit/>
+          </a:bodyPr>
+          <a:lstStyle/>
+          <a:p>
+            <a:pPr algn="ctr">
+              <a:spcBef>
+                <a:spcPts val="0"/>
+              </a:spcBef>
+              <a:spcAft>
+                <a:spcPts val="398"/>
+              </a:spcAft>
+            </a:pPr>
+            <a:r>
+              <a:rPr lang="en-US" sz="2160" b="1" dirty="0">
+                <a:solidFill>
+                  <a:schemeClr val="tx1">
+                    <a:lumMod val="85000"/>
+                    <a:lumOff val="15000"/>
+                  </a:schemeClr>
+                </a:solidFill>
+                <a:latin typeface="+mn-lt"/>
+                <a:ea typeface="Calibri" panose="020F0502020204030204" pitchFamily="34" charset="0"/>
+                <a:cs typeface="Calibri" panose="020F0502020204030204" pitchFamily="34" charset="0"/>
+              </a:rPr>
+              <a:t>Lab 05: </a:t>
+            </a:r>
+            <a:r>
+              <a:rPr lang="en-US" b="1" dirty="0"/>
+              <a:t>standardization and classification</a:t>
+            </a:r>
+            <a:endParaRPr lang="en-US" sz="2160" dirty="0">
+              <a:solidFill>
+                <a:schemeClr val="tx1">
+                  <a:lumMod val="85000"/>
+                  <a:lumOff val="15000"/>
+                </a:schemeClr>
+              </a:solidFill>
+              <a:latin typeface="+mn-lt"/>
+              <a:ea typeface="Calibri" panose="020F0502020204030204" pitchFamily="34" charset="0"/>
+              <a:cs typeface="Calibri" panose="020F0502020204030204" pitchFamily="34" charset="0"/>
+            </a:endParaRPr>
+          </a:p>
+        </p:txBody>
+      </p:sp>
+      <p:sp>
+        <p:nvSpPr>
+          <p:cNvPr id="11" name="Rectangle 10">
+            <a:extLst>
+              <a:ext uri="{FF2B5EF4-FFF2-40B4-BE49-F238E27FC236}">
+                <a16:creationId xmlns:a16="http://schemas.microsoft.com/office/drawing/2014/main" id="{FF426BAC-43D6-468E-B6FF-167034D5CE43}"/>
+              </a:ext>
+              <a:ext uri="{C183D7F6-B498-43B3-948B-1728B52AA6E4}">
+                <adec:decorative xmlns:adec="http://schemas.microsoft.com/office/drawing/2017/decorative" val="1"/>
+              </a:ext>
+            </a:extLst>
+          </p:cNvPr>
+          <p:cNvSpPr>
+            <a:spLocks noGrp="1" noRot="1" noChangeAspect="1" noMove="1" noResize="1" noEditPoints="1" noAdjustHandles="1" noChangeArrowheads="1" noChangeShapeType="1" noTextEdit="1"/>
+          </p:cNvSpPr>
+          <p:nvPr>
+            <p:extLst>
+              <p:ext uri="{386F3935-93C4-4BCD-93E2-E3B085C9AB24}">
+                <p16:designElem xmlns:p16="http://schemas.microsoft.com/office/powerpoint/2015/main" val="1"/>
+              </p:ext>
+            </p:extLst>
+          </p:nvPr>
+        </p:nvSpPr>
+        <p:spPr>
+          <a:xfrm>
+            <a:off x="301410" y="565785"/>
+            <a:ext cx="2499741" cy="64123"/>
+          </a:xfrm>
+          <a:prstGeom prst="rect">
+            <a:avLst/>
+          </a:prstGeom>
+          <a:solidFill>
+            <a:srgbClr val="60727A"/>
+          </a:solidFill>
+          <a:ln>
+            <a:noFill/>
+          </a:ln>
+          <a:effectLst/>
+        </p:spPr>
+        <p:style>
+          <a:lnRef idx="1">
+            <a:schemeClr val="accent1"/>
+          </a:lnRef>
+          <a:fillRef idx="3">
+            <a:schemeClr val="accent1"/>
+          </a:fillRef>
+          <a:effectRef idx="2">
+            <a:schemeClr val="accent1"/>
+          </a:effectRef>
+          <a:fontRef idx="minor">
+            <a:schemeClr val="lt1"/>
+          </a:fontRef>
+        </p:style>
+        <p:txBody>
+          <a:bodyPr/>
+          <a:lstStyle/>
+          <a:p>
+            <a:pPr marL="0" marR="0" lvl="0" indent="0" algn="l" defTabSz="617220" rtl="0" eaLnBrk="1" fontAlgn="auto" latinLnBrk="0" hangingPunct="1">
+              <a:lnSpc>
+                <a:spcPct val="100000"/>
+              </a:lnSpc>
+              <a:spcBef>
+                <a:spcPts val="0"/>
+              </a:spcBef>
+              <a:spcAft>
+                <a:spcPts val="0"/>
+              </a:spcAft>
+              <a:buClrTx/>
+              <a:buSzTx/>
+              <a:buFontTx/>
+              <a:buNone/>
+              <a:tabLst/>
+              <a:defRPr/>
+            </a:pPr>
+            <a:endParaRPr kumimoji="0" lang="en-US" sz="1215" b="0" i="0" u="none" strike="noStrike" kern="1200" cap="none" spc="0" normalizeH="0" baseline="0" noProof="0">
+              <a:ln>
+                <a:noFill/>
+              </a:ln>
+              <a:solidFill>
+                <a:srgbClr val="FFFFFF"/>
+              </a:solidFill>
+              <a:effectLst/>
+              <a:uLnTx/>
+              <a:uFillTx/>
+              <a:latin typeface="Calibri"/>
+              <a:ea typeface="+mn-ea"/>
+              <a:cs typeface="+mn-cs"/>
+            </a:endParaRPr>
+          </a:p>
+        </p:txBody>
+      </p:sp>
+      <p:sp>
+        <p:nvSpPr>
+          <p:cNvPr id="13" name="Rectangle 12">
+            <a:extLst>
+              <a:ext uri="{FF2B5EF4-FFF2-40B4-BE49-F238E27FC236}">
+                <a16:creationId xmlns:a16="http://schemas.microsoft.com/office/drawing/2014/main" id="{FB02D80E-5995-4C54-8387-5893C2C89473}"/>
+              </a:ext>
+              <a:ext uri="{C183D7F6-B498-43B3-948B-1728B52AA6E4}">
+                <adec:decorative xmlns:adec="http://schemas.microsoft.com/office/drawing/2017/decorative" val="1"/>
+              </a:ext>
+            </a:extLst>
+          </p:cNvPr>
+          <p:cNvSpPr>
+            <a:spLocks noGrp="1" noRot="1" noChangeAspect="1" noMove="1" noResize="1" noEditPoints="1" noAdjustHandles="1" noChangeArrowheads="1" noChangeShapeType="1" noTextEdit="1"/>
+          </p:cNvSpPr>
+          <p:nvPr>
+            <p:extLst>
+              <p:ext uri="{386F3935-93C4-4BCD-93E2-E3B085C9AB24}">
+                <p16:designElem xmlns:p16="http://schemas.microsoft.com/office/powerpoint/2015/main" val="1"/>
+              </p:ext>
+            </p:extLst>
+          </p:nvPr>
+        </p:nvSpPr>
+        <p:spPr>
+          <a:xfrm>
+            <a:off x="2863235" y="565785"/>
+            <a:ext cx="2499741" cy="61722"/>
+          </a:xfrm>
+          <a:prstGeom prst="rect">
+            <a:avLst/>
+          </a:prstGeom>
+          <a:solidFill>
+            <a:schemeClr val="accent1"/>
+          </a:solidFill>
+          <a:ln>
+            <a:noFill/>
+          </a:ln>
+          <a:effectLst/>
+        </p:spPr>
+        <p:style>
+          <a:lnRef idx="1">
+            <a:schemeClr val="accent1"/>
+          </a:lnRef>
+          <a:fillRef idx="3">
+            <a:schemeClr val="accent1"/>
+          </a:fillRef>
+          <a:effectRef idx="2">
+            <a:schemeClr val="accent1"/>
+          </a:effectRef>
+          <a:fontRef idx="minor">
+            <a:schemeClr val="lt1"/>
+          </a:fontRef>
+        </p:style>
+        <p:txBody>
+          <a:bodyPr/>
+          <a:lstStyle/>
+          <a:p>
+            <a:pPr marL="0" marR="0" lvl="0" indent="0" algn="l" defTabSz="617220" rtl="0" eaLnBrk="1" fontAlgn="auto" latinLnBrk="0" hangingPunct="1">
+              <a:lnSpc>
+                <a:spcPct val="100000"/>
+              </a:lnSpc>
+              <a:spcBef>
+                <a:spcPts val="0"/>
+              </a:spcBef>
+              <a:spcAft>
+                <a:spcPts val="0"/>
+              </a:spcAft>
+              <a:buClrTx/>
+              <a:buSzTx/>
+              <a:buFontTx/>
+              <a:buNone/>
+              <a:tabLst/>
+              <a:defRPr/>
+            </a:pPr>
+            <a:endParaRPr kumimoji="0" lang="en-US" sz="1215" b="0" i="0" u="none" strike="noStrike" kern="1200" cap="none" spc="0" normalizeH="0" baseline="0" noProof="0">
+              <a:ln>
+                <a:noFill/>
+              </a:ln>
+              <a:solidFill>
+                <a:srgbClr val="FFFFFF"/>
+              </a:solidFill>
+              <a:effectLst/>
+              <a:uLnTx/>
+              <a:uFillTx/>
+              <a:latin typeface="Calibri"/>
+              <a:ea typeface="+mn-ea"/>
+              <a:cs typeface="+mn-cs"/>
+            </a:endParaRPr>
+          </a:p>
+        </p:txBody>
+      </p:sp>
+      <p:sp>
+        <p:nvSpPr>
+          <p:cNvPr id="15" name="Rectangle 14">
+            <a:extLst>
+              <a:ext uri="{FF2B5EF4-FFF2-40B4-BE49-F238E27FC236}">
+                <a16:creationId xmlns:a16="http://schemas.microsoft.com/office/drawing/2014/main" id="{896083C8-1401-4950-AF56-E2FAFE42D656}"/>
+              </a:ext>
+              <a:ext uri="{C183D7F6-B498-43B3-948B-1728B52AA6E4}">
+                <adec:decorative xmlns:adec="http://schemas.microsoft.com/office/drawing/2017/decorative" val="1"/>
+              </a:ext>
+            </a:extLst>
+          </p:cNvPr>
+          <p:cNvSpPr>
+            <a:spLocks noGrp="1" noRot="1" noChangeAspect="1" noMove="1" noResize="1" noEditPoints="1" noAdjustHandles="1" noChangeArrowheads="1" noChangeShapeType="1" noTextEdit="1"/>
+          </p:cNvSpPr>
+          <p:nvPr>
+            <p:extLst>
+              <p:ext uri="{386F3935-93C4-4BCD-93E2-E3B085C9AB24}">
+                <p16:designElem xmlns:p16="http://schemas.microsoft.com/office/powerpoint/2015/main" val="1"/>
+              </p:ext>
+            </p:extLst>
+          </p:nvPr>
+        </p:nvSpPr>
+        <p:spPr>
+          <a:xfrm>
+            <a:off x="5428449" y="563384"/>
+            <a:ext cx="2499741" cy="66524"/>
+          </a:xfrm>
+          <a:prstGeom prst="rect">
+            <a:avLst/>
+          </a:prstGeom>
+          <a:solidFill>
+            <a:srgbClr val="969FA7"/>
+          </a:solidFill>
+          <a:ln>
+            <a:noFill/>
+          </a:ln>
+          <a:effectLst/>
+        </p:spPr>
+        <p:style>
+          <a:lnRef idx="1">
+            <a:schemeClr val="accent1"/>
+          </a:lnRef>
+          <a:fillRef idx="3">
+            <a:schemeClr val="accent1"/>
+          </a:fillRef>
+          <a:effectRef idx="2">
+            <a:schemeClr val="accent1"/>
+          </a:effectRef>
+          <a:fontRef idx="minor">
+            <a:schemeClr val="lt1"/>
+          </a:fontRef>
+        </p:style>
+        <p:txBody>
+          <a:bodyPr/>
+          <a:lstStyle/>
+          <a:p>
+            <a:pPr marL="0" marR="0" lvl="0" indent="0" algn="l" defTabSz="617220" rtl="0" eaLnBrk="1" fontAlgn="auto" latinLnBrk="0" hangingPunct="1">
+              <a:lnSpc>
+                <a:spcPct val="100000"/>
+              </a:lnSpc>
+              <a:spcBef>
+                <a:spcPts val="0"/>
+              </a:spcBef>
+              <a:spcAft>
+                <a:spcPts val="0"/>
+              </a:spcAft>
+              <a:buClrTx/>
+              <a:buSzTx/>
+              <a:buFontTx/>
+              <a:buNone/>
+              <a:tabLst/>
+              <a:defRPr/>
+            </a:pPr>
+            <a:endParaRPr kumimoji="0" lang="en-US" sz="1215" b="0" i="0" u="none" strike="noStrike" kern="1200" cap="none" spc="0" normalizeH="0" baseline="0" noProof="0">
+              <a:ln>
+                <a:noFill/>
+              </a:ln>
+              <a:solidFill>
+                <a:srgbClr val="FFFFFF"/>
+              </a:solidFill>
+              <a:effectLst/>
+              <a:uLnTx/>
+              <a:uFillTx/>
+              <a:latin typeface="Calibri"/>
+              <a:ea typeface="+mn-ea"/>
+              <a:cs typeface="+mn-cs"/>
+            </a:endParaRPr>
+          </a:p>
+        </p:txBody>
+      </p:sp>
+      <p:graphicFrame>
+        <p:nvGraphicFramePr>
+          <p:cNvPr id="5" name="Content Placeholder 2">
+            <a:extLst>
+              <a:ext uri="{FF2B5EF4-FFF2-40B4-BE49-F238E27FC236}">
+                <a16:creationId xmlns:a16="http://schemas.microsoft.com/office/drawing/2014/main" id="{F61B7E67-130C-FD82-8132-74DBD62B80A6}"/>
+              </a:ext>
+            </a:extLst>
+          </p:cNvPr>
+          <p:cNvGraphicFramePr>
+            <a:graphicFrameLocks noGrp="1"/>
+          </p:cNvGraphicFramePr>
+          <p:nvPr>
+            <p:ph idx="1"/>
+          </p:nvPr>
+        </p:nvGraphicFramePr>
+        <p:xfrm>
+          <a:off x="392192" y="1837730"/>
+          <a:ext cx="7445216" cy="2574640"/>
+        </p:xfrm>
+        <a:graphic>
+          <a:graphicData uri="http://schemas.openxmlformats.org/drawingml/2006/diagram">
+            <dgm:relIds xmlns:dgm="http://schemas.openxmlformats.org/drawingml/2006/diagram" xmlns:r="http://schemas.openxmlformats.org/officeDocument/2006/relationships" r:dm="rId3" r:lo="rId4" r:qs="rId5" r:cs="rId6"/>
+          </a:graphicData>
+        </a:graphic>
+      </p:graphicFrame>
+    </p:spTree>
+    <p:extLst>
+      <p:ext uri="{BB962C8B-B14F-4D97-AF65-F5344CB8AC3E}">
+        <p14:creationId xmlns:p14="http://schemas.microsoft.com/office/powerpoint/2010/main" val="18827850"/>
+      </p:ext>
+    </p:extLst>
+  </p:cSld>
+  <p:clrMapOvr>
+    <a:overrideClrMapping bg1="dk1" tx1="lt1" bg2="dk2" tx2="lt2" accent1="accent1" accent2="accent2" accent3="accent3" accent4="accent4" accent5="accent5" accent6="accent6" hlink="hlink" folHlink="folHlink"/>
   </p:clrMapOvr>
 </p:sld>
 </file>
@@ -38710,7 +42840,7 @@
         <p:spPr bwMode="auto">
           <a:xfrm>
             <a:off x="1795940" y="2547105"/>
-            <a:ext cx="692229" cy="300082"/>
+            <a:ext cx="802480" cy="196208"/>
           </a:xfrm>
           <a:prstGeom prst="rect">
             <a:avLst/>
@@ -38724,13 +42854,13 @@
           </a:ln>
         </p:spPr>
         <p:txBody>
-          <a:bodyPr>
+          <a:bodyPr wrap="square">
             <a:spAutoFit/>
           </a:bodyPr>
           <a:lstStyle/>
           <a:p>
             <a:r>
-              <a:rPr lang="en-US" sz="675" b="1">
+              <a:rPr lang="en-US" sz="675" b="1" dirty="0">
                 <a:solidFill>
                   <a:srgbClr val="000000"/>
                 </a:solidFill>
